--- a/Gracenote_AI报告解读_课堂分享.pptx
+++ b/Gracenote_AI报告解读_课堂分享.pptx
@@ -19,9 +19,11 @@
     <p:sldId id="267" r:id="rId13"/>
     <p:sldId id="268" r:id="rId14"/>
     <p:sldId id="269" r:id="rId15"/>
+    <p:sldId id="270" r:id="rId16"/>
+    <p:sldId id="271" r:id="rId17"/>
   </p:sldIdLst>
   <p:notesMasterIdLst>
-    <p:notesMasterId r:id="rId16"/>
+    <p:notesMasterId r:id="rId18"/>
   </p:notesMasterIdLst>
   <p:sldSz cx="12192000" cy="6858000"/>
   <p:notesSz cx="6858000" cy="12192000"/>
@@ -120,38 +122,40 @@
   <p:extLst>
     <p:ext uri="{521415D9-36F7-43E2-AB2F-B90AF26B5E84}">
       <p14:sectionLst xmlns:p14="http://schemas.microsoft.com/office/powerpoint/2010/main">
-        <p14:section name="开场" id="{822c9dde-a76f-22e2-5878-3484e09c8f4b}">
+        <p14:section name="开场" id="{cd12cae7-5102-3bb7-482f-4309740b5675}">
           <p14:sldIdLst>
             <p14:sldId id="256"/>
           </p14:sldIdLst>
         </p14:section>
-        <p14:section name="报告介绍" id="{a75a72f4-5e48-79a6-164a-0390e6dc510d}">
+        <p14:section name="报告介绍" id="{289f321f-4ee6-2466-5e93-1031312149fb}">
           <p14:sldIdLst>
             <p14:sldId id="257"/>
             <p14:sldId id="258"/>
+            <p14:sldId id="259"/>
           </p14:sldIdLst>
         </p14:section>
-        <p14:section name="主要发现" id="{93d6f911-90db-77d9-0e65-b3fdba7c94f4}">
+        <p14:section name="主要发现" id="{e1ee1420-fa8e-147d-07fe-c57b749c3598}">
           <p14:sldIdLst>
-            <p14:sldId id="259"/>
             <p14:sldId id="260"/>
             <p14:sldId id="261"/>
+            <p14:sldId id="262"/>
           </p14:sldIdLst>
         </p14:section>
-        <p14:section name="评价与局限" id="{82509159-bc67-9b4d-0574-3bd147bc46ad}">
+        <p14:section name="评价与局限" id="{32276f2d-0992-0981-6df9-60b7e8b8540b}">
           <p14:sldIdLst>
-            <p14:sldId id="262"/>
             <p14:sldId id="263"/>
             <p14:sldId id="264"/>
             <p14:sldId id="265"/>
             <p14:sldId id="266"/>
             <p14:sldId id="267"/>
             <p14:sldId id="268"/>
+            <p14:sldId id="269"/>
+            <p14:sldId id="270"/>
           </p14:sldIdLst>
         </p14:section>
-        <p14:section name="结论" id="{f45f7586-77b4-0686-ca9d-2d8c726addc1}">
+        <p14:section name="结论" id="{e110f31f-b168-1742-d087-6b445fb9abb5}">
           <p14:sldIdLst>
-            <p14:sldId id="269"/>
+            <p14:sldId id="271"/>
           </p14:sldIdLst>
         </p14:section>
       </p14:sectionLst>
@@ -902,6 +906,365 @@
 </c:chartSpace>
 </file>
 
+<file path=ppt/charts/chart3.xml><?xml version="1.0" encoding="utf-8"?>
+<c:chartSpace xmlns:c="http://schemas.openxmlformats.org/drawingml/2006/chart" xmlns:a="http://schemas.openxmlformats.org/drawingml/2006/main" xmlns:r="http://schemas.openxmlformats.org/officeDocument/2006/relationships">
+  <c:date1904 val="0"/>
+  <c:roundedCorners val="1"/>
+  <c:chart>
+    <c:title>
+      <c:tx>
+        <c:rich>
+          <a:bodyPr/>
+          <a:lstStyle/>
+          <a:p>
+            <a:pPr>
+              <a:defRPr sz="1400" b="0" i="0" u="none" strike="noStrike">
+                <a:solidFill>
+                  <a:srgbClr val="2B1D6B"/>
+                </a:solidFill>
+                <a:latin typeface="+mn-lt"/>
+              </a:defRPr>
+            </a:pPr>
+            <a:r>
+              <a:rPr sz="1400" b="0" i="0" u="none" strike="noStrike">
+                <a:solidFill>
+                  <a:srgbClr val="2B1D6B"/>
+                </a:solidFill>
+                <a:latin typeface="+mn-lt"/>
+              </a:rPr>
+              <a:t>找到想看的节目要几分钟（2025 调查）</a:t>
+            </a:r>
+          </a:p>
+        </c:rich>
+      </c:tx>
+      <c:layout/>
+      <c:overlay val="0"/>
+    </c:title>
+    <c:autoTitleDeleted val="0"/>
+    <c:plotArea>
+      <c:layout/>
+      <c:barChart>
+        <c:barDir val="bar"/>
+        <c:grouping val="clustered"/>
+        <c:varyColors val="0"/>
+        <c:ser>
+          <c:idx val="0"/>
+          <c:order val="0"/>
+          <c:tx>
+            <c:strRef>
+              <c:f>Sheet1!$B$1</c:f>
+              <c:strCache>
+                <c:ptCount val="1"/>
+                <c:pt idx="0">
+                  <c:v>找节目时间</c:v>
+                </c:pt>
+              </c:strCache>
+            </c:strRef>
+          </c:tx>
+          <c:spPr>
+            <a:solidFill>
+              <a:srgbClr val="A99BEA"/>
+            </a:solidFill>
+            <a:effectLst/>
+          </c:spPr>
+          <c:invertIfNegative val="0"/>
+          <c:dLbls>
+            <c:numFmt formatCode="0&quot; 分钟&quot;" sourceLinked="0"/>
+            <c:txPr>
+              <a:bodyPr/>
+              <a:lstStyle/>
+              <a:p>
+                <a:pPr>
+                  <a:defRPr b="0" i="0" strike="noStrike" sz="1200" u="none">
+                    <a:solidFill>
+                      <a:srgbClr val="1C1733"/>
+                    </a:solidFill>
+                    <a:latin typeface="+mn-lt"/>
+                  </a:defRPr>
+                </a:pPr>
+              </a:p>
+            </c:txPr>
+            <c:showLegendKey val="0"/>
+            <c:showVal val="1"/>
+            <c:showCatName val="0"/>
+            <c:showSerName val="0"/>
+            <c:showPercent val="0"/>
+            <c:showBubbleSize val="0"/>
+            <c:showLeaderLines val="0"/>
+          </c:dLbls>
+          <c:dPt>
+            <c:idx val="0"/>
+            <c:invertIfNegative val="0"/>
+            <c:bubble3D val="0"/>
+            <c:spPr>
+              <a:solidFill>
+                <a:srgbClr val="A99BEA"/>
+              </a:solidFill>
+              <a:effectLst/>
+            </c:spPr>
+          </c:dPt>
+          <c:dPt>
+            <c:idx val="1"/>
+            <c:invertIfNegative val="0"/>
+            <c:bubble3D val="0"/>
+            <c:spPr>
+              <a:solidFill>
+                <a:srgbClr val="A99BEA"/>
+              </a:solidFill>
+              <a:effectLst/>
+            </c:spPr>
+          </c:dPt>
+          <c:dPt>
+            <c:idx val="2"/>
+            <c:invertIfNegative val="0"/>
+            <c:bubble3D val="0"/>
+            <c:spPr>
+              <a:solidFill>
+                <a:srgbClr val="A99BEA"/>
+              </a:solidFill>
+              <a:effectLst/>
+            </c:spPr>
+          </c:dPt>
+          <c:dPt>
+            <c:idx val="3"/>
+            <c:invertIfNegative val="0"/>
+            <c:bubble3D val="0"/>
+            <c:spPr>
+              <a:solidFill>
+                <a:srgbClr val="A99BEA"/>
+              </a:solidFill>
+              <a:effectLst/>
+            </c:spPr>
+          </c:dPt>
+          <c:dPt>
+            <c:idx val="4"/>
+            <c:invertIfNegative val="0"/>
+            <c:bubble3D val="0"/>
+            <c:spPr>
+              <a:solidFill>
+                <a:srgbClr val="A99BEA"/>
+              </a:solidFill>
+              <a:effectLst/>
+            </c:spPr>
+          </c:dPt>
+          <c:dPt>
+            <c:idx val="5"/>
+            <c:invertIfNegative val="0"/>
+            <c:bubble3D val="0"/>
+            <c:spPr>
+              <a:solidFill>
+                <a:srgbClr val="5B3FD9"/>
+              </a:solidFill>
+              <a:effectLst/>
+            </c:spPr>
+          </c:dPt>
+          <c:dPt>
+            <c:idx val="6"/>
+            <c:invertIfNegative val="0"/>
+            <c:bubble3D val="0"/>
+            <c:spPr>
+              <a:solidFill>
+                <a:srgbClr val="D9480F"/>
+              </a:solidFill>
+              <a:effectLst/>
+            </c:spPr>
+          </c:dPt>
+          <c:cat>
+            <c:multiLvlStrRef>
+              <c:f>Sheet1!$A$2:$A$8</c:f>
+              <c:multiLvlStrCache>
+                <c:ptCount val="7"/>
+                <c:lvl>
+                  <c:pt idx="0">
+                    <c:v>巴西</c:v>
+                  </c:pt>
+                  <c:pt idx="1">
+                    <c:v>法国</c:v>
+                  </c:pt>
+                  <c:pt idx="2">
+                    <c:v>德国</c:v>
+                  </c:pt>
+                  <c:pt idx="3">
+                    <c:v>墨西哥</c:v>
+                  </c:pt>
+                  <c:pt idx="4">
+                    <c:v>英国</c:v>
+                  </c:pt>
+                  <c:pt idx="5">
+                    <c:v>美国</c:v>
+                  </c:pt>
+                  <c:pt idx="6">
+                    <c:v>六国平均</c:v>
+                  </c:pt>
+                </c:lvl>
+              </c:multiLvlStrCache>
+            </c:multiLvlStrRef>
+          </c:cat>
+          <c:val>
+            <c:numRef>
+              <c:f>Sheet1!$B$2:$B$8</c:f>
+              <c:numCache>
+                <c:formatCode>General</c:formatCode>
+                <c:ptCount val="7"/>
+                <c:pt idx="0">
+                  <c:v>12</c:v>
+                </c:pt>
+                <c:pt idx="1">
+                  <c:v>26</c:v>
+                </c:pt>
+                <c:pt idx="2">
+                  <c:v>11</c:v>
+                </c:pt>
+                <c:pt idx="3">
+                  <c:v>11</c:v>
+                </c:pt>
+                <c:pt idx="4">
+                  <c:v>12</c:v>
+                </c:pt>
+                <c:pt idx="5">
+                  <c:v>12</c:v>
+                </c:pt>
+                <c:pt idx="6">
+                  <c:v>14</c:v>
+                </c:pt>
+              </c:numCache>
+            </c:numRef>
+          </c:val>
+        </c:ser>
+        <c:dLbls>
+          <c:numFmt formatCode="0&quot; 分钟&quot;" sourceLinked="0"/>
+          <c:txPr>
+            <a:bodyPr/>
+            <a:lstStyle/>
+            <a:p>
+              <a:pPr>
+                <a:defRPr b="0" i="0" strike="noStrike" sz="1200" u="none">
+                  <a:solidFill>
+                    <a:srgbClr val="1C1733"/>
+                  </a:solidFill>
+                  <a:latin typeface="+mn-lt"/>
+                </a:defRPr>
+              </a:pPr>
+            </a:p>
+          </c:txPr>
+          <c:showLegendKey val="0"/>
+          <c:showVal val="1"/>
+          <c:showCatName val="0"/>
+          <c:showSerName val="0"/>
+          <c:showPercent val="0"/>
+          <c:showBubbleSize val="0"/>
+          <c:showLeaderLines val="0"/>
+        </c:dLbls>
+        <c:gapWidth val="45"/>
+        <c:overlap val="0"/>
+        <c:axId val="2094734554"/>
+        <c:axId val="2094734552"/>
+        <c:axId val="2094734556"/>
+      </c:barChart>
+      <c:catAx>
+        <c:axId val="2094734554"/>
+        <c:scaling>
+          <c:orientation val="maxMin"/>
+        </c:scaling>
+        <c:delete val="0"/>
+        <c:axPos val="l"/>
+        <c:numFmt formatCode="General" sourceLinked="1"/>
+        <c:majorTickMark val="out"/>
+        <c:minorTickMark val="none"/>
+        <c:tickLblPos val="nextTo"/>
+        <c:spPr>
+          <a:ln w="12700" cap="flat">
+            <a:noFill/>
+            <a:prstDash val="solid"/>
+            <a:round/>
+          </a:ln>
+        </c:spPr>
+        <c:txPr>
+          <a:bodyPr/>
+          <a:lstStyle/>
+          <a:p>
+            <a:pPr>
+              <a:defRPr sz="1200" b="0" i="0" u="none" strike="noStrike">
+                <a:solidFill>
+                  <a:srgbClr val="1C1733"/>
+                </a:solidFill>
+                <a:latin typeface="+mn-lt"/>
+              </a:defRPr>
+            </a:pPr>
+            <a:endParaRPr lang="en-US"/>
+          </a:p>
+        </c:txPr>
+        <c:crossAx val="2094734552"/>
+        <c:crosses val="autoZero"/>
+        <c:auto val="1"/>
+        <c:lblAlgn val="ctr"/>
+        <c:noMultiLvlLbl val="1"/>
+      </c:catAx>
+      <c:valAx>
+        <c:axId val="2094734552"/>
+        <c:scaling>
+          <c:orientation val="minMax"/>
+          <c:max val="32"/>
+          <c:min val="0"/>
+        </c:scaling>
+        <c:delete val="1"/>
+        <c:axPos val="b"/>
+        <c:numFmt formatCode="General" sourceLinked="0"/>
+        <c:majorTickMark val="out"/>
+        <c:minorTickMark val="none"/>
+        <c:tickLblPos val="low"/>
+        <c:spPr>
+          <a:ln w="12700" cap="flat">
+            <a:solidFill>
+              <a:srgbClr val="888888"/>
+            </a:solidFill>
+            <a:prstDash val="solid"/>
+            <a:round/>
+          </a:ln>
+        </c:spPr>
+        <c:txPr>
+          <a:bodyPr/>
+          <a:lstStyle/>
+          <a:p>
+            <a:pPr>
+              <a:defRPr sz="1200" b="0" i="0" u="none" strike="noStrike">
+                <a:solidFill>
+                  <a:srgbClr val="000000"/>
+                </a:solidFill>
+                <a:latin typeface="Arial"/>
+              </a:defRPr>
+            </a:pPr>
+            <a:endParaRPr lang="en-US"/>
+          </a:p>
+        </c:txPr>
+        <c:crossAx val="2094734554"/>
+        <c:crosses val="autoZero"/>
+        <c:crossBetween val="between"/>
+      </c:valAx>
+      <c:spPr>
+        <a:noFill/>
+        <a:ln>
+          <a:noFill/>
+        </a:ln>
+        <a:effectLst/>
+      </c:spPr>
+    </c:plotArea>
+    <c:plotVisOnly val="1"/>
+    <c:dispBlanksAs val="span"/>
+  </c:chart>
+  <c:spPr>
+    <a:noFill/>
+    <a:ln>
+      <a:noFill/>
+    </a:ln>
+    <a:effectLst/>
+  </c:spPr>
+  <c:externalData r:id="rId1">
+    <c:autoUpdate val="0"/>
+  </c:externalData>
+</c:chartSpace>
+</file>
+
 <file path=ppt/notesMasters/notesMaster1.xml><?xml version="1.0" encoding="utf-8"?>
 <p:notesMaster xmlns:a="http://schemas.openxmlformats.org/drawingml/2006/main" xmlns:r="http://schemas.openxmlformats.org/officeDocument/2006/relationships" xmlns:p="http://schemas.openxmlformats.org/presentationml/2006/main">
   <p:cSld>
@@ -1385,7 +1748,7 @@
           <a:p>
             <a:r>
               <a:rPr lang="en-US" dirty="0"/>
-              <a:t>第三个局限最像春晚案例。报告拿 Pew 的 30% 和自己的 54% 对比，说几个月内使用频率在加速。但我们用春晚的四个角度对一下：对象不同，Pew 是所有 13 到 17 岁青少年，Gracenote 是 13 到 14 岁的 AI 用户；方法不同，Pew 是基于随机地址抽样的样本库并加权；时间也不同。所以 30% 到 54% 的差距，主要可能来自分母不同，不能解释成增长。</a:t>
+              <a:t>第二个局限是子样本。报告把 Alpha 世代定义为 2010 到 2024 年出生，但调查最小只到 13 岁，所以'Alpha 世代'其实只是 13 到 14 岁这两岁。每个年龄组多少人报告没写，分组数字的误差就没法估计。2025 年的调查每个国家 500 人，所以'美国人'的数字只基于 500 人左右，误差至少正负 4.4 个百分点。还有一个小细节：五个年龄组的核查比例简单平均是 71.6%，总体却是 75%，说明各组人数或权重不同，但报告没交代。</a:t>
             </a:r>
             <a:endParaRPr lang="en-US" dirty="0"/>
           </a:p>
@@ -1473,7 +1836,7 @@
           <a:p>
             <a:r>
               <a:rPr lang="en-US" dirty="0"/>
-              <a:t>第四个局限是指标类型。报告用了四种完全不同的数据：问卷里说'会考虑退订'是意向；5.5% 的月流失率是实际行为；3185 亿美元是 PwC 的模型预测；三分之二找对平台是机器测试，而且测试方案没公开。报告把它们串成'找不到节目导致退订，所以需要 AI 和可信数据'。但它没有追踪同一批人，也没有做实验，所以这条因果链没有被证明。</a:t>
+              <a:t>第三个局限是我对照 Gracenote 上一份报告原文发现的。2026 报告里的'平均找节目 14 分钟'，其实是巴西、法国、德国、墨西哥、英国、美国六国的简单平均，美国自己是 12 分钟，法国一国 26 分钟把平均拉高了。但报告把 14 分钟和美国尼尔森的收视数据画在了同一张图里。摘要里'18 到 34 岁 54% 会取消订阅'也和六国数据吻合。还有第 9 页 32% 和第 12 页 34% 对不上，原因很可能就是一个是六国平均、一个是美国。也就是说，读者很容易把六国数字当成美国数字。</a:t>
             </a:r>
             <a:endParaRPr lang="en-US" dirty="0"/>
           </a:p>
@@ -1561,7 +1924,7 @@
           <a:p>
             <a:r>
               <a:rPr lang="en-US" dirty="0"/>
-              <a:t>第五个局限是几处引用和口径。比如 USC 那个 38%，原论文里只是一个知识库在一个指标下的数，另一个库只有 3% 到 4%；Deloitte 的 41% 原文是所有消费者，报告写成了订户；摘要说'会取消'，正文是'会考虑取消'。还有两处报告内部的数字对不上或分母没写清。这些不一定推翻大方向，但提醒我们引用二手数据要回原文核对。</a:t>
+              <a:t>第三个局限最像春晚案例。报告拿 Pew 的 30% 和自己的 54% 对比，说几个月内使用频率在加速。但我们用春晚的四个角度对一下：对象不同，Pew 是所有 13 到 17 岁青少年，Gracenote 是 13 到 14 岁的 AI 用户；方法不同，Pew 是基于随机地址抽样的样本库并加权；时间也不同。关键是分母：Pew 原文是 64% 的青少年用过聊天机器人，约 3 成每天用，这 3 成是对所有青少年算的。换成和 Gracenote 一样的'使用者'分母，大约是 47%，和 54% 只差 7 个百分点左右。所以表面上 24 个百分点的差距，大部分来自分母不同，不能解释成增长。</a:t>
             </a:r>
             <a:endParaRPr lang="en-US" dirty="0"/>
           </a:p>
@@ -1649,7 +2012,7 @@
           <a:p>
             <a:r>
               <a:rPr lang="en-US" dirty="0"/>
-              <a:t>评价也要看优点。报告公布了样本量、时间、年龄、方式和筛选条件，每张图都有读法和来源，还把收视测量和问卷结合起来。我还用图里的数字复算了几项，比如授权剧比原创剧多 81% 的观看分钟、CTV 占 54%，都算得上。所以报告内部是自洽的，问题主要在样本代表谁、数据能推出什么结论。</a:t>
+              <a:t>第五个局限是指标类型。报告用了四种完全不同的数据：问卷里说'可能会退订'是意向，而且是六国口径；5.5% 的月流失率是实际行为，但另一家机构 Antenna 测得 2019 年就已经是 4.1%，和报告说的 2% 差了一倍，说明定义不同；3185 亿美元是 PwC 对全球 54 个市场的预测，不是美国；三分之二找对平台是多国合并的测试结果，ChatGPT 在美英德约八成正确，在法意西不到三成。报告把它们串成'找不到节目导致退订，所以需要 AI 和可信数据'。但它没有追踪同一批人，也没有做实验，所以这条因果链没有被证明。</a:t>
             </a:r>
             <a:endParaRPr lang="en-US" dirty="0"/>
           </a:p>
@@ -1737,7 +2100,7 @@
           <a:p>
             <a:r>
               <a:rPr lang="en-US" dirty="0"/>
-              <a:t>总结一下我的评价。这份报告可以当作行业方向的信号：年轻人在把 AI 当成找内容的入口，但并不完全信任它。它不宜被当成对美国人的精确估计，也不能证明找不到节目会导致退订。要更可信，需要公布样本来源、加权、回应率和各组人数。另外，报告的结论正好是 Gracenote 自己的业务，这提醒我们细看方法，但不能因此就说数据错。最后留一个问题：如果要验证'找不到节目导致退订'，你会怎么设计调查？谢谢大家。</a:t>
+              <a:t>第六个局限是几处引用和口径。比如 USC 那个 38%，原论文里只是一个知识库在一个指标下的数，另一个库只有 3% 到 4%；Deloitte 的 41% 原文是所有消费者，报告写成了订户；摘要说'会取消'，正文是'会考虑取消'。PwC 的 3185 亿美元其实是全球 54 个市场的合计；核查图里 83% 大于 58%，分母没写清。这些不一定推翻大方向，但提醒我们引用二手数据要回原文核对。</a:t>
             </a:r>
             <a:endParaRPr lang="en-US" dirty="0"/>
           </a:p>
@@ -1761,6 +2124,182 @@
             <a:fld id="{F7021451-1387-4CA6-816F-3879F97B5CBC}" type="slidenum">
               <a:rPr lang="en-US"/>
               <a:t>14</a:t>
+            </a:fld>
+            <a:endParaRPr lang="en-US"/>
+          </a:p>
+        </p:txBody>
+      </p:sp>
+    </p:spTree>
+    <p:extLst>
+      <p:ext uri="{BB962C8B-B14F-4D97-AF65-F5344CB8AC3E}">
+        <p14:creationId xmlns:p14="http://schemas.microsoft.com/office/powerpoint/2010/main" val="1024086991"/>
+      </p:ext>
+    </p:extLst>
+  </p:cSld>
+  <p:clrMapOvr>
+    <a:masterClrMapping/>
+  </p:clrMapOvr>
+</p:notes>
+</file>
+
+<file path=ppt/notesSlides/notesSlide15.xml><?xml version="1.0" encoding="utf-8"?>
+<p:notes xmlns:a="http://schemas.openxmlformats.org/drawingml/2006/main" xmlns:r="http://schemas.openxmlformats.org/officeDocument/2006/relationships" xmlns:p="http://schemas.openxmlformats.org/presentationml/2006/main">
+  <p:cSld>
+    <p:spTree>
+      <p:nvGrpSpPr>
+        <p:cNvPr id="1" name=""/>
+        <p:cNvGrpSpPr/>
+        <p:nvPr/>
+      </p:nvGrpSpPr>
+      <p:grpSpPr>
+        <a:xfrm>
+          <a:off x="0" y="0"/>
+          <a:ext cx="0" cy="0"/>
+          <a:chOff x="0" y="0"/>
+          <a:chExt cx="0" cy="0"/>
+        </a:xfrm>
+      </p:grpSpPr>
+      <p:sp>
+        <p:nvSpPr>
+          <p:cNvPr id="2" name="Slide Image Placeholder 1"/>
+          <p:cNvSpPr>
+            <a:spLocks noGrp="1" noRot="1" noChangeAspect="1"/>
+          </p:cNvSpPr>
+          <p:nvPr>
+            <p:ph type="sldImg"/>
+          </p:nvPr>
+        </p:nvSpPr>
+        <p:spPr/>
+      </p:sp>
+      <p:sp>
+        <p:nvSpPr>
+          <p:cNvPr id="3" name="Notes Placeholder 2"/>
+          <p:cNvSpPr>
+            <a:spLocks noGrp="1"/>
+          </p:cNvSpPr>
+          <p:nvPr>
+            <p:ph type="body" idx="1"/>
+          </p:nvPr>
+        </p:nvSpPr>
+        <p:spPr/>
+        <p:txBody>
+          <a:bodyPr/>
+          <a:lstStyle/>
+          <a:p>
+            <a:r>
+              <a:rPr lang="en-US" dirty="0"/>
+              <a:t>评价也要看优点。报告公布了样本量、时间、年龄、方式和筛选条件，每张图都有读法和来源，还把收视测量和问卷结合起来。我还用图里的数字复算了几项，比如授权剧比原创剧多 81% 的观看分钟、CTV 占 54%，都算得上。所以报告内部是自洽的，问题主要在样本代表谁、数据能推出什么结论。</a:t>
+            </a:r>
+            <a:endParaRPr lang="en-US" dirty="0"/>
+          </a:p>
+        </p:txBody>
+      </p:sp>
+      <p:sp>
+        <p:nvSpPr>
+          <p:cNvPr id="4" name="Slide Number Placeholder 3"/>
+          <p:cNvSpPr>
+            <a:spLocks noGrp="1"/>
+          </p:cNvSpPr>
+          <p:nvPr>
+            <p:ph type="sldNum" sz="quarter" idx="10"/>
+          </p:nvPr>
+        </p:nvSpPr>
+        <p:spPr/>
+        <p:txBody>
+          <a:bodyPr/>
+          <a:lstStyle/>
+          <a:p>
+            <a:fld id="{F7021451-1387-4CA6-816F-3879F97B5CBC}" type="slidenum">
+              <a:rPr lang="en-US"/>
+              <a:t>15</a:t>
+            </a:fld>
+            <a:endParaRPr lang="en-US"/>
+          </a:p>
+        </p:txBody>
+      </p:sp>
+    </p:spTree>
+    <p:extLst>
+      <p:ext uri="{BB962C8B-B14F-4D97-AF65-F5344CB8AC3E}">
+        <p14:creationId xmlns:p14="http://schemas.microsoft.com/office/powerpoint/2010/main" val="1024086991"/>
+      </p:ext>
+    </p:extLst>
+  </p:cSld>
+  <p:clrMapOvr>
+    <a:masterClrMapping/>
+  </p:clrMapOvr>
+</p:notes>
+</file>
+
+<file path=ppt/notesSlides/notesSlide16.xml><?xml version="1.0" encoding="utf-8"?>
+<p:notes xmlns:a="http://schemas.openxmlformats.org/drawingml/2006/main" xmlns:r="http://schemas.openxmlformats.org/officeDocument/2006/relationships" xmlns:p="http://schemas.openxmlformats.org/presentationml/2006/main">
+  <p:cSld>
+    <p:spTree>
+      <p:nvGrpSpPr>
+        <p:cNvPr id="1" name=""/>
+        <p:cNvGrpSpPr/>
+        <p:nvPr/>
+      </p:nvGrpSpPr>
+      <p:grpSpPr>
+        <a:xfrm>
+          <a:off x="0" y="0"/>
+          <a:ext cx="0" cy="0"/>
+          <a:chOff x="0" y="0"/>
+          <a:chExt cx="0" cy="0"/>
+        </a:xfrm>
+      </p:grpSpPr>
+      <p:sp>
+        <p:nvSpPr>
+          <p:cNvPr id="2" name="Slide Image Placeholder 1"/>
+          <p:cNvSpPr>
+            <a:spLocks noGrp="1" noRot="1" noChangeAspect="1"/>
+          </p:cNvSpPr>
+          <p:nvPr>
+            <p:ph type="sldImg"/>
+          </p:nvPr>
+        </p:nvSpPr>
+        <p:spPr/>
+      </p:sp>
+      <p:sp>
+        <p:nvSpPr>
+          <p:cNvPr id="3" name="Notes Placeholder 2"/>
+          <p:cNvSpPr>
+            <a:spLocks noGrp="1"/>
+          </p:cNvSpPr>
+          <p:nvPr>
+            <p:ph type="body" idx="1"/>
+          </p:nvPr>
+        </p:nvSpPr>
+        <p:spPr/>
+        <p:txBody>
+          <a:bodyPr/>
+          <a:lstStyle/>
+          <a:p>
+            <a:r>
+              <a:rPr lang="en-US" dirty="0"/>
+              <a:t>总结一下我的评价。这份报告可以当作行业方向的信号：年轻人在把 AI 当成找内容的入口，但并不完全信任它。它不宜被当成对美国人的精确估计，因为有些数字其实是六国平均，也不能证明找不到节目会导致退订。要更可信，需要公布样本来源、加权、回应率和各组人数。另外，报告的结论正好是 Gracenote 自己的业务，这提醒我们细看方法，但不能因此就说数据错。最后留一个问题：如果要验证'找不到节目导致退订'，你会怎么设计调查？谢谢大家。</a:t>
+            </a:r>
+            <a:endParaRPr lang="en-US" dirty="0"/>
+          </a:p>
+        </p:txBody>
+      </p:sp>
+      <p:sp>
+        <p:nvSpPr>
+          <p:cNvPr id="4" name="Slide Number Placeholder 3"/>
+          <p:cNvSpPr>
+            <a:spLocks noGrp="1"/>
+          </p:cNvSpPr>
+          <p:nvPr>
+            <p:ph type="sldNum" sz="quarter" idx="10"/>
+          </p:nvPr>
+        </p:nvSpPr>
+        <p:spPr/>
+        <p:txBody>
+          <a:bodyPr/>
+          <a:lstStyle/>
+          <a:p>
+            <a:fld id="{F7021451-1387-4CA6-816F-3879F97B5CBC}" type="slidenum">
+              <a:rPr lang="en-US"/>
+              <a:t>16</a:t>
             </a:fld>
             <a:endParaRPr lang="en-US"/>
           </a:p>
@@ -2001,7 +2540,7 @@
           <a:p>
             <a:r>
               <a:rPr lang="en-US" dirty="0"/>
-              <a:t>报告的主要结论有六个数字。紫色来自 2026 年的 AI 调查：13 到 14 岁的受访者有 54% 每天用 AI 聊天机器人，80% 说用得更多了；75% 的人会核查 AI 的答案；52% 认为 AI 有可能成为最常用的娱乐信息来源。青色来自 2025 年的流媒体调查：平均找一个节目要 14 分钟，18 到 34 岁有 54% 说找不到会考虑退订。注意这两组数字来自两份对象不同的调查。</a:t>
+              <a:t>我把报告用到的 11 个数据来源逐一查了一遍，按方法公开的程度标了颜色。青色是方法公开的：尼尔森的收视测量、Pew、Deloitte 和 USC 的论文。橙色是关键信息没公开的。值得注意的是，报告最核心的两份 Gracenote 自己的问卷，恰恰都没有公开样本怎么招募、怎么加权、回应率多少。</a:t>
             </a:r>
             <a:endParaRPr lang="en-US" dirty="0"/>
           </a:p>
@@ -2089,7 +2628,7 @@
           <a:p>
             <a:r>
               <a:rPr lang="en-US" dirty="0"/>
-              <a:t>这张图是每天使用 AI 聊天机器人的比例。13 到 14 岁最高，54%；婴儿潮一代最低，20%。平均每天用的 38%，加上每周用好几次的 38%，就是报告说的约四分之三。这里先请大家记住分母：这是 AI 聊天机器人用户里的比例，不是全体美国人。</a:t>
+              <a:t>报告的主要结论有六个数字。紫色来自 2026 年的 AI 调查：13 到 14 岁的受访者有 54% 每天用 AI 聊天机器人，80% 说用得更多了；75% 的人会核查 AI 的答案；52% 认为 AI 有可能成为最常用的娱乐信息来源。青色来自 2025 年的流媒体调查：平均找一个节目要 14 分钟，18 到 34 岁有 54% 说找不到可能会退订。注意青色数字是六个国家的平均，美国自己找节目是 12 分钟，后面会细讲。</a:t>
             </a:r>
             <a:endParaRPr lang="en-US" dirty="0"/>
           </a:p>
@@ -2177,7 +2716,7 @@
           <a:p>
             <a:r>
               <a:rPr lang="en-US" dirty="0"/>
-              <a:t>但用得多，不等于信得过。每个年龄组都觉得传统搜索比 AI 更准，平均 92% 对 85%。75% 的人会核查 AI 的答案，而且最常见的核查方式恰恰是再去用传统搜索查一遍。77% 对 AI 结果有顾虑，主要担心信息过时，或者听起来对但其实是错的。报告由此得出：AI 必须接入可信的数据。</a:t>
+              <a:t>这张图是每天使用 AI 聊天机器人的比例。13 到 14 岁最高，54%；婴儿潮一代最低，20%。平均每天用的 38%，加上每周用好几次的 38%，就是报告说的约四分之三。这里先请大家记住分母：这是 AI 聊天机器人用户里的比例，不是全体美国人。</a:t>
             </a:r>
             <a:endParaRPr lang="en-US" dirty="0"/>
           </a:p>
@@ -2265,7 +2804,7 @@
           <a:p>
             <a:r>
               <a:rPr lang="en-US" dirty="0"/>
-              <a:t>接下来是评价。课上讲春晚满意度调查，央视说 81.6% 叫好，新浪网只有 11.5%，原因在于调查对象、研究总体、研究方法和调查时间不同。老师的提醒是：比起结果，更要看方法和过程。我就用这四个角度来检查这份报告，下面五个局限分别对应这四个角度。</a:t>
+              <a:t>但用得多，不等于信得过。每个年龄组都觉得传统搜索比 AI 更准，平均 92% 对 85%。75% 的人会核查 AI 的答案，而且最常见的核查方式恰恰是再去用传统搜索查一遍。77% 对 AI 结果有顾虑，主要担心信息过时，或者听起来对但其实是错的。报告由此得出：AI 必须接入可信的数据。</a:t>
             </a:r>
             <a:endParaRPr lang="en-US" dirty="0"/>
           </a:p>
@@ -2353,7 +2892,7 @@
           <a:p>
             <a:r>
               <a:rPr lang="en-US" dirty="0"/>
-              <a:t>第一个局限：4003 人代表的是谁？报告写得很清楚，对象是互联网和 AI 聊天机器人用户，是一层层收窄的人群。但它没说从哪里招人、是不是概率抽样、怎么加权、回应率多少。所以结论最严格只能说'这次接受调查的 AI 用户'。可报告正文常常写成'美国消费者''美国人'。这和课上 Durex 网络调查的问题一样：网络样本能不能反映总体结构。我不是说数据错了，而是凭现有说明判断不了。</a:t>
+              <a:t>接下来是评价。课上讲春晚满意度调查，央视说 81.6% 叫好，新浪网只有 11.5%，原因在于调查对象、研究总体、研究方法和调查时间不同。老师的提醒是：比起结果，更要看方法和过程。我就用这四个角度来检查这份报告，下面六个局限分别对应这四个角度。</a:t>
             </a:r>
             <a:endParaRPr lang="en-US" dirty="0"/>
           </a:p>
@@ -2441,7 +2980,7 @@
           <a:p>
             <a:r>
               <a:rPr lang="en-US" dirty="0"/>
-              <a:t>第二个局限是子样本。报告把 Alpha 世代定义为 2010 到 2024 年出生，但调查最小只到 13 岁，所以'Alpha 世代'其实只是 13 到 14 岁这两岁。每个年龄组多少人报告没写，分组数字的误差就没法估计。2025 年的调查分 6 国，美国人的数字可能只有 500 人左右。还有一个小细节：五个年龄组的核查比例简单平均是 71.6%，总体却是 75%，说明各组人数或权重不同，但报告没交代。</a:t>
+              <a:t>第一个局限：4003 人代表的是谁？报告写得很清楚，对象是互联网和 AI 聊天机器人用户，是一层层收窄的人群。但它没说从哪里招人、是不是概率抽样、怎么加权、回应率多少。所以结论最严格只能说'这次接受调查的 AI 用户'。可报告正文常常写成'美国消费者''美国人'。这和课上 Durex 网络调查的问题一样：网络样本能不能反映总体结构。我不是说数据错了，而是凭现有说明判断不了。</a:t>
             </a:r>
             <a:endParaRPr lang="en-US" dirty="0"/>
           </a:p>
@@ -3653,7 +4192,7 @@
                   <a:schemeClr val="tx2"/>
                 </a:solidFill>
               </a:rPr>
-              <a:t>局限三：30% 到 54%，不能直接说“增长”</a:t>
+              <a:t>局限二：“Alpha 世代”其实只有 13–14 岁</a:t>
             </a:r>
             <a:endParaRPr lang="en-US" sz="3000" dirty="0"/>
           </a:p>
@@ -3667,8 +4206,8 @@
         </p:nvSpPr>
         <p:spPr>
           <a:xfrm>
-            <a:off x="9509760" y="566928"/>
-            <a:ext cx="2103120" cy="384048"/>
+            <a:off x="9692640" y="566928"/>
+            <a:ext cx="1920240" cy="384048"/>
           </a:xfrm>
           <a:prstGeom prst="roundRect">
             <a:avLst>
@@ -3702,6 +4241,1336 @@
         </p:blipFill>
         <p:spPr>
           <a:xfrm>
+            <a:off x="9838944" y="667512"/>
+            <a:ext cx="182880" cy="182880"/>
+          </a:xfrm>
+          <a:prstGeom prst="rect">
+            <a:avLst/>
+          </a:prstGeom>
+        </p:spPr>
+      </p:pic>
+      <p:sp>
+        <p:nvSpPr>
+          <p:cNvPr id="5" name="角度标签文字"/>
+          <p:cNvSpPr txBox="1"/>
+          <p:nvPr/>
+        </p:nvSpPr>
+        <p:spPr>
+          <a:xfrm>
+            <a:off x="10104120" y="566928"/>
+            <a:ext cx="1417320" cy="384048"/>
+          </a:xfrm>
+          <a:prstGeom prst="rect">
+            <a:avLst/>
+          </a:prstGeom>
+          <a:noFill/>
+          <a:ln/>
+        </p:spPr>
+        <p:txBody>
+          <a:bodyPr wrap="square" lIns="0" tIns="0" rIns="0" bIns="0" rtlCol="0" anchor="ctr"/>
+          <a:lstStyle/>
+          <a:p>
+            <a:pPr indent="0" marL="0">
+              <a:buNone/>
+            </a:pPr>
+            <a:r>
+              <a:rPr lang="en-US" sz="1200" dirty="0">
+                <a:solidFill>
+                  <a:schemeClr val="tx2"/>
+                </a:solidFill>
+              </a:rPr>
+              <a:t>调查对象 · 样本量</a:t>
+            </a:r>
+            <a:endParaRPr lang="en-US" sz="1200" dirty="0"/>
+          </a:p>
+        </p:txBody>
+      </p:sp>
+      <p:sp>
+        <p:nvSpPr>
+          <p:cNvPr id="6" name="时间轴标题"/>
+          <p:cNvSpPr txBox="1"/>
+          <p:nvPr/>
+        </p:nvSpPr>
+        <p:spPr>
+          <a:xfrm>
+            <a:off x="548640" y="1371600"/>
+            <a:ext cx="7315200" cy="365760"/>
+          </a:xfrm>
+          <a:prstGeom prst="rect">
+            <a:avLst/>
+          </a:prstGeom>
+          <a:noFill/>
+          <a:ln/>
+        </p:spPr>
+        <p:txBody>
+          <a:bodyPr wrap="square" lIns="0" tIns="0" rIns="0" bIns="0" rtlCol="0" anchor="ctr"/>
+          <a:lstStyle/>
+          <a:p>
+            <a:pPr indent="0" marL="0">
+              <a:buNone/>
+            </a:pPr>
+            <a:r>
+              <a:rPr lang="en-US" sz="1500" b="1" dirty="0">
+                <a:solidFill>
+                  <a:schemeClr val="tx2"/>
+                </a:solidFill>
+              </a:rPr>
+              <a:t>报告定义：Alpha 世代 = 2010–2024 年出生</a:t>
+            </a:r>
+            <a:endParaRPr lang="en-US" sz="1500" dirty="0"/>
+          </a:p>
+        </p:txBody>
+      </p:sp>
+      <p:sp>
+        <p:nvSpPr>
+          <p:cNvPr id="7" name="时间轴"/>
+          <p:cNvSpPr/>
+          <p:nvPr/>
+        </p:nvSpPr>
+        <p:spPr>
+          <a:xfrm>
+            <a:off x="822960" y="2148840"/>
+            <a:ext cx="10515600" cy="384048"/>
+          </a:xfrm>
+          <a:prstGeom prst="roundRect">
+            <a:avLst>
+              <a:gd name="adj" fmla="val 50000"/>
+            </a:avLst>
+          </a:prstGeom>
+          <a:solidFill>
+            <a:schemeClr val="bg2"/>
+          </a:solidFill>
+          <a:ln w="12700">
+            <a:solidFill>
+              <a:schemeClr val="accent6"/>
+            </a:solidFill>
+            <a:prstDash val="solid"/>
+          </a:ln>
+        </p:spPr>
+      </p:sp>
+      <p:sp>
+        <p:nvSpPr>
+          <p:cNvPr id="8" name="样本覆盖段"/>
+          <p:cNvSpPr/>
+          <p:nvPr/>
+        </p:nvSpPr>
+        <p:spPr>
+          <a:xfrm>
+            <a:off x="1524000" y="2148840"/>
+            <a:ext cx="1402080" cy="384048"/>
+          </a:xfrm>
+          <a:prstGeom prst="roundRect">
+            <a:avLst>
+              <a:gd name="adj" fmla="val 50000"/>
+            </a:avLst>
+          </a:prstGeom>
+          <a:solidFill>
+            <a:schemeClr val="accent3"/>
+          </a:solidFill>
+          <a:ln w="12700">
+            <a:solidFill>
+              <a:schemeClr val="accent3"/>
+            </a:solidFill>
+            <a:prstDash val="solid"/>
+          </a:ln>
+        </p:spPr>
+      </p:sp>
+      <p:sp>
+        <p:nvSpPr>
+          <p:cNvPr id="9" name="年份2010"/>
+          <p:cNvSpPr txBox="1"/>
+          <p:nvPr/>
+        </p:nvSpPr>
+        <p:spPr>
+          <a:xfrm>
+            <a:off x="457200" y="2606040"/>
+            <a:ext cx="731520" cy="274320"/>
+          </a:xfrm>
+          <a:prstGeom prst="rect">
+            <a:avLst/>
+          </a:prstGeom>
+          <a:noFill/>
+          <a:ln/>
+        </p:spPr>
+        <p:txBody>
+          <a:bodyPr wrap="square" lIns="0" tIns="0" rIns="0" bIns="0" rtlCol="0" anchor="ctr"/>
+          <a:lstStyle/>
+          <a:p>
+            <a:pPr algn="ctr" indent="0" marL="0">
+              <a:buNone/>
+            </a:pPr>
+            <a:r>
+              <a:rPr lang="en-US" sz="1100" dirty="0">
+                <a:solidFill>
+                  <a:schemeClr val="accent5"/>
+                </a:solidFill>
+              </a:rPr>
+              <a:t>2010</a:t>
+            </a:r>
+            <a:endParaRPr lang="en-US" sz="1100" dirty="0"/>
+          </a:p>
+        </p:txBody>
+      </p:sp>
+      <p:sp>
+        <p:nvSpPr>
+          <p:cNvPr id="10" name="年份2014"/>
+          <p:cNvSpPr txBox="1"/>
+          <p:nvPr/>
+        </p:nvSpPr>
+        <p:spPr>
+          <a:xfrm>
+            <a:off x="3261360" y="2606040"/>
+            <a:ext cx="731520" cy="274320"/>
+          </a:xfrm>
+          <a:prstGeom prst="rect">
+            <a:avLst/>
+          </a:prstGeom>
+          <a:noFill/>
+          <a:ln/>
+        </p:spPr>
+        <p:txBody>
+          <a:bodyPr wrap="square" lIns="0" tIns="0" rIns="0" bIns="0" rtlCol="0" anchor="ctr"/>
+          <a:lstStyle/>
+          <a:p>
+            <a:pPr algn="ctr" indent="0" marL="0">
+              <a:buNone/>
+            </a:pPr>
+            <a:r>
+              <a:rPr lang="en-US" sz="1100" dirty="0">
+                <a:solidFill>
+                  <a:schemeClr val="accent5"/>
+                </a:solidFill>
+              </a:rPr>
+              <a:t>2014</a:t>
+            </a:r>
+            <a:endParaRPr lang="en-US" sz="1100" dirty="0"/>
+          </a:p>
+        </p:txBody>
+      </p:sp>
+      <p:sp>
+        <p:nvSpPr>
+          <p:cNvPr id="11" name="年份2018"/>
+          <p:cNvSpPr txBox="1"/>
+          <p:nvPr/>
+        </p:nvSpPr>
+        <p:spPr>
+          <a:xfrm>
+            <a:off x="6065520" y="2606040"/>
+            <a:ext cx="731520" cy="274320"/>
+          </a:xfrm>
+          <a:prstGeom prst="rect">
+            <a:avLst/>
+          </a:prstGeom>
+          <a:noFill/>
+          <a:ln/>
+        </p:spPr>
+        <p:txBody>
+          <a:bodyPr wrap="square" lIns="0" tIns="0" rIns="0" bIns="0" rtlCol="0" anchor="ctr"/>
+          <a:lstStyle/>
+          <a:p>
+            <a:pPr algn="ctr" indent="0" marL="0">
+              <a:buNone/>
+            </a:pPr>
+            <a:r>
+              <a:rPr lang="en-US" sz="1100" dirty="0">
+                <a:solidFill>
+                  <a:schemeClr val="accent5"/>
+                </a:solidFill>
+              </a:rPr>
+              <a:t>2018</a:t>
+            </a:r>
+            <a:endParaRPr lang="en-US" sz="1100" dirty="0"/>
+          </a:p>
+        </p:txBody>
+      </p:sp>
+      <p:sp>
+        <p:nvSpPr>
+          <p:cNvPr id="12" name="年份2022"/>
+          <p:cNvSpPr txBox="1"/>
+          <p:nvPr/>
+        </p:nvSpPr>
+        <p:spPr>
+          <a:xfrm>
+            <a:off x="8869680" y="2606040"/>
+            <a:ext cx="731520" cy="274320"/>
+          </a:xfrm>
+          <a:prstGeom prst="rect">
+            <a:avLst/>
+          </a:prstGeom>
+          <a:noFill/>
+          <a:ln/>
+        </p:spPr>
+        <p:txBody>
+          <a:bodyPr wrap="square" lIns="0" tIns="0" rIns="0" bIns="0" rtlCol="0" anchor="ctr"/>
+          <a:lstStyle/>
+          <a:p>
+            <a:pPr algn="ctr" indent="0" marL="0">
+              <a:buNone/>
+            </a:pPr>
+            <a:r>
+              <a:rPr lang="en-US" sz="1100" dirty="0">
+                <a:solidFill>
+                  <a:schemeClr val="accent5"/>
+                </a:solidFill>
+              </a:rPr>
+              <a:t>2022</a:t>
+            </a:r>
+            <a:endParaRPr lang="en-US" sz="1100" dirty="0"/>
+          </a:p>
+        </p:txBody>
+      </p:sp>
+      <p:sp>
+        <p:nvSpPr>
+          <p:cNvPr id="13" name="年份2024"/>
+          <p:cNvSpPr txBox="1"/>
+          <p:nvPr/>
+        </p:nvSpPr>
+        <p:spPr>
+          <a:xfrm>
+            <a:off x="10271760" y="2606040"/>
+            <a:ext cx="731520" cy="274320"/>
+          </a:xfrm>
+          <a:prstGeom prst="rect">
+            <a:avLst/>
+          </a:prstGeom>
+          <a:noFill/>
+          <a:ln/>
+        </p:spPr>
+        <p:txBody>
+          <a:bodyPr wrap="square" lIns="0" tIns="0" rIns="0" bIns="0" rtlCol="0" anchor="ctr"/>
+          <a:lstStyle/>
+          <a:p>
+            <a:pPr algn="ctr" indent="0" marL="0">
+              <a:buNone/>
+            </a:pPr>
+            <a:r>
+              <a:rPr lang="en-US" sz="1100" dirty="0">
+                <a:solidFill>
+                  <a:schemeClr val="accent5"/>
+                </a:solidFill>
+              </a:rPr>
+              <a:t>2024</a:t>
+            </a:r>
+            <a:endParaRPr lang="en-US" sz="1100" dirty="0"/>
+          </a:p>
+        </p:txBody>
+      </p:sp>
+      <p:sp>
+        <p:nvSpPr>
+          <p:cNvPr id="14" name="覆盖说明"/>
+          <p:cNvSpPr txBox="1"/>
+          <p:nvPr/>
+        </p:nvSpPr>
+        <p:spPr>
+          <a:xfrm>
+            <a:off x="3063240" y="1737360"/>
+            <a:ext cx="5943600" cy="365760"/>
+          </a:xfrm>
+          <a:prstGeom prst="rect">
+            <a:avLst/>
+          </a:prstGeom>
+          <a:noFill/>
+          <a:ln/>
+        </p:spPr>
+        <p:txBody>
+          <a:bodyPr wrap="square" lIns="0" tIns="0" rIns="0" bIns="0" rtlCol="0" anchor="ctr"/>
+          <a:lstStyle/>
+          <a:p>
+            <a:pPr indent="0" marL="0">
+              <a:buNone/>
+            </a:pPr>
+            <a:r>
+              <a:rPr lang="en-US" sz="1300" b="1" dirty="0">
+                <a:solidFill>
+                  <a:schemeClr val="accent3"/>
+                </a:solidFill>
+              </a:rPr>
+              <a:t>样本只覆盖这一段（调查时 13–14 岁，约 2011–2012 年出生）</a:t>
+            </a:r>
+            <a:endParaRPr lang="en-US" sz="1300" dirty="0"/>
+          </a:p>
+        </p:txBody>
+      </p:sp>
+      <p:sp>
+        <p:nvSpPr>
+          <p:cNvPr id="15" name="局限二卡1"/>
+          <p:cNvSpPr/>
+          <p:nvPr/>
+        </p:nvSpPr>
+        <p:spPr>
+          <a:xfrm>
+            <a:off x="548640" y="3154680"/>
+            <a:ext cx="3474720" cy="2377440"/>
+          </a:xfrm>
+          <a:prstGeom prst="roundRect">
+            <a:avLst>
+              <a:gd name="adj" fmla="val 4615"/>
+            </a:avLst>
+          </a:prstGeom>
+          <a:solidFill>
+            <a:schemeClr val="bg2"/>
+          </a:solidFill>
+          <a:ln w="12700">
+            <a:solidFill>
+              <a:schemeClr val="bg2"/>
+            </a:solidFill>
+            <a:prstDash val="solid"/>
+          </a:ln>
+        </p:spPr>
+      </p:sp>
+      <p:sp>
+        <p:nvSpPr>
+          <p:cNvPr id="16" name="局限二文字1"/>
+          <p:cNvSpPr txBox="1"/>
+          <p:nvPr/>
+        </p:nvSpPr>
+        <p:spPr>
+          <a:xfrm>
+            <a:off x="777240" y="3291840"/>
+            <a:ext cx="3017520" cy="2103120"/>
+          </a:xfrm>
+          <a:prstGeom prst="rect">
+            <a:avLst/>
+          </a:prstGeom>
+          <a:noFill/>
+          <a:ln/>
+        </p:spPr>
+        <p:txBody>
+          <a:bodyPr wrap="square" lIns="0" tIns="0" rIns="0" bIns="0" rtlCol="0" anchor="t"/>
+          <a:lstStyle/>
+          <a:p>
+            <a:pPr indent="0" marL="0">
+              <a:spcAft>
+                <a:spcPts val="800"/>
+              </a:spcAft>
+              <a:buNone/>
+            </a:pPr>
+            <a:r>
+              <a:rPr lang="en-US" sz="1600" b="1" dirty="0">
+                <a:solidFill>
+                  <a:schemeClr val="tx2"/>
+                </a:solidFill>
+              </a:rPr>
+              <a:t>分组人数没公布</a:t>
+            </a:r>
+            <a:endParaRPr lang="en-US" sz="1600" dirty="0"/>
+          </a:p>
+          <a:p>
+            <a:pPr indent="0" marL="0">
+              <a:spcAft>
+                <a:spcPts val="800"/>
+              </a:spcAft>
+              <a:buNone/>
+            </a:pPr>
+            <a:r>
+              <a:rPr lang="en-US" sz="1400" dirty="0">
+                <a:solidFill>
+                  <a:schemeClr val="tx1"/>
+                </a:solidFill>
+              </a:rPr>
+              <a:t>13–14 岁、15–28 岁等各组各有多少人，报告没写，所以 54%、80% 这类分组数字的误差无法估计。各组跨度也不一样：Alpha 组只有 2 岁，其他组 14–19 岁。</a:t>
+            </a:r>
+            <a:endParaRPr lang="en-US" sz="1600" dirty="0"/>
+          </a:p>
+        </p:txBody>
+      </p:sp>
+      <p:sp>
+        <p:nvSpPr>
+          <p:cNvPr id="17" name="局限二卡2"/>
+          <p:cNvSpPr/>
+          <p:nvPr/>
+        </p:nvSpPr>
+        <p:spPr>
+          <a:xfrm>
+            <a:off x="4297680" y="3154680"/>
+            <a:ext cx="3474720" cy="2377440"/>
+          </a:xfrm>
+          <a:prstGeom prst="roundRect">
+            <a:avLst>
+              <a:gd name="adj" fmla="val 4615"/>
+            </a:avLst>
+          </a:prstGeom>
+          <a:solidFill>
+            <a:schemeClr val="bg2"/>
+          </a:solidFill>
+          <a:ln w="12700">
+            <a:solidFill>
+              <a:schemeClr val="bg2"/>
+            </a:solidFill>
+            <a:prstDash val="solid"/>
+          </a:ln>
+        </p:spPr>
+      </p:sp>
+      <p:sp>
+        <p:nvSpPr>
+          <p:cNvPr id="18" name="局限二文字2"/>
+          <p:cNvSpPr txBox="1"/>
+          <p:nvPr/>
+        </p:nvSpPr>
+        <p:spPr>
+          <a:xfrm>
+            <a:off x="4526280" y="3291840"/>
+            <a:ext cx="3017520" cy="2103120"/>
+          </a:xfrm>
+          <a:prstGeom prst="rect">
+            <a:avLst/>
+          </a:prstGeom>
+          <a:noFill/>
+          <a:ln/>
+        </p:spPr>
+        <p:txBody>
+          <a:bodyPr wrap="square" lIns="0" tIns="0" rIns="0" bIns="0" rtlCol="0" anchor="t"/>
+          <a:lstStyle/>
+          <a:p>
+            <a:pPr indent="0" marL="0">
+              <a:spcAft>
+                <a:spcPts val="800"/>
+              </a:spcAft>
+              <a:buNone/>
+            </a:pPr>
+            <a:r>
+              <a:rPr lang="en-US" sz="1600" b="1" dirty="0">
+                <a:solidFill>
+                  <a:schemeClr val="tx2"/>
+                </a:solidFill>
+              </a:rPr>
+              <a:t>“美国人”只有约 500 人</a:t>
+            </a:r>
+            <a:endParaRPr lang="en-US" sz="1600" dirty="0"/>
+          </a:p>
+          <a:p>
+            <a:pPr indent="0" marL="0">
+              <a:spcAft>
+                <a:spcPts val="800"/>
+              </a:spcAft>
+              <a:buNone/>
+            </a:pPr>
+            <a:r>
+              <a:rPr lang="en-US" sz="1400" dirty="0">
+                <a:solidFill>
+                  <a:schemeClr val="tx1"/>
+                </a:solidFill>
+              </a:rPr>
+              <a:t>2025 调查每国 500 人（Gracenote 上一份报告写明）。“51% 的美国人觉得服务太多难找”只基于约 500 人，误差至少约 ±4.4 个百分点。</a:t>
+            </a:r>
+            <a:endParaRPr lang="en-US" sz="1600" dirty="0"/>
+          </a:p>
+        </p:txBody>
+      </p:sp>
+      <p:sp>
+        <p:nvSpPr>
+          <p:cNvPr id="19" name="局限二卡3"/>
+          <p:cNvSpPr/>
+          <p:nvPr/>
+        </p:nvSpPr>
+        <p:spPr>
+          <a:xfrm>
+            <a:off x="8046720" y="3154680"/>
+            <a:ext cx="3474720" cy="2377440"/>
+          </a:xfrm>
+          <a:prstGeom prst="roundRect">
+            <a:avLst>
+              <a:gd name="adj" fmla="val 4615"/>
+            </a:avLst>
+          </a:prstGeom>
+          <a:solidFill>
+            <a:schemeClr val="bg2"/>
+          </a:solidFill>
+          <a:ln w="12700">
+            <a:solidFill>
+              <a:schemeClr val="bg2"/>
+            </a:solidFill>
+            <a:prstDash val="solid"/>
+          </a:ln>
+        </p:spPr>
+      </p:sp>
+      <p:sp>
+        <p:nvSpPr>
+          <p:cNvPr id="20" name="局限二文字3"/>
+          <p:cNvSpPr txBox="1"/>
+          <p:nvPr/>
+        </p:nvSpPr>
+        <p:spPr>
+          <a:xfrm>
+            <a:off x="8275320" y="3291840"/>
+            <a:ext cx="3017520" cy="2103120"/>
+          </a:xfrm>
+          <a:prstGeom prst="rect">
+            <a:avLst/>
+          </a:prstGeom>
+          <a:noFill/>
+          <a:ln/>
+        </p:spPr>
+        <p:txBody>
+          <a:bodyPr wrap="square" lIns="0" tIns="0" rIns="0" bIns="0" rtlCol="0" anchor="t"/>
+          <a:lstStyle/>
+          <a:p>
+            <a:pPr indent="0" marL="0">
+              <a:spcAft>
+                <a:spcPts val="800"/>
+              </a:spcAft>
+              <a:buNone/>
+            </a:pPr>
+            <a:r>
+              <a:rPr lang="en-US" sz="1600" b="1" dirty="0">
+                <a:solidFill>
+                  <a:schemeClr val="tx2"/>
+                </a:solidFill>
+              </a:rPr>
+              <a:t>总体 75% 无法由分组复算</a:t>
+            </a:r>
+            <a:endParaRPr lang="en-US" sz="1600" dirty="0"/>
+          </a:p>
+          <a:p>
+            <a:pPr indent="0" marL="0">
+              <a:spcAft>
+                <a:spcPts val="800"/>
+              </a:spcAft>
+              <a:buNone/>
+            </a:pPr>
+            <a:r>
+              <a:rPr lang="en-US" sz="1400" dirty="0">
+                <a:solidFill>
+                  <a:schemeClr val="tx1"/>
+                </a:solidFill>
+              </a:rPr>
+              <a:t>五个年龄组的核查比例为 74%、78%、78%、70%、58%，简单平均只有 71.6%；总体却是 75%。说明各组人数或权重不同，但报告没交代。</a:t>
+            </a:r>
+            <a:endParaRPr lang="en-US" sz="1600" dirty="0"/>
+          </a:p>
+        </p:txBody>
+      </p:sp>
+      <p:sp>
+        <p:nvSpPr>
+          <p:cNvPr id="21" name="来源说明"/>
+          <p:cNvSpPr txBox="1"/>
+          <p:nvPr/>
+        </p:nvSpPr>
+        <p:spPr>
+          <a:xfrm>
+            <a:off x="548640" y="5943600"/>
+            <a:ext cx="11064240" cy="292608"/>
+          </a:xfrm>
+          <a:prstGeom prst="rect">
+            <a:avLst/>
+          </a:prstGeom>
+          <a:noFill/>
+          <a:ln/>
+        </p:spPr>
+        <p:txBody>
+          <a:bodyPr wrap="square" lIns="0" tIns="0" rIns="0" bIns="0" rtlCol="0" anchor="ctr"/>
+          <a:lstStyle/>
+          <a:p>
+            <a:pPr indent="0" marL="0">
+              <a:buNone/>
+            </a:pPr>
+            <a:r>
+              <a:rPr lang="en-US" sz="1000" dirty="0">
+                <a:solidFill>
+                  <a:schemeClr val="accent5"/>
+                </a:solidFill>
+              </a:rPr>
+              <a:t>来源：报告第 2、13–18、23 页；Gracenote 2025《State of Play》第 20 页（每国 500 人）。</a:t>
+            </a:r>
+            <a:endParaRPr lang="en-US" sz="1000" dirty="0"/>
+          </a:p>
+        </p:txBody>
+      </p:sp>
+      <p:sp>
+        <p:nvSpPr>
+          <p:cNvPr id="25" name="Slide Number Placeholder 0"/>
+          <p:cNvSpPr>
+            <a:spLocks noGrp="1"/>
+          </p:cNvSpPr>
+          <p:nvPr>
+            <p:ph type="sldNum" sz="quarter" idx="4294967295"/>
+          </p:nvPr>
+        </p:nvSpPr>
+        <p:spPr>
+          <a:xfrm>
+            <a:off x="11064240" y="6355080"/>
+            <a:ext cx="548640" cy="274320"/>
+          </a:xfrm>
+          <a:prstGeom prst="rect">
+            <a:avLst/>
+          </a:prstGeom>
+          <a:extLst>
+            <a:ext uri="{C572A759-6A51-4108-AA02-DFA0A04FC94B}">
+              <ma14:wrappingTextBoxFlag xmlns:ma14="http://schemas.microsoft.com/office/mac/drawingml/2011/main" val="0"/>
+            </a:ext>
+          </a:extLst>
+        </p:spPr>
+        <p:txBody>
+          <a:bodyPr/>
+          <a:lstStyle>
+            <a:lvl1pPr>
+              <a:defRPr sz="1000">
+                <a:solidFill>
+                  <a:schemeClr val="accent5"/>
+                </a:solidFill>
+              </a:defRPr>
+            </a:lvl1pPr>
+          </a:lstStyle>
+          <a:p>
+            <a:pPr algn="r"/>
+            <a:fld id="{F7021451-1387-4CA6-816F-3879F97B5CBC}" type="slidenum">
+              <a:rPr b="0" lang="en-US"/>
+              <a:t>10</a:t>
+            </a:fld>
+            <a:endParaRPr lang="en-US"/>
+          </a:p>
+        </p:txBody>
+      </p:sp>
+    </p:spTree>
+  </p:cSld>
+  <p:clrMapOvr>
+    <a:masterClrMapping/>
+  </p:clrMapOvr>
+</p:sld>
+</file>
+
+<file path=ppt/slides/slide11.xml><?xml version="1.0" encoding="utf-8"?>
+<p:sld xmlns:a="http://schemas.openxmlformats.org/drawingml/2006/main" xmlns:r="http://schemas.openxmlformats.org/officeDocument/2006/relationships" xmlns:p="http://schemas.openxmlformats.org/presentationml/2006/main">
+  <p:cSld name="Slide 11">
+    <p:spTree>
+      <p:nvGrpSpPr>
+        <p:cNvPr id="1" name=""/>
+        <p:cNvGrpSpPr/>
+        <p:nvPr/>
+      </p:nvGrpSpPr>
+      <p:grpSpPr>
+        <a:xfrm>
+          <a:off x="0" y="0"/>
+          <a:ext cx="0" cy="0"/>
+          <a:chOff x="0" y="0"/>
+          <a:chExt cx="0" cy="0"/>
+        </a:xfrm>
+      </p:grpSpPr>
+      <p:sp>
+        <p:nvSpPr>
+          <p:cNvPr id="2" name="Text 0"/>
+          <p:cNvSpPr/>
+          <p:nvPr>
+            <p:ph idx="100" type="title" hasCustomPrompt="1"/>
+          </p:nvPr>
+        </p:nvSpPr>
+        <p:spPr>
+          <a:xfrm>
+            <a:off x="548640" y="365760"/>
+            <a:ext cx="8778240" cy="777240"/>
+          </a:xfrm>
+          <a:prstGeom prst="rect">
+            <a:avLst/>
+          </a:prstGeom>
+          <a:noFill/>
+          <a:ln/>
+        </p:spPr>
+        <p:txBody>
+          <a:bodyPr wrap="square" lIns="0" tIns="0" rIns="0" bIns="0" rtlCol="0" anchor="ctr"/>
+          <a:lstStyle/>
+          <a:p>
+            <a:pPr algn="l" indent="0" marL="0">
+              <a:buNone/>
+            </a:pPr>
+            <a:r>
+              <a:rPr lang="en-US" sz="3000" b="1" dirty="0">
+                <a:solidFill>
+                  <a:schemeClr val="tx2"/>
+                </a:solidFill>
+              </a:rPr>
+              <a:t>局限三：六国平均被放进了美国语境</a:t>
+            </a:r>
+            <a:endParaRPr lang="en-US" sz="3000" dirty="0"/>
+          </a:p>
+        </p:txBody>
+      </p:sp>
+      <p:sp>
+        <p:nvSpPr>
+          <p:cNvPr id="3" name="角度标签"/>
+          <p:cNvSpPr/>
+          <p:nvPr/>
+        </p:nvSpPr>
+        <p:spPr>
+          <a:xfrm>
+            <a:off x="10332720" y="566928"/>
+            <a:ext cx="1280160" cy="384048"/>
+          </a:xfrm>
+          <a:prstGeom prst="roundRect">
+            <a:avLst>
+              <a:gd name="adj" fmla="val 50000"/>
+            </a:avLst>
+          </a:prstGeom>
+          <a:solidFill>
+            <a:schemeClr val="bg2"/>
+          </a:solidFill>
+          <a:ln w="12700">
+            <a:solidFill>
+              <a:schemeClr val="accent6"/>
+            </a:solidFill>
+            <a:prstDash val="solid"/>
+          </a:ln>
+        </p:spPr>
+      </p:sp>
+      <p:pic>
+        <p:nvPicPr>
+          <p:cNvPr id="4" name="搜索图标" descr="preencoded.png">    </p:cNvPr>
+          <p:cNvPicPr>
+            <a:picLocks noChangeAspect="1"/>
+          </p:cNvPicPr>
+          <p:nvPr/>
+        </p:nvPicPr>
+        <p:blipFill>
+          <a:blip r:embed="rId1"/>
+          <a:stretch>
+            <a:fillRect/>
+          </a:stretch>
+        </p:blipFill>
+        <p:spPr>
+          <a:xfrm>
+            <a:off x="10479024" y="667512"/>
+            <a:ext cx="182880" cy="182880"/>
+          </a:xfrm>
+          <a:prstGeom prst="rect">
+            <a:avLst/>
+          </a:prstGeom>
+        </p:spPr>
+      </p:pic>
+      <p:sp>
+        <p:nvSpPr>
+          <p:cNvPr id="5" name="角度标签文字"/>
+          <p:cNvSpPr txBox="1"/>
+          <p:nvPr/>
+        </p:nvSpPr>
+        <p:spPr>
+          <a:xfrm>
+            <a:off x="10744200" y="566928"/>
+            <a:ext cx="777240" cy="384048"/>
+          </a:xfrm>
+          <a:prstGeom prst="rect">
+            <a:avLst/>
+          </a:prstGeom>
+          <a:noFill/>
+          <a:ln/>
+        </p:spPr>
+        <p:txBody>
+          <a:bodyPr wrap="square" lIns="0" tIns="0" rIns="0" bIns="0" rtlCol="0" anchor="ctr"/>
+          <a:lstStyle/>
+          <a:p>
+            <a:pPr indent="0" marL="0">
+              <a:buNone/>
+            </a:pPr>
+            <a:r>
+              <a:rPr lang="en-US" sz="1200" dirty="0">
+                <a:solidFill>
+                  <a:schemeClr val="tx2"/>
+                </a:solidFill>
+              </a:rPr>
+              <a:t>研究总体</a:t>
+            </a:r>
+            <a:endParaRPr lang="en-US" sz="1200" dirty="0"/>
+          </a:p>
+        </p:txBody>
+      </p:sp>
+      <p:graphicFrame>
+        <p:nvGraphicFramePr>
+          <p:cNvPr id="6" name="分国家找节目时间图" descr=""/>
+          <p:cNvGraphicFramePr/>
+          <p:nvPr/>
+        </p:nvGraphicFramePr>
+        <p:xfrm>
+          <a:off x="548640" y="1371600"/>
+          <a:ext cx="5120640" cy="4434840"/>
+        </p:xfrm>
+        <a:graphic xmlns:a="http://schemas.openxmlformats.org/drawingml/2006/main">
+          <a:graphicData uri="http://schemas.openxmlformats.org/drawingml/2006/chart">
+            <c:chart xmlns:c="http://schemas.openxmlformats.org/drawingml/2006/chart" r:id="rId2"/>
+          </a:graphicData>
+        </a:graphic>
+      </p:graphicFrame>
+      <p:sp>
+        <p:nvSpPr>
+          <p:cNvPr id="7" name="口径卡1"/>
+          <p:cNvSpPr/>
+          <p:nvPr/>
+        </p:nvSpPr>
+        <p:spPr>
+          <a:xfrm>
+            <a:off x="6035040" y="1371600"/>
+            <a:ext cx="5577840" cy="1325880"/>
+          </a:xfrm>
+          <a:prstGeom prst="roundRect">
+            <a:avLst>
+              <a:gd name="adj" fmla="val 8276"/>
+            </a:avLst>
+          </a:prstGeom>
+          <a:solidFill>
+            <a:schemeClr val="bg2"/>
+          </a:solidFill>
+          <a:ln w="12700">
+            <a:solidFill>
+              <a:schemeClr val="bg2"/>
+            </a:solidFill>
+            <a:prstDash val="solid"/>
+          </a:ln>
+        </p:spPr>
+      </p:sp>
+      <p:sp>
+        <p:nvSpPr>
+          <p:cNvPr id="8" name="口径数字1"/>
+          <p:cNvSpPr txBox="1"/>
+          <p:nvPr/>
+        </p:nvSpPr>
+        <p:spPr>
+          <a:xfrm>
+            <a:off x="6217920" y="1371600"/>
+            <a:ext cx="1417320" cy="1325880"/>
+          </a:xfrm>
+          <a:prstGeom prst="rect">
+            <a:avLst/>
+          </a:prstGeom>
+          <a:noFill/>
+          <a:ln/>
+        </p:spPr>
+        <p:txBody>
+          <a:bodyPr wrap="square" lIns="0" tIns="0" rIns="0" bIns="0" rtlCol="0" anchor="ctr"/>
+          <a:lstStyle/>
+          <a:p>
+            <a:pPr indent="0" marL="0">
+              <a:buNone/>
+            </a:pPr>
+            <a:r>
+              <a:rPr lang="en-US" sz="2000" b="1" dirty="0">
+                <a:solidFill>
+                  <a:schemeClr val="accent3"/>
+                </a:solidFill>
+              </a:rPr>
+              <a:t>14 分钟</a:t>
+            </a:r>
+            <a:endParaRPr lang="en-US" sz="2000" dirty="0"/>
+          </a:p>
+        </p:txBody>
+      </p:sp>
+      <p:sp>
+        <p:nvSpPr>
+          <p:cNvPr id="9" name="口径说明1"/>
+          <p:cNvSpPr txBox="1"/>
+          <p:nvPr/>
+        </p:nvSpPr>
+        <p:spPr>
+          <a:xfrm>
+            <a:off x="7680960" y="1444752"/>
+            <a:ext cx="3794760" cy="1188720"/>
+          </a:xfrm>
+          <a:prstGeom prst="rect">
+            <a:avLst/>
+          </a:prstGeom>
+          <a:noFill/>
+          <a:ln/>
+        </p:spPr>
+        <p:txBody>
+          <a:bodyPr wrap="square" lIns="0" tIns="0" rIns="0" bIns="0" rtlCol="0" anchor="ctr"/>
+          <a:lstStyle/>
+          <a:p>
+            <a:pPr indent="0" marL="0">
+              <a:buNone/>
+            </a:pPr>
+            <a:r>
+              <a:rPr lang="en-US" sz="1300" dirty="0">
+                <a:solidFill>
+                  <a:schemeClr val="tx1"/>
+                </a:solidFill>
+              </a:rPr>
+              <a:t>第 9 页把它和美国尼尔森收视数据画在同一张图里。它其实是六国简单平均：(12+26+11+11+12+12)÷6 = 14；美国自己是 12 分钟，法国一国拉高了平均。</a:t>
+            </a:r>
+            <a:endParaRPr lang="en-US" sz="1300" dirty="0"/>
+          </a:p>
+        </p:txBody>
+      </p:sp>
+      <p:sp>
+        <p:nvSpPr>
+          <p:cNvPr id="10" name="口径卡2"/>
+          <p:cNvSpPr/>
+          <p:nvPr/>
+        </p:nvSpPr>
+        <p:spPr>
+          <a:xfrm>
+            <a:off x="6035040" y="2880360"/>
+            <a:ext cx="5577840" cy="1325880"/>
+          </a:xfrm>
+          <a:prstGeom prst="roundRect">
+            <a:avLst>
+              <a:gd name="adj" fmla="val 8276"/>
+            </a:avLst>
+          </a:prstGeom>
+          <a:solidFill>
+            <a:schemeClr val="bg2"/>
+          </a:solidFill>
+          <a:ln w="12700">
+            <a:solidFill>
+              <a:schemeClr val="bg2"/>
+            </a:solidFill>
+            <a:prstDash val="solid"/>
+          </a:ln>
+        </p:spPr>
+      </p:sp>
+      <p:sp>
+        <p:nvSpPr>
+          <p:cNvPr id="11" name="口径数字2"/>
+          <p:cNvSpPr txBox="1"/>
+          <p:nvPr/>
+        </p:nvSpPr>
+        <p:spPr>
+          <a:xfrm>
+            <a:off x="6217920" y="2880360"/>
+            <a:ext cx="1417320" cy="1325880"/>
+          </a:xfrm>
+          <a:prstGeom prst="rect">
+            <a:avLst/>
+          </a:prstGeom>
+          <a:noFill/>
+          <a:ln/>
+        </p:spPr>
+        <p:txBody>
+          <a:bodyPr wrap="square" lIns="0" tIns="0" rIns="0" bIns="0" rtlCol="0" anchor="ctr"/>
+          <a:lstStyle/>
+          <a:p>
+            <a:pPr indent="0" marL="0">
+              <a:buNone/>
+            </a:pPr>
+            <a:r>
+              <a:rPr lang="en-US" sz="2000" b="1" dirty="0">
+                <a:solidFill>
+                  <a:schemeClr val="accent3"/>
+                </a:solidFill>
+              </a:rPr>
+              <a:t>54%</a:t>
+            </a:r>
+            <a:endParaRPr lang="en-US" sz="2000" dirty="0"/>
+          </a:p>
+        </p:txBody>
+      </p:sp>
+      <p:sp>
+        <p:nvSpPr>
+          <p:cNvPr id="12" name="口径说明2"/>
+          <p:cNvSpPr txBox="1"/>
+          <p:nvPr/>
+        </p:nvSpPr>
+        <p:spPr>
+          <a:xfrm>
+            <a:off x="7680960" y="2953512"/>
+            <a:ext cx="3794760" cy="1188720"/>
+          </a:xfrm>
+          <a:prstGeom prst="rect">
+            <a:avLst/>
+          </a:prstGeom>
+          <a:noFill/>
+          <a:ln/>
+        </p:spPr>
+        <p:txBody>
+          <a:bodyPr wrap="square" lIns="0" tIns="0" rIns="0" bIns="0" rtlCol="0" anchor="ctr"/>
+          <a:lstStyle/>
+          <a:p>
+            <a:pPr indent="0" marL="0">
+              <a:buNone/>
+            </a:pPr>
+            <a:r>
+              <a:rPr lang="en-US" sz="1300" dirty="0">
+                <a:solidFill>
+                  <a:schemeClr val="tx1"/>
+                </a:solidFill>
+              </a:rPr>
+              <a:t>摘要里“18–34 岁会取消订阅”的比例，与六国数据吻合（18–24 岁 52%、25–34 岁 56%），却和美国数据并列。</a:t>
+            </a:r>
+            <a:endParaRPr lang="en-US" sz="1300" dirty="0"/>
+          </a:p>
+        </p:txBody>
+      </p:sp>
+      <p:sp>
+        <p:nvSpPr>
+          <p:cNvPr id="13" name="口径卡3"/>
+          <p:cNvSpPr/>
+          <p:nvPr/>
+        </p:nvSpPr>
+        <p:spPr>
+          <a:xfrm>
+            <a:off x="6035040" y="4389120"/>
+            <a:ext cx="5577840" cy="1325880"/>
+          </a:xfrm>
+          <a:prstGeom prst="roundRect">
+            <a:avLst>
+              <a:gd name="adj" fmla="val 8276"/>
+            </a:avLst>
+          </a:prstGeom>
+          <a:solidFill>
+            <a:schemeClr val="bg2"/>
+          </a:solidFill>
+          <a:ln w="12700">
+            <a:solidFill>
+              <a:schemeClr val="bg2"/>
+            </a:solidFill>
+            <a:prstDash val="solid"/>
+          </a:ln>
+        </p:spPr>
+      </p:sp>
+      <p:sp>
+        <p:nvSpPr>
+          <p:cNvPr id="14" name="口径数字3"/>
+          <p:cNvSpPr txBox="1"/>
+          <p:nvPr/>
+        </p:nvSpPr>
+        <p:spPr>
+          <a:xfrm>
+            <a:off x="6217920" y="4389120"/>
+            <a:ext cx="1417320" cy="1325880"/>
+          </a:xfrm>
+          <a:prstGeom prst="rect">
+            <a:avLst/>
+          </a:prstGeom>
+          <a:noFill/>
+          <a:ln/>
+        </p:spPr>
+        <p:txBody>
+          <a:bodyPr wrap="square" lIns="0" tIns="0" rIns="0" bIns="0" rtlCol="0" anchor="ctr"/>
+          <a:lstStyle/>
+          <a:p>
+            <a:pPr indent="0" marL="0">
+              <a:buNone/>
+            </a:pPr>
+            <a:r>
+              <a:rPr lang="en-US" sz="2000" b="1" dirty="0">
+                <a:solidFill>
+                  <a:schemeClr val="accent3"/>
+                </a:solidFill>
+              </a:rPr>
+              <a:t>32% 与 34%</a:t>
+            </a:r>
+            <a:endParaRPr lang="en-US" sz="2000" dirty="0"/>
+          </a:p>
+        </p:txBody>
+      </p:sp>
+      <p:sp>
+        <p:nvSpPr>
+          <p:cNvPr id="15" name="口径说明3"/>
+          <p:cNvSpPr txBox="1"/>
+          <p:nvPr/>
+        </p:nvSpPr>
+        <p:spPr>
+          <a:xfrm>
+            <a:off x="7680960" y="4462272"/>
+            <a:ext cx="3794760" cy="1188720"/>
+          </a:xfrm>
+          <a:prstGeom prst="rect">
+            <a:avLst/>
+          </a:prstGeom>
+          <a:noFill/>
+          <a:ln/>
+        </p:spPr>
+        <p:txBody>
+          <a:bodyPr wrap="square" lIns="0" tIns="0" rIns="0" bIns="0" rtlCol="0" anchor="ctr"/>
+          <a:lstStyle/>
+          <a:p>
+            <a:pPr indent="0" marL="0">
+              <a:buNone/>
+            </a:pPr>
+            <a:r>
+              <a:rPr lang="en-US" sz="1300" dirty="0">
+                <a:solidFill>
+                  <a:schemeClr val="tx1"/>
+                </a:solidFill>
+              </a:rPr>
+              <a:t>第 9 页的 32% 是六国平均；第 12 页的 34% 写的是“美国人”。两页数字不同，原因很可能就是口径不同。</a:t>
+            </a:r>
+            <a:endParaRPr lang="en-US" sz="1300" dirty="0"/>
+          </a:p>
+        </p:txBody>
+      </p:sp>
+      <p:sp>
+        <p:nvSpPr>
+          <p:cNvPr id="16" name="来源说明"/>
+          <p:cNvSpPr txBox="1"/>
+          <p:nvPr/>
+        </p:nvSpPr>
+        <p:spPr>
+          <a:xfrm>
+            <a:off x="548640" y="5989320"/>
+            <a:ext cx="11064240" cy="292608"/>
+          </a:xfrm>
+          <a:prstGeom prst="rect">
+            <a:avLst/>
+          </a:prstGeom>
+          <a:noFill/>
+          <a:ln/>
+        </p:spPr>
+        <p:txBody>
+          <a:bodyPr wrap="square" lIns="0" tIns="0" rIns="0" bIns="0" rtlCol="0" anchor="ctr"/>
+          <a:lstStyle/>
+          <a:p>
+            <a:pPr indent="0" marL="0">
+              <a:buNone/>
+            </a:pPr>
+            <a:r>
+              <a:rPr lang="en-US" sz="1000" dirty="0">
+                <a:solidFill>
+                  <a:schemeClr val="accent5"/>
+                </a:solidFill>
+              </a:rPr>
+              <a:t>来源：报告第 2、9、12 页；Gracenote 2025《State of Play》分国家、分年龄图表（每国 500 人）。</a:t>
+            </a:r>
+            <a:endParaRPr lang="en-US" sz="1000" dirty="0"/>
+          </a:p>
+        </p:txBody>
+      </p:sp>
+      <p:sp>
+        <p:nvSpPr>
+          <p:cNvPr id="25" name="Slide Number Placeholder 0"/>
+          <p:cNvSpPr>
+            <a:spLocks noGrp="1"/>
+          </p:cNvSpPr>
+          <p:nvPr>
+            <p:ph type="sldNum" sz="quarter" idx="4294967295"/>
+          </p:nvPr>
+        </p:nvSpPr>
+        <p:spPr>
+          <a:xfrm>
+            <a:off x="11064240" y="6355080"/>
+            <a:ext cx="548640" cy="274320"/>
+          </a:xfrm>
+          <a:prstGeom prst="rect">
+            <a:avLst/>
+          </a:prstGeom>
+          <a:extLst>
+            <a:ext uri="{C572A759-6A51-4108-AA02-DFA0A04FC94B}">
+              <ma14:wrappingTextBoxFlag xmlns:ma14="http://schemas.microsoft.com/office/mac/drawingml/2011/main" val="0"/>
+            </a:ext>
+          </a:extLst>
+        </p:spPr>
+        <p:txBody>
+          <a:bodyPr/>
+          <a:lstStyle>
+            <a:lvl1pPr>
+              <a:defRPr sz="1000">
+                <a:solidFill>
+                  <a:schemeClr val="accent5"/>
+                </a:solidFill>
+              </a:defRPr>
+            </a:lvl1pPr>
+          </a:lstStyle>
+          <a:p>
+            <a:pPr algn="r"/>
+            <a:fld id="{F7021451-1387-4CA6-816F-3879F97B5CBC}" type="slidenum">
+              <a:rPr b="0" lang="en-US"/>
+              <a:t>11</a:t>
+            </a:fld>
+            <a:endParaRPr lang="en-US"/>
+          </a:p>
+        </p:txBody>
+      </p:sp>
+    </p:spTree>
+  </p:cSld>
+  <p:clrMapOvr>
+    <a:masterClrMapping/>
+  </p:clrMapOvr>
+</p:sld>
+</file>
+
+<file path=ppt/slides/slide12.xml><?xml version="1.0" encoding="utf-8"?>
+<p:sld xmlns:a="http://schemas.openxmlformats.org/drawingml/2006/main" xmlns:r="http://schemas.openxmlformats.org/officeDocument/2006/relationships" xmlns:p="http://schemas.openxmlformats.org/presentationml/2006/main">
+  <p:cSld name="Slide 12">
+    <p:spTree>
+      <p:nvGrpSpPr>
+        <p:cNvPr id="1" name=""/>
+        <p:cNvGrpSpPr/>
+        <p:nvPr/>
+      </p:nvGrpSpPr>
+      <p:grpSpPr>
+        <a:xfrm>
+          <a:off x="0" y="0"/>
+          <a:ext cx="0" cy="0"/>
+          <a:chOff x="0" y="0"/>
+          <a:chExt cx="0" cy="0"/>
+        </a:xfrm>
+      </p:grpSpPr>
+      <p:sp>
+        <p:nvSpPr>
+          <p:cNvPr id="2" name="Text 0"/>
+          <p:cNvSpPr/>
+          <p:nvPr>
+            <p:ph idx="100" type="title" hasCustomPrompt="1"/>
+          </p:nvPr>
+        </p:nvSpPr>
+        <p:spPr>
+          <a:xfrm>
+            <a:off x="548640" y="365760"/>
+            <a:ext cx="8778240" cy="777240"/>
+          </a:xfrm>
+          <a:prstGeom prst="rect">
+            <a:avLst/>
+          </a:prstGeom>
+          <a:noFill/>
+          <a:ln/>
+        </p:spPr>
+        <p:txBody>
+          <a:bodyPr wrap="square" lIns="0" tIns="0" rIns="0" bIns="0" rtlCol="0" anchor="ctr"/>
+          <a:lstStyle/>
+          <a:p>
+            <a:pPr algn="l" indent="0" marL="0">
+              <a:buNone/>
+            </a:pPr>
+            <a:r>
+              <a:rPr lang="en-US" sz="3000" b="1" dirty="0">
+                <a:solidFill>
+                  <a:schemeClr val="tx2"/>
+                </a:solidFill>
+              </a:rPr>
+              <a:t>局限四：30% 到 54%，不能直接说“增长”</a:t>
+            </a:r>
+            <a:endParaRPr lang="en-US" sz="3000" dirty="0"/>
+          </a:p>
+        </p:txBody>
+      </p:sp>
+      <p:sp>
+        <p:nvSpPr>
+          <p:cNvPr id="3" name="角度标签"/>
+          <p:cNvSpPr/>
+          <p:nvPr/>
+        </p:nvSpPr>
+        <p:spPr>
+          <a:xfrm>
+            <a:off x="9509760" y="566928"/>
+            <a:ext cx="2103120" cy="384048"/>
+          </a:xfrm>
+          <a:prstGeom prst="roundRect">
+            <a:avLst>
+              <a:gd name="adj" fmla="val 50000"/>
+            </a:avLst>
+          </a:prstGeom>
+          <a:solidFill>
+            <a:schemeClr val="bg2"/>
+          </a:solidFill>
+          <a:ln w="12700">
+            <a:solidFill>
+              <a:schemeClr val="accent6"/>
+            </a:solidFill>
+            <a:prstDash val="solid"/>
+          </a:ln>
+        </p:spPr>
+      </p:sp>
+      <p:pic>
+        <p:nvPicPr>
+          <p:cNvPr id="4" name="搜索图标" descr="preencoded.png">    </p:cNvPr>
+          <p:cNvPicPr>
+            <a:picLocks noChangeAspect="1"/>
+          </p:cNvPicPr>
+          <p:nvPr/>
+        </p:nvPicPr>
+        <p:blipFill>
+          <a:blip r:embed="rId1"/>
+          <a:stretch>
+            <a:fillRect/>
+          </a:stretch>
+        </p:blipFill>
+        <p:spPr>
+          <a:xfrm>
             <a:off x="9656064" y="667512"/>
             <a:ext cx="182880" cy="182880"/>
           </a:xfrm>
@@ -3784,7 +5653,7 @@
       </p:sp>
       <p:graphicFrame>
         <p:nvGraphicFramePr>
-          <p:cNvPr id="11" name="对比表"/>
+          <p:cNvPr id="13" name="对比表"/>
           <p:cNvGraphicFramePr>
             <a:graphicFrameLocks noGrp="1"/>
           </p:cNvGraphicFramePr>
@@ -4179,7 +6048,7 @@
                   </a:tcPr>
                 </a:tc>
               </a:tr>
-              <a:tr h="685800">
+              <a:tr h="566928">
                 <a:tc>
                   <a:txBody>
                     <a:bodyPr/>
@@ -4255,7 +6124,7 @@
                             <a:schemeClr val="tx1"/>
                           </a:solidFill>
                         </a:rPr>
-                        <a:t>从 Ipsos KnowledgePanel（住址随机抽样建立）招募家长和孩子，并加权</a:t>
+                        <a:t>Ipsos KnowledgePanel 概率样本库，加权；1,458 人，误差 ±3.3</a:t>
                       </a:r>
                       <a:endParaRPr lang="en-US" sz="1400" dirty="0"/>
                     </a:p>
@@ -4316,192 +6185,7 @@
                             <a:schemeClr val="tx1"/>
                           </a:solidFill>
                         </a:rPr>
-                        <a:t>线上调查，招募和加权方式未披露</a:t>
-                      </a:r>
-                      <a:endParaRPr lang="en-US" sz="1400" dirty="0"/>
-                    </a:p>
-                  </a:txBody>
-                  <a:tcPr marL="101600" marR="101600" marT="50800" marB="50800" anchor="ctr">
-                    <a:lnL w="9525" cap="flat" cmpd="sng" algn="ctr">
-                      <a:solidFill>
-                        <a:schemeClr val="accent6"/>
-                      </a:solidFill>
-                      <a:prstDash val="solid"/>
-                      <a:round/>
-                      <a:headEnd type="none" w="med" len="med"/>
-                      <a:tailEnd type="none" w="med" len="med"/>
-                    </a:lnL>
-                    <a:lnR w="9525" cap="flat" cmpd="sng" algn="ctr">
-                      <a:solidFill>
-                        <a:schemeClr val="accent6"/>
-                      </a:solidFill>
-                      <a:prstDash val="solid"/>
-                      <a:round/>
-                      <a:headEnd type="none" w="med" len="med"/>
-                      <a:tailEnd type="none" w="med" len="med"/>
-                    </a:lnR>
-                    <a:lnT w="9525" cap="flat" cmpd="sng" algn="ctr">
-                      <a:solidFill>
-                        <a:schemeClr val="accent6"/>
-                      </a:solidFill>
-                      <a:prstDash val="solid"/>
-                      <a:round/>
-                      <a:headEnd type="none" w="med" len="med"/>
-                      <a:tailEnd type="none" w="med" len="med"/>
-                    </a:lnT>
-                    <a:lnB w="9525" cap="flat" cmpd="sng" algn="ctr">
-                      <a:solidFill>
-                        <a:schemeClr val="accent6"/>
-                      </a:solidFill>
-                      <a:prstDash val="solid"/>
-                      <a:round/>
-                      <a:headEnd type="none" w="med" len="med"/>
-                      <a:tailEnd type="none" w="med" len="med"/>
-                    </a:lnB>
-                    <a:solidFill>
-                      <a:schemeClr val="bg1"/>
-                    </a:solidFill>
-                  </a:tcPr>
-                </a:tc>
-              </a:tr>
-              <a:tr h="457200">
-                <a:tc>
-                  <a:txBody>
-                    <a:bodyPr/>
-                    <a:lstStyle/>
-                    <a:p>
-                      <a:pPr indent="0" marL="0">
-                        <a:buNone/>
-                      </a:pPr>
-                      <a:r>
-                        <a:rPr lang="en-US" sz="1400" b="1" dirty="0">
-                          <a:solidFill>
-                            <a:schemeClr val="tx2"/>
-                          </a:solidFill>
-                        </a:rPr>
-                        <a:t>样本量</a:t>
-                      </a:r>
-                      <a:endParaRPr lang="en-US" sz="1400" dirty="0"/>
-                    </a:p>
-                  </a:txBody>
-                  <a:tcPr marL="101600" marR="101600" marT="50800" marB="50800" anchor="ctr">
-                    <a:lnL w="9525" cap="flat" cmpd="sng" algn="ctr">
-                      <a:solidFill>
-                        <a:schemeClr val="accent6"/>
-                      </a:solidFill>
-                      <a:prstDash val="solid"/>
-                      <a:round/>
-                      <a:headEnd type="none" w="med" len="med"/>
-                      <a:tailEnd type="none" w="med" len="med"/>
-                    </a:lnL>
-                    <a:lnR w="9525" cap="flat" cmpd="sng" algn="ctr">
-                      <a:solidFill>
-                        <a:schemeClr val="accent6"/>
-                      </a:solidFill>
-                      <a:prstDash val="solid"/>
-                      <a:round/>
-                      <a:headEnd type="none" w="med" len="med"/>
-                      <a:tailEnd type="none" w="med" len="med"/>
-                    </a:lnR>
-                    <a:lnT w="9525" cap="flat" cmpd="sng" algn="ctr">
-                      <a:solidFill>
-                        <a:schemeClr val="accent6"/>
-                      </a:solidFill>
-                      <a:prstDash val="solid"/>
-                      <a:round/>
-                      <a:headEnd type="none" w="med" len="med"/>
-                      <a:tailEnd type="none" w="med" len="med"/>
-                    </a:lnT>
-                    <a:lnB w="9525" cap="flat" cmpd="sng" algn="ctr">
-                      <a:solidFill>
-                        <a:schemeClr val="accent6"/>
-                      </a:solidFill>
-                      <a:prstDash val="solid"/>
-                      <a:round/>
-                      <a:headEnd type="none" w="med" len="med"/>
-                      <a:tailEnd type="none" w="med" len="med"/>
-                    </a:lnB>
-                    <a:solidFill>
-                      <a:schemeClr val="bg2"/>
-                    </a:solidFill>
-                  </a:tcPr>
-                </a:tc>
-                <a:tc>
-                  <a:txBody>
-                    <a:bodyPr/>
-                    <a:lstStyle/>
-                    <a:p>
-                      <a:pPr indent="0" marL="0">
-                        <a:buNone/>
-                      </a:pPr>
-                      <a:r>
-                        <a:rPr lang="en-US" sz="1400" dirty="0">
-                          <a:solidFill>
-                            <a:schemeClr val="tx1"/>
-                          </a:solidFill>
-                        </a:rPr>
-                        <a:t>1,458</a:t>
-                      </a:r>
-                      <a:endParaRPr lang="en-US" sz="1400" dirty="0"/>
-                    </a:p>
-                  </a:txBody>
-                  <a:tcPr marL="101600" marR="101600" marT="50800" marB="50800" anchor="ctr">
-                    <a:lnL w="9525" cap="flat" cmpd="sng" algn="ctr">
-                      <a:solidFill>
-                        <a:schemeClr val="accent6"/>
-                      </a:solidFill>
-                      <a:prstDash val="solid"/>
-                      <a:round/>
-                      <a:headEnd type="none" w="med" len="med"/>
-                      <a:tailEnd type="none" w="med" len="med"/>
-                    </a:lnL>
-                    <a:lnR w="9525" cap="flat" cmpd="sng" algn="ctr">
-                      <a:solidFill>
-                        <a:schemeClr val="accent6"/>
-                      </a:solidFill>
-                      <a:prstDash val="solid"/>
-                      <a:round/>
-                      <a:headEnd type="none" w="med" len="med"/>
-                      <a:tailEnd type="none" w="med" len="med"/>
-                    </a:lnR>
-                    <a:lnT w="9525" cap="flat" cmpd="sng" algn="ctr">
-                      <a:solidFill>
-                        <a:schemeClr val="accent6"/>
-                      </a:solidFill>
-                      <a:prstDash val="solid"/>
-                      <a:round/>
-                      <a:headEnd type="none" w="med" len="med"/>
-                      <a:tailEnd type="none" w="med" len="med"/>
-                    </a:lnT>
-                    <a:lnB w="9525" cap="flat" cmpd="sng" algn="ctr">
-                      <a:solidFill>
-                        <a:schemeClr val="accent6"/>
-                      </a:solidFill>
-                      <a:prstDash val="solid"/>
-                      <a:round/>
-                      <a:headEnd type="none" w="med" len="med"/>
-                      <a:tailEnd type="none" w="med" len="med"/>
-                    </a:lnB>
-                    <a:solidFill>
-                      <a:schemeClr val="bg1"/>
-                    </a:solidFill>
-                  </a:tcPr>
-                </a:tc>
-                <a:tc>
-                  <a:txBody>
-                    <a:bodyPr/>
-                    <a:lstStyle/>
-                    <a:p>
-                      <a:pPr indent="0" marL="0">
-                        <a:buNone/>
-                      </a:pPr>
-                      <a:r>
-                        <a:rPr lang="en-US" sz="1400" dirty="0">
-                          <a:solidFill>
-                            <a:schemeClr val="tx1"/>
-                          </a:solidFill>
-                        </a:rPr>
-                        <a:t>13–14 岁组人数未披露</a:t>
+                        <a:t>线上调查，招募和加权未披露；13–14 岁组人数未披露</a:t>
                       </a:r>
                       <a:endParaRPr lang="en-US" sz="1400" dirty="0"/>
                     </a:p>
@@ -4810,7 +6494,7 @@
                             <a:schemeClr val="tx1"/>
                           </a:solidFill>
                         </a:rPr>
-                        <a:t>约 30% 每天使用</a:t>
+                        <a:t>64% 用过聊天机器人；约 30% 每天用</a:t>
                       </a:r>
                       <a:endParaRPr lang="en-US" sz="1400" dirty="0"/>
                     </a:p>
@@ -4919,6 +6603,191 @@
                   </a:tcPr>
                 </a:tc>
               </a:tr>
+              <a:tr h="502920">
+                <a:tc>
+                  <a:txBody>
+                    <a:bodyPr/>
+                    <a:lstStyle/>
+                    <a:p>
+                      <a:pPr indent="0" marL="0">
+                        <a:buNone/>
+                      </a:pPr>
+                      <a:r>
+                        <a:rPr lang="en-US" sz="1400" b="1" dirty="0">
+                          <a:solidFill>
+                            <a:schemeClr val="tx2"/>
+                          </a:solidFill>
+                        </a:rPr>
+                        <a:t>换成同一分母</a:t>
+                      </a:r>
+                      <a:endParaRPr lang="en-US" sz="1400" dirty="0"/>
+                    </a:p>
+                  </a:txBody>
+                  <a:tcPr marL="101600" marR="101600" marT="50800" marB="50800" anchor="ctr">
+                    <a:lnL w="9525" cap="flat" cmpd="sng" algn="ctr">
+                      <a:solidFill>
+                        <a:schemeClr val="accent6"/>
+                      </a:solidFill>
+                      <a:prstDash val="solid"/>
+                      <a:round/>
+                      <a:headEnd type="none" w="med" len="med"/>
+                      <a:tailEnd type="none" w="med" len="med"/>
+                    </a:lnL>
+                    <a:lnR w="9525" cap="flat" cmpd="sng" algn="ctr">
+                      <a:solidFill>
+                        <a:schemeClr val="accent6"/>
+                      </a:solidFill>
+                      <a:prstDash val="solid"/>
+                      <a:round/>
+                      <a:headEnd type="none" w="med" len="med"/>
+                      <a:tailEnd type="none" w="med" len="med"/>
+                    </a:lnR>
+                    <a:lnT w="9525" cap="flat" cmpd="sng" algn="ctr">
+                      <a:solidFill>
+                        <a:schemeClr val="accent6"/>
+                      </a:solidFill>
+                      <a:prstDash val="solid"/>
+                      <a:round/>
+                      <a:headEnd type="none" w="med" len="med"/>
+                      <a:tailEnd type="none" w="med" len="med"/>
+                    </a:lnT>
+                    <a:lnB w="9525" cap="flat" cmpd="sng" algn="ctr">
+                      <a:solidFill>
+                        <a:schemeClr val="accent6"/>
+                      </a:solidFill>
+                      <a:prstDash val="solid"/>
+                      <a:round/>
+                      <a:headEnd type="none" w="med" len="med"/>
+                      <a:tailEnd type="none" w="med" len="med"/>
+                    </a:lnB>
+                    <a:solidFill>
+                      <a:schemeClr val="bg2"/>
+                    </a:solidFill>
+                  </a:tcPr>
+                </a:tc>
+                <a:tc>
+                  <a:txBody>
+                    <a:bodyPr/>
+                    <a:lstStyle/>
+                    <a:p>
+                      <a:pPr indent="0" marL="0">
+                        <a:buNone/>
+                      </a:pPr>
+                      <a:r>
+                        <a:rPr lang="en-US" sz="1400" b="1" dirty="0">
+                          <a:solidFill>
+                            <a:schemeClr val="accent3"/>
+                          </a:solidFill>
+                        </a:rPr>
+                        <a:t>使用者中每天用：30% ÷ 64% ≈ 47%</a:t>
+                      </a:r>
+                      <a:endParaRPr lang="en-US" sz="1400" dirty="0"/>
+                    </a:p>
+                  </a:txBody>
+                  <a:tcPr marL="101600" marR="101600" marT="50800" marB="50800" anchor="ctr">
+                    <a:lnL w="9525" cap="flat" cmpd="sng" algn="ctr">
+                      <a:solidFill>
+                        <a:schemeClr val="accent6"/>
+                      </a:solidFill>
+                      <a:prstDash val="solid"/>
+                      <a:round/>
+                      <a:headEnd type="none" w="med" len="med"/>
+                      <a:tailEnd type="none" w="med" len="med"/>
+                    </a:lnL>
+                    <a:lnR w="9525" cap="flat" cmpd="sng" algn="ctr">
+                      <a:solidFill>
+                        <a:schemeClr val="accent6"/>
+                      </a:solidFill>
+                      <a:prstDash val="solid"/>
+                      <a:round/>
+                      <a:headEnd type="none" w="med" len="med"/>
+                      <a:tailEnd type="none" w="med" len="med"/>
+                    </a:lnR>
+                    <a:lnT w="9525" cap="flat" cmpd="sng" algn="ctr">
+                      <a:solidFill>
+                        <a:schemeClr val="accent6"/>
+                      </a:solidFill>
+                      <a:prstDash val="solid"/>
+                      <a:round/>
+                      <a:headEnd type="none" w="med" len="med"/>
+                      <a:tailEnd type="none" w="med" len="med"/>
+                    </a:lnT>
+                    <a:lnB w="9525" cap="flat" cmpd="sng" algn="ctr">
+                      <a:solidFill>
+                        <a:schemeClr val="accent6"/>
+                      </a:solidFill>
+                      <a:prstDash val="solid"/>
+                      <a:round/>
+                      <a:headEnd type="none" w="med" len="med"/>
+                      <a:tailEnd type="none" w="med" len="med"/>
+                    </a:lnB>
+                    <a:solidFill>
+                      <a:schemeClr val="bg1"/>
+                    </a:solidFill>
+                  </a:tcPr>
+                </a:tc>
+                <a:tc>
+                  <a:txBody>
+                    <a:bodyPr/>
+                    <a:lstStyle/>
+                    <a:p>
+                      <a:pPr indent="0" marL="0">
+                        <a:buNone/>
+                      </a:pPr>
+                      <a:r>
+                        <a:rPr lang="en-US" sz="1400" b="1" dirty="0">
+                          <a:solidFill>
+                            <a:schemeClr val="accent3"/>
+                          </a:solidFill>
+                        </a:rPr>
+                        <a:t>54%（本来就只问使用者）</a:t>
+                      </a:r>
+                      <a:endParaRPr lang="en-US" sz="1400" dirty="0"/>
+                    </a:p>
+                  </a:txBody>
+                  <a:tcPr marL="101600" marR="101600" marT="50800" marB="50800" anchor="ctr">
+                    <a:lnL w="9525" cap="flat" cmpd="sng" algn="ctr">
+                      <a:solidFill>
+                        <a:schemeClr val="accent6"/>
+                      </a:solidFill>
+                      <a:prstDash val="solid"/>
+                      <a:round/>
+                      <a:headEnd type="none" w="med" len="med"/>
+                      <a:tailEnd type="none" w="med" len="med"/>
+                    </a:lnL>
+                    <a:lnR w="9525" cap="flat" cmpd="sng" algn="ctr">
+                      <a:solidFill>
+                        <a:schemeClr val="accent6"/>
+                      </a:solidFill>
+                      <a:prstDash val="solid"/>
+                      <a:round/>
+                      <a:headEnd type="none" w="med" len="med"/>
+                      <a:tailEnd type="none" w="med" len="med"/>
+                    </a:lnR>
+                    <a:lnT w="9525" cap="flat" cmpd="sng" algn="ctr">
+                      <a:solidFill>
+                        <a:schemeClr val="accent6"/>
+                      </a:solidFill>
+                      <a:prstDash val="solid"/>
+                      <a:round/>
+                      <a:headEnd type="none" w="med" len="med"/>
+                      <a:tailEnd type="none" w="med" len="med"/>
+                    </a:lnT>
+                    <a:lnB w="9525" cap="flat" cmpd="sng" algn="ctr">
+                      <a:solidFill>
+                        <a:schemeClr val="accent6"/>
+                      </a:solidFill>
+                      <a:prstDash val="solid"/>
+                      <a:round/>
+                      <a:headEnd type="none" w="med" len="med"/>
+                      <a:tailEnd type="none" w="med" len="med"/>
+                    </a:lnB>
+                    <a:solidFill>
+                      <a:schemeClr val="bg1"/>
+                    </a:solidFill>
+                  </a:tcPr>
+                </a:tc>
+              </a:tr>
             </a:tbl>
           </a:graphicData>
         </a:graphic>
@@ -4980,7 +6849,7 @@
                   <a:schemeClr val="accent3"/>
                 </a:solidFill>
               </a:rPr>
-              <a:t>四个角度全都不同：分母从“所有青少年”变成“AI 用户”，差距不能解释为几个月内的增长。</a:t>
+              <a:t>换成同一分母，差距从 24 个百分点缩到约 7 个；剩下的差距还可能来自年龄、方法、时间不同，不能说明“加速”。</a:t>
             </a:r>
             <a:endParaRPr lang="en-US" sz="1500" dirty="0"/>
           </a:p>
@@ -5061,7 +6930,7 @@
             <a:pPr algn="r"/>
             <a:fld id="{F7021451-1387-4CA6-816F-3879F97B5CBC}" type="slidenum">
               <a:rPr b="0" lang="en-US"/>
-              <a:t>10</a:t>
+              <a:t>12</a:t>
             </a:fld>
             <a:endParaRPr lang="en-US"/>
           </a:p>
@@ -5075,9 +6944,9 @@
 </p:sld>
 </file>
 
-<file path=ppt/slides/slide11.xml><?xml version="1.0" encoding="utf-8"?>
+<file path=ppt/slides/slide13.xml><?xml version="1.0" encoding="utf-8"?>
 <p:sld xmlns:a="http://schemas.openxmlformats.org/drawingml/2006/main" xmlns:r="http://schemas.openxmlformats.org/officeDocument/2006/relationships" xmlns:p="http://schemas.openxmlformats.org/presentationml/2006/main">
-  <p:cSld name="Slide 11">
+  <p:cSld name="Slide 13">
     <p:spTree>
       <p:nvGrpSpPr>
         <p:cNvPr id="1" name=""/>
@@ -5124,7 +6993,7 @@
                   <a:schemeClr val="tx2"/>
                 </a:solidFill>
               </a:rPr>
-              <a:t>局限四：意向、行为、预测、测试，不是同一种数据</a:t>
+              <a:t>局限五：意向、行为、预测、测试，不是同一种数据</a:t>
             </a:r>
             <a:endParaRPr lang="en-US" sz="3000" dirty="0"/>
           </a:p>
@@ -5373,8 +7242,8 @@
         </p:nvSpPr>
         <p:spPr>
           <a:xfrm>
-            <a:off x="777240" y="3337560"/>
-            <a:ext cx="2194560" cy="1371600"/>
+            <a:off x="777240" y="3291840"/>
+            <a:ext cx="2240280" cy="1234440"/>
           </a:xfrm>
           <a:prstGeom prst="rect">
             <a:avLst/>
@@ -5398,7 +7267,7 @@
                   <a:schemeClr val="tx1"/>
                 </a:solidFill>
               </a:rPr>
-              <a:t>18–34 岁“会考虑取消订阅”</a:t>
+              <a:t>18–34 岁“可能会取消订阅”（六国）</a:t>
             </a:r>
             <a:endParaRPr lang="en-US" sz="1400" dirty="0"/>
           </a:p>
@@ -5577,8 +7446,8 @@
         </p:nvSpPr>
         <p:spPr>
           <a:xfrm>
-            <a:off x="3589020" y="3337560"/>
-            <a:ext cx="2194560" cy="1371600"/>
+            <a:off x="3589020" y="3291840"/>
+            <a:ext cx="2240280" cy="1234440"/>
           </a:xfrm>
           <a:prstGeom prst="rect">
             <a:avLst/>
@@ -5602,7 +7471,7 @@
                   <a:schemeClr val="tx1"/>
                 </a:solidFill>
               </a:rPr>
-              <a:t>美国主要平台月流失率，2019 年为 2%</a:t>
+              <a:t>月流失率，称 2019 年为 2%；Antenna 测得 2019 年 10 月已是 4.1%</a:t>
             </a:r>
             <a:endParaRPr lang="en-US" sz="1400" dirty="0"/>
           </a:p>
@@ -5619,7 +7488,7 @@
                   <a:schemeClr val="accent5"/>
                 </a:solidFill>
               </a:rPr>
-              <a:t>Fabric，经 Broadband TV News 转述</a:t>
+              <a:t>Fabric，定义未公开</a:t>
             </a:r>
             <a:endParaRPr lang="en-US" sz="1400" dirty="0"/>
           </a:p>
@@ -5781,8 +7650,8 @@
         </p:nvSpPr>
         <p:spPr>
           <a:xfrm>
-            <a:off x="6400800" y="3337560"/>
-            <a:ext cx="2194560" cy="1371600"/>
+            <a:off x="6400800" y="3291840"/>
+            <a:ext cx="2240280" cy="1234440"/>
           </a:xfrm>
           <a:prstGeom prst="rect">
             <a:avLst/>
@@ -5806,7 +7675,7 @@
                   <a:schemeClr val="tx1"/>
                 </a:solidFill>
               </a:rPr>
-              <a:t>OTT 与付费电视 2029 年消费支出</a:t>
+              <a:t>OTT 与付费电视 2029 年支出，是全球 54 个市场合计</a:t>
             </a:r>
             <a:endParaRPr lang="en-US" sz="1400" dirty="0"/>
           </a:p>
@@ -5823,7 +7692,7 @@
                   <a:schemeClr val="accent5"/>
                 </a:solidFill>
               </a:rPr>
-              <a:t>PwC 娱乐与媒体展望</a:t>
+              <a:t>PwC，年增仅 1.8%</a:t>
             </a:r>
             <a:endParaRPr lang="en-US" sz="1400" dirty="0"/>
           </a:p>
@@ -5985,8 +7854,8 @@
         </p:nvSpPr>
         <p:spPr>
           <a:xfrm>
-            <a:off x="9212580" y="3337560"/>
-            <a:ext cx="2194560" cy="1371600"/>
+            <a:off x="9212580" y="3291840"/>
+            <a:ext cx="2240280" cy="1234440"/>
           </a:xfrm>
           <a:prstGeom prst="rect">
             <a:avLst/>
@@ -6010,7 +7879,7 @@
                   <a:schemeClr val="tx1"/>
                 </a:solidFill>
               </a:rPr>
-              <a:t>聊天机器人回答找对了播出平台</a:t>
+              <a:t>找对了播出平台；美英德约 80%，法意西不到 30%</a:t>
             </a:r>
             <a:endParaRPr lang="en-US" sz="1400" dirty="0"/>
           </a:p>
@@ -6027,7 +7896,7 @@
                   <a:schemeClr val="accent5"/>
                 </a:solidFill>
               </a:rPr>
-              <a:t>Veed Analytics，完整测试方案未公开</a:t>
+              <a:t>Veed，多国合并值</a:t>
             </a:r>
             <a:endParaRPr lang="en-US" sz="1400" dirty="0"/>
           </a:p>
@@ -6133,7 +8002,7 @@
             <a:pPr algn="r"/>
             <a:fld id="{F7021451-1387-4CA6-816F-3879F97B5CBC}" type="slidenum">
               <a:rPr b="0" lang="en-US"/>
-              <a:t>11</a:t>
+              <a:t>13</a:t>
             </a:fld>
             <a:endParaRPr lang="en-US"/>
           </a:p>
@@ -6147,9 +8016,9 @@
 </p:sld>
 </file>
 
-<file path=ppt/slides/slide12.xml><?xml version="1.0" encoding="utf-8"?>
+<file path=ppt/slides/slide14.xml><?xml version="1.0" encoding="utf-8"?>
 <p:sld xmlns:a="http://schemas.openxmlformats.org/drawingml/2006/main" xmlns:r="http://schemas.openxmlformats.org/officeDocument/2006/relationships" xmlns:p="http://schemas.openxmlformats.org/presentationml/2006/main">
-  <p:cSld name="Slide 12">
+  <p:cSld name="Slide 14">
     <p:spTree>
       <p:nvGrpSpPr>
         <p:cNvPr id="1" name=""/>
@@ -6196,7 +8065,7 @@
                   <a:schemeClr val="tx2"/>
                 </a:solidFill>
               </a:rPr>
-              <a:t>局限五：几处引用和口径需要校准</a:t>
+              <a:t>局限六：几处引用和口径需要校准</a:t>
             </a:r>
             <a:endParaRPr lang="en-US" sz="3000" dirty="0"/>
           </a:p>
@@ -6291,7 +8160,7 @@
       </p:sp>
       <p:graphicFrame>
         <p:nvGraphicFramePr>
-          <p:cNvPr id="13" name="校准表"/>
+          <p:cNvPr id="15" name="校准表"/>
           <p:cNvGraphicFramePr>
             <a:graphicFrameLocks noGrp="1"/>
           </p:cNvGraphicFramePr>
@@ -6826,7 +8695,7 @@
                             <a:schemeClr val="tx1"/>
                           </a:solidFill>
                         </a:rPr>
-                        <a:t>第 9 页 32%、第 12 页 34% 认为选择太多影响观看体验</a:t>
+                        <a:t>PwC：OTT 与付费电视支出 2029 年达 3,185 亿美元</a:t>
                       </a:r>
                       <a:endParaRPr lang="en-US" sz="1300" dirty="0"/>
                     </a:p>
@@ -6887,7 +8756,7 @@
                             <a:schemeClr val="tx1"/>
                           </a:solidFill>
                         </a:rPr>
-                        <a:t>同一份 2025 调查、18–34 岁都是 48%，报告没说明是题目不同还是国家范围不同</a:t>
+                        <a:t>这是全球 54 个国家和地区的合计（2024 年 2,913 亿，年增 1.8%），报告没写明是全球</a:t>
                       </a:r>
                       <a:endParaRPr lang="en-US" sz="1300" dirty="0"/>
                     </a:p>
@@ -7129,7 +8998,7 @@
                   <a:schemeClr val="accent5"/>
                 </a:solidFill>
               </a:rPr>
-              <a:t>来源：报告第 2、5、9、12、18、22 页；USC 论文（EMNLP 2021）；Deloitte《2025 Digital Media Trends》方法说明。</a:t>
+              <a:t>来源：报告第 2、5、6、18、22 页；USC 论文（EMNLP 2021）；Deloitte、PwC 方法说明与新闻稿。</a:t>
             </a:r>
             <a:endParaRPr lang="en-US" sz="1000" dirty="0"/>
           </a:p>
@@ -7174,7 +9043,7 @@
             <a:pPr algn="r"/>
             <a:fld id="{F7021451-1387-4CA6-816F-3879F97B5CBC}" type="slidenum">
               <a:rPr b="0" lang="en-US"/>
-              <a:t>12</a:t>
+              <a:t>14</a:t>
             </a:fld>
             <a:endParaRPr lang="en-US"/>
           </a:p>
@@ -7188,9 +9057,9 @@
 </p:sld>
 </file>
 
-<file path=ppt/slides/slide13.xml><?xml version="1.0" encoding="utf-8"?>
+<file path=ppt/slides/slide15.xml><?xml version="1.0" encoding="utf-8"?>
 <p:sld xmlns:a="http://schemas.openxmlformats.org/drawingml/2006/main" xmlns:r="http://schemas.openxmlformats.org/officeDocument/2006/relationships" xmlns:p="http://schemas.openxmlformats.org/presentationml/2006/main">
-  <p:cSld name="Slide 13">
+  <p:cSld name="Slide 15">
     <p:spTree>
       <p:nvGrpSpPr>
         <p:cNvPr id="1" name=""/>
@@ -7691,7 +9560,7 @@
                   <a:schemeClr val="tx1"/>
                 </a:solidFill>
               </a:rPr>
-              <a:t>18–34 岁 CTV 占 80%</a:t>
+              <a:t>51% 的美国人觉得服务太多难找</a:t>
             </a:r>
             <a:endParaRPr lang="en-US" sz="1400" dirty="0"/>
           </a:p>
@@ -7705,7 +9574,7 @@
                   <a:schemeClr val="accent2"/>
                 </a:solidFill>
               </a:rPr>
-              <a:t>2:04 ÷ 2:34 = 80.5%  ✓</a:t>
+              <a:t>与 2025 调查原文美国一栏 51% 一致  ✓</a:t>
             </a:r>
             <a:endParaRPr lang="en-US" sz="1400" dirty="0"/>
           </a:p>
@@ -7872,7 +9741,7 @@
             <a:pPr algn="r"/>
             <a:fld id="{F7021451-1387-4CA6-816F-3879F97B5CBC}" type="slidenum">
               <a:rPr b="0" lang="en-US"/>
-              <a:t>13</a:t>
+              <a:t>15</a:t>
             </a:fld>
             <a:endParaRPr lang="en-US"/>
           </a:p>
@@ -7886,9 +9755,9 @@
 </p:sld>
 </file>
 
-<file path=ppt/slides/slide14.xml><?xml version="1.0" encoding="utf-8"?>
+<file path=ppt/slides/slide16.xml><?xml version="1.0" encoding="utf-8"?>
 <p:sld xmlns:a="http://schemas.openxmlformats.org/drawingml/2006/main" xmlns:r="http://schemas.openxmlformats.org/officeDocument/2006/relationships" xmlns:p="http://schemas.openxmlformats.org/presentationml/2006/main">
-  <p:cSld name="Slide 14">
+  <p:cSld name="Slide 16">
     <p:spTree>
       <p:nvGrpSpPr>
         <p:cNvPr id="1" name=""/>
@@ -8083,7 +9952,7 @@
                   <a:schemeClr val="bg1"/>
                 </a:solidFill>
               </a:rPr>
-              <a:t>对“美国人”的精确估计，或“找不到节目导致退订”的因果证据。</a:t>
+              <a:t>对“美国人”的精确估计（部分数字其实是六国平均），或“找不到节目导致退订”的因果证据。</a:t>
             </a:r>
             <a:endParaRPr lang="en-US" sz="1800" dirty="0"/>
           </a:p>
@@ -8338,7 +10207,7 @@
             <a:pPr algn="r"/>
             <a:fld id="{F7021451-1387-4CA6-816F-3879F97B5CBC}" type="slidenum">
               <a:rPr b="0" lang="en-US"/>
-              <a:t>14</a:t>
+              <a:t>16</a:t>
             </a:fld>
             <a:endParaRPr lang="en-US"/>
           </a:p>
@@ -10181,7 +12050,7 @@
                             <a:schemeClr val="tx1"/>
                           </a:solidFill>
                         </a:rPr>
-                        <a:t>3,000（6 国）</a:t>
+                        <a:t>3,000（每国 500）</a:t>
                       </a:r>
                       <a:endParaRPr lang="en-US" sz="1300" dirty="0"/>
                     </a:p>
@@ -11594,7 +13463,7 @@
                   <a:schemeClr val="tx2"/>
                 </a:solidFill>
               </a:rPr>
-              <a:t>报告的主要结论</a:t>
+              <a:t>逐一核查 11 个数据来源：方法公开到什么程度</a:t>
             </a:r>
             <a:endParaRPr lang="en-US" sz="3000" dirty="0"/>
           </a:p>
@@ -11602,18 +13471,18 @@
       </p:sp>
       <p:sp>
         <p:nvSpPr>
-          <p:cNvPr id="3" name="结论卡1"/>
+          <p:cNvPr id="3" name="来源卡1"/>
           <p:cNvSpPr/>
           <p:nvPr/>
         </p:nvSpPr>
         <p:spPr>
           <a:xfrm>
-            <a:off x="548640" y="1417320"/>
-            <a:ext cx="3474720" cy="1965960"/>
+            <a:off x="548640" y="1325880"/>
+            <a:ext cx="2651760" cy="1371600"/>
           </a:xfrm>
           <a:prstGeom prst="roundRect">
             <a:avLst>
-              <a:gd name="adj" fmla="val 5581"/>
+              <a:gd name="adj" fmla="val 8000"/>
             </a:avLst>
           </a:prstGeom>
           <a:solidFill>
@@ -11629,14 +13498,39 @@
       </p:sp>
       <p:sp>
         <p:nvSpPr>
-          <p:cNvPr id="4" name="结论数字1"/>
+          <p:cNvPr id="4" name="状态点1"/>
+          <p:cNvSpPr/>
+          <p:nvPr/>
+        </p:nvSpPr>
+        <p:spPr>
+          <a:xfrm>
+            <a:off x="731520" y="1508760"/>
+            <a:ext cx="182880" cy="182880"/>
+          </a:xfrm>
+          <a:prstGeom prst="ellipse">
+            <a:avLst/>
+          </a:prstGeom>
+          <a:solidFill>
+            <a:schemeClr val="accent3"/>
+          </a:solidFill>
+          <a:ln w="12700">
+            <a:solidFill>
+              <a:schemeClr val="accent3"/>
+            </a:solidFill>
+            <a:prstDash val="solid"/>
+          </a:ln>
+        </p:spPr>
+      </p:sp>
+      <p:sp>
+        <p:nvSpPr>
+          <p:cNvPr id="5" name="来源类型1"/>
           <p:cNvSpPr txBox="1"/>
           <p:nvPr/>
         </p:nvSpPr>
         <p:spPr>
           <a:xfrm>
-            <a:off x="822960" y="1600200"/>
-            <a:ext cx="3017520" cy="822960"/>
+            <a:off x="1005840" y="1435608"/>
+            <a:ext cx="2103120" cy="320040"/>
           </a:xfrm>
           <a:prstGeom prst="rect">
             <a:avLst/>
@@ -11652,30 +13546,38 @@
               <a:buNone/>
             </a:pPr>
             <a:r>
-              <a:rPr lang="en-US" sz="4000" b="1" dirty="0">
-                <a:solidFill>
-                  <a:schemeClr val="accent1"/>
-                </a:solidFill>
-                <a:latin typeface="Arial" pitchFamily="34" charset="0"/>
-                <a:ea typeface="Arial" pitchFamily="34" charset="-122"/>
-                <a:cs typeface="Arial" pitchFamily="34" charset="-120"/>
-              </a:rPr>
-              <a:t>54%</a:t>
-            </a:r>
-            <a:endParaRPr lang="en-US" sz="4000" dirty="0"/>
-          </a:p>
-        </p:txBody>
-      </p:sp>
-      <p:sp>
-        <p:nvSpPr>
-          <p:cNvPr id="5" name="结论说明1"/>
+              <a:rPr lang="en-US" sz="1100" dirty="0">
+                <a:solidFill>
+                  <a:schemeClr val="accent5"/>
+                </a:solidFill>
+              </a:rPr>
+              <a:t>问卷 ｜ </a:t>
+            </a:r>
+            <a:pPr indent="0" marL="0">
+              <a:buNone/>
+            </a:pPr>
+            <a:r>
+              <a:rPr lang="en-US" sz="1100" b="1" dirty="0">
+                <a:solidFill>
+                  <a:schemeClr val="accent3"/>
+                </a:solidFill>
+              </a:rPr>
+              <a:t>关键信息未公开</a:t>
+            </a:r>
+            <a:endParaRPr lang="en-US" sz="1100" dirty="0"/>
+          </a:p>
+        </p:txBody>
+      </p:sp>
+      <p:sp>
+        <p:nvSpPr>
+          <p:cNvPr id="6" name="来源说明1"/>
           <p:cNvSpPr txBox="1"/>
           <p:nvPr/>
         </p:nvSpPr>
         <p:spPr>
           <a:xfrm>
-            <a:off x="822960" y="2423160"/>
-            <a:ext cx="3017520" cy="822960"/>
+            <a:off x="731520" y="1783080"/>
+            <a:ext cx="2331720" cy="868680"/>
           </a:xfrm>
           <a:prstGeom prst="rect">
             <a:avLst/>
@@ -11688,15 +13590,35 @@
           <a:lstStyle/>
           <a:p>
             <a:pPr indent="0" marL="0">
-              <a:buNone/>
-            </a:pPr>
-            <a:r>
-              <a:rPr lang="en-US" sz="1400" dirty="0">
+              <a:spcAft>
+                <a:spcPts val="300"/>
+              </a:spcAft>
+              <a:buNone/>
+            </a:pPr>
+            <a:r>
+              <a:rPr lang="en-US" sz="1400" b="1" dirty="0">
+                <a:solidFill>
+                  <a:schemeClr val="tx2"/>
+                </a:solidFill>
+              </a:rPr>
+              <a:t>Gracenote 2026 AI 调查</a:t>
+            </a:r>
+            <a:endParaRPr lang="en-US" sz="1400" dirty="0"/>
+          </a:p>
+          <a:p>
+            <a:pPr indent="0" marL="0">
+              <a:spcAft>
+                <a:spcPts val="300"/>
+              </a:spcAft>
+              <a:buNone/>
+            </a:pPr>
+            <a:r>
+              <a:rPr lang="en-US" sz="1100" dirty="0">
                 <a:solidFill>
                   <a:schemeClr val="tx1"/>
                 </a:solidFill>
               </a:rPr>
-              <a:t>Alpha 世代（13–14 岁受访者）每天使用 AI 聊天机器人</a:t>
+              <a:t>线上 · 美国 AI 用户 · 4,003 人；招募、加权、回应率未公开</a:t>
             </a:r>
             <a:endParaRPr lang="en-US" sz="1400" dirty="0"/>
           </a:p>
@@ -11704,18 +13626,18 @@
       </p:sp>
       <p:sp>
         <p:nvSpPr>
-          <p:cNvPr id="6" name="结论卡2"/>
+          <p:cNvPr id="7" name="来源卡2"/>
           <p:cNvSpPr/>
           <p:nvPr/>
         </p:nvSpPr>
         <p:spPr>
           <a:xfrm>
-            <a:off x="4297680" y="1417320"/>
-            <a:ext cx="3474720" cy="1965960"/>
+            <a:off x="3360420" y="1325880"/>
+            <a:ext cx="2651760" cy="1371600"/>
           </a:xfrm>
           <a:prstGeom prst="roundRect">
             <a:avLst>
-              <a:gd name="adj" fmla="val 5581"/>
+              <a:gd name="adj" fmla="val 8000"/>
             </a:avLst>
           </a:prstGeom>
           <a:solidFill>
@@ -11731,14 +13653,39 @@
       </p:sp>
       <p:sp>
         <p:nvSpPr>
-          <p:cNvPr id="7" name="结论数字2"/>
+          <p:cNvPr id="8" name="状态点2"/>
+          <p:cNvSpPr/>
+          <p:nvPr/>
+        </p:nvSpPr>
+        <p:spPr>
+          <a:xfrm>
+            <a:off x="3543300" y="1508760"/>
+            <a:ext cx="182880" cy="182880"/>
+          </a:xfrm>
+          <a:prstGeom prst="ellipse">
+            <a:avLst/>
+          </a:prstGeom>
+          <a:solidFill>
+            <a:schemeClr val="accent3"/>
+          </a:solidFill>
+          <a:ln w="12700">
+            <a:solidFill>
+              <a:schemeClr val="accent3"/>
+            </a:solidFill>
+            <a:prstDash val="solid"/>
+          </a:ln>
+        </p:spPr>
+      </p:sp>
+      <p:sp>
+        <p:nvSpPr>
+          <p:cNvPr id="9" name="来源类型2"/>
           <p:cNvSpPr txBox="1"/>
           <p:nvPr/>
         </p:nvSpPr>
         <p:spPr>
           <a:xfrm>
-            <a:off x="4572000" y="1600200"/>
-            <a:ext cx="3017520" cy="822960"/>
+            <a:off x="3817620" y="1435608"/>
+            <a:ext cx="2103120" cy="320040"/>
           </a:xfrm>
           <a:prstGeom prst="rect">
             <a:avLst/>
@@ -11754,30 +13701,38 @@
               <a:buNone/>
             </a:pPr>
             <a:r>
-              <a:rPr lang="en-US" sz="4000" b="1" dirty="0">
-                <a:solidFill>
-                  <a:schemeClr val="accent1"/>
-                </a:solidFill>
-                <a:latin typeface="Arial" pitchFamily="34" charset="0"/>
-                <a:ea typeface="Arial" pitchFamily="34" charset="-122"/>
-                <a:cs typeface="Arial" pitchFamily="34" charset="-120"/>
-              </a:rPr>
-              <a:t>80%</a:t>
-            </a:r>
-            <a:endParaRPr lang="en-US" sz="4000" dirty="0"/>
-          </a:p>
-        </p:txBody>
-      </p:sp>
-      <p:sp>
-        <p:nvSpPr>
-          <p:cNvPr id="8" name="结论说明2"/>
+              <a:rPr lang="en-US" sz="1100" dirty="0">
+                <a:solidFill>
+                  <a:schemeClr val="accent5"/>
+                </a:solidFill>
+              </a:rPr>
+              <a:t>问卷 ｜ </a:t>
+            </a:r>
+            <a:pPr indent="0" marL="0">
+              <a:buNone/>
+            </a:pPr>
+            <a:r>
+              <a:rPr lang="en-US" sz="1100" b="1" dirty="0">
+                <a:solidFill>
+                  <a:schemeClr val="accent3"/>
+                </a:solidFill>
+              </a:rPr>
+              <a:t>关键信息未公开</a:t>
+            </a:r>
+            <a:endParaRPr lang="en-US" sz="1100" dirty="0"/>
+          </a:p>
+        </p:txBody>
+      </p:sp>
+      <p:sp>
+        <p:nvSpPr>
+          <p:cNvPr id="10" name="来源说明2"/>
           <p:cNvSpPr txBox="1"/>
           <p:nvPr/>
         </p:nvSpPr>
         <p:spPr>
           <a:xfrm>
-            <a:off x="4572000" y="2423160"/>
-            <a:ext cx="3017520" cy="822960"/>
+            <a:off x="3543300" y="1783080"/>
+            <a:ext cx="2331720" cy="868680"/>
           </a:xfrm>
           <a:prstGeom prst="rect">
             <a:avLst/>
@@ -11790,15 +13745,35 @@
           <a:lstStyle/>
           <a:p>
             <a:pPr indent="0" marL="0">
-              <a:buNone/>
-            </a:pPr>
-            <a:r>
-              <a:rPr lang="en-US" sz="1400" dirty="0">
+              <a:spcAft>
+                <a:spcPts val="300"/>
+              </a:spcAft>
+              <a:buNone/>
+            </a:pPr>
+            <a:r>
+              <a:rPr lang="en-US" sz="1400" b="1" dirty="0">
+                <a:solidFill>
+                  <a:schemeClr val="tx2"/>
+                </a:solidFill>
+              </a:rPr>
+              <a:t>Gracenote 2025 流媒体调查</a:t>
+            </a:r>
+            <a:endParaRPr lang="en-US" sz="1400" dirty="0"/>
+          </a:p>
+          <a:p>
+            <a:pPr indent="0" marL="0">
+              <a:spcAft>
+                <a:spcPts val="300"/>
+              </a:spcAft>
+              <a:buNone/>
+            </a:pPr>
+            <a:r>
+              <a:rPr lang="en-US" sz="1100" dirty="0">
                 <a:solidFill>
                   <a:schemeClr val="tx1"/>
                 </a:solidFill>
               </a:rPr>
-              <a:t>Alpha 世代称过去 12–18 个月用得更多了</a:t>
+              <a:t>线上 · 6 国各 500 人；招募、加权、回应率未公开</a:t>
             </a:r>
             <a:endParaRPr lang="en-US" sz="1400" dirty="0"/>
           </a:p>
@@ -11806,18 +13781,18 @@
       </p:sp>
       <p:sp>
         <p:nvSpPr>
-          <p:cNvPr id="9" name="结论卡3"/>
+          <p:cNvPr id="11" name="来源卡3"/>
           <p:cNvSpPr/>
           <p:nvPr/>
         </p:nvSpPr>
         <p:spPr>
           <a:xfrm>
-            <a:off x="8046720" y="1417320"/>
-            <a:ext cx="3474720" cy="1965960"/>
+            <a:off x="6172200" y="1325880"/>
+            <a:ext cx="2651760" cy="1371600"/>
           </a:xfrm>
           <a:prstGeom prst="roundRect">
             <a:avLst>
-              <a:gd name="adj" fmla="val 5581"/>
+              <a:gd name="adj" fmla="val 8000"/>
             </a:avLst>
           </a:prstGeom>
           <a:solidFill>
@@ -11833,14 +13808,39 @@
       </p:sp>
       <p:sp>
         <p:nvSpPr>
-          <p:cNvPr id="10" name="结论数字3"/>
+          <p:cNvPr id="12" name="状态点3"/>
+          <p:cNvSpPr/>
+          <p:nvPr/>
+        </p:nvSpPr>
+        <p:spPr>
+          <a:xfrm>
+            <a:off x="6355080" y="1508760"/>
+            <a:ext cx="182880" cy="182880"/>
+          </a:xfrm>
+          <a:prstGeom prst="ellipse">
+            <a:avLst/>
+          </a:prstGeom>
+          <a:solidFill>
+            <a:schemeClr val="accent2"/>
+          </a:solidFill>
+          <a:ln w="12700">
+            <a:solidFill>
+              <a:schemeClr val="accent2"/>
+            </a:solidFill>
+            <a:prstDash val="solid"/>
+          </a:ln>
+        </p:spPr>
+      </p:sp>
+      <p:sp>
+        <p:nvSpPr>
+          <p:cNvPr id="13" name="来源类型3"/>
           <p:cNvSpPr txBox="1"/>
           <p:nvPr/>
         </p:nvSpPr>
         <p:spPr>
           <a:xfrm>
-            <a:off x="8321040" y="1600200"/>
-            <a:ext cx="3017520" cy="822960"/>
+            <a:off x="6629400" y="1435608"/>
+            <a:ext cx="2103120" cy="320040"/>
           </a:xfrm>
           <a:prstGeom prst="rect">
             <a:avLst/>
@@ -11856,30 +13856,38 @@
               <a:buNone/>
             </a:pPr>
             <a:r>
-              <a:rPr lang="en-US" sz="4000" b="1" dirty="0">
-                <a:solidFill>
-                  <a:schemeClr val="accent1"/>
-                </a:solidFill>
-                <a:latin typeface="Arial" pitchFamily="34" charset="0"/>
-                <a:ea typeface="Arial" pitchFamily="34" charset="-122"/>
-                <a:cs typeface="Arial" pitchFamily="34" charset="-120"/>
-              </a:rPr>
-              <a:t>75%</a:t>
-            </a:r>
-            <a:endParaRPr lang="en-US" sz="4000" dirty="0"/>
-          </a:p>
-        </p:txBody>
-      </p:sp>
-      <p:sp>
-        <p:nvSpPr>
-          <p:cNvPr id="11" name="结论说明3"/>
+              <a:rPr lang="en-US" sz="1100" dirty="0">
+                <a:solidFill>
+                  <a:schemeClr val="accent5"/>
+                </a:solidFill>
+              </a:rPr>
+              <a:t>问卷 ｜ </a:t>
+            </a:r>
+            <a:pPr indent="0" marL="0">
+              <a:buNone/>
+            </a:pPr>
+            <a:r>
+              <a:rPr lang="en-US" sz="1100" b="1" dirty="0">
+                <a:solidFill>
+                  <a:schemeClr val="accent2"/>
+                </a:solidFill>
+              </a:rPr>
+              <a:t>方法公开</a:t>
+            </a:r>
+            <a:endParaRPr lang="en-US" sz="1100" dirty="0"/>
+          </a:p>
+        </p:txBody>
+      </p:sp>
+      <p:sp>
+        <p:nvSpPr>
+          <p:cNvPr id="14" name="来源说明3"/>
           <p:cNvSpPr txBox="1"/>
           <p:nvPr/>
         </p:nvSpPr>
         <p:spPr>
           <a:xfrm>
-            <a:off x="8321040" y="2423160"/>
-            <a:ext cx="3017520" cy="822960"/>
+            <a:off x="6355080" y="1783080"/>
+            <a:ext cx="2331720" cy="868680"/>
           </a:xfrm>
           <a:prstGeom prst="rect">
             <a:avLst/>
@@ -11892,15 +13900,35 @@
           <a:lstStyle/>
           <a:p>
             <a:pPr indent="0" marL="0">
-              <a:buNone/>
-            </a:pPr>
-            <a:r>
-              <a:rPr lang="en-US" sz="1400" dirty="0">
+              <a:spcAft>
+                <a:spcPts val="300"/>
+              </a:spcAft>
+              <a:buNone/>
+            </a:pPr>
+            <a:r>
+              <a:rPr lang="en-US" sz="1400" b="1" dirty="0">
+                <a:solidFill>
+                  <a:schemeClr val="tx2"/>
+                </a:solidFill>
+              </a:rPr>
+              <a:t>Pew 青少年调查</a:t>
+            </a:r>
+            <a:endParaRPr lang="en-US" sz="1400" dirty="0"/>
+          </a:p>
+          <a:p>
+            <a:pPr indent="0" marL="0">
+              <a:spcAft>
+                <a:spcPts val="300"/>
+              </a:spcAft>
+              <a:buNone/>
+            </a:pPr>
+            <a:r>
+              <a:rPr lang="en-US" sz="1100" dirty="0">
                 <a:solidFill>
                   <a:schemeClr val="tx1"/>
                 </a:solidFill>
               </a:rPr>
-              <a:t>受访者会核查聊天机器人给出的答案</a:t>
+              <a:t>概率样本库 · 1,458 人 · 加权 · 误差 ±3.3 个百分点</a:t>
             </a:r>
             <a:endParaRPr lang="en-US" sz="1400" dirty="0"/>
           </a:p>
@@ -11908,18 +13936,18 @@
       </p:sp>
       <p:sp>
         <p:nvSpPr>
-          <p:cNvPr id="12" name="结论卡4"/>
+          <p:cNvPr id="15" name="来源卡4"/>
           <p:cNvSpPr/>
           <p:nvPr/>
         </p:nvSpPr>
         <p:spPr>
           <a:xfrm>
-            <a:off x="548640" y="3657600"/>
-            <a:ext cx="3474720" cy="1965960"/>
+            <a:off x="8983980" y="1325880"/>
+            <a:ext cx="2651760" cy="1371600"/>
           </a:xfrm>
           <a:prstGeom prst="roundRect">
             <a:avLst>
-              <a:gd name="adj" fmla="val 5581"/>
+              <a:gd name="adj" fmla="val 8000"/>
             </a:avLst>
           </a:prstGeom>
           <a:solidFill>
@@ -11935,14 +13963,39 @@
       </p:sp>
       <p:sp>
         <p:nvSpPr>
-          <p:cNvPr id="13" name="结论数字4"/>
+          <p:cNvPr id="16" name="状态点4"/>
+          <p:cNvSpPr/>
+          <p:nvPr/>
+        </p:nvSpPr>
+        <p:spPr>
+          <a:xfrm>
+            <a:off x="9166860" y="1508760"/>
+            <a:ext cx="182880" cy="182880"/>
+          </a:xfrm>
+          <a:prstGeom prst="ellipse">
+            <a:avLst/>
+          </a:prstGeom>
+          <a:solidFill>
+            <a:schemeClr val="accent2"/>
+          </a:solidFill>
+          <a:ln w="12700">
+            <a:solidFill>
+              <a:schemeClr val="accent2"/>
+            </a:solidFill>
+            <a:prstDash val="solid"/>
+          </a:ln>
+        </p:spPr>
+      </p:sp>
+      <p:sp>
+        <p:nvSpPr>
+          <p:cNvPr id="17" name="来源类型4"/>
           <p:cNvSpPr txBox="1"/>
           <p:nvPr/>
         </p:nvSpPr>
         <p:spPr>
           <a:xfrm>
-            <a:off x="822960" y="3840480"/>
-            <a:ext cx="3017520" cy="822960"/>
+            <a:off x="9441180" y="1435608"/>
+            <a:ext cx="2103120" cy="320040"/>
           </a:xfrm>
           <a:prstGeom prst="rect">
             <a:avLst/>
@@ -11958,30 +14011,38 @@
               <a:buNone/>
             </a:pPr>
             <a:r>
-              <a:rPr lang="en-US" sz="4000" b="1" dirty="0">
+              <a:rPr lang="en-US" sz="1100" dirty="0">
+                <a:solidFill>
+                  <a:schemeClr val="accent5"/>
+                </a:solidFill>
+              </a:rPr>
+              <a:t>问卷 ｜ </a:t>
+            </a:r>
+            <a:pPr indent="0" marL="0">
+              <a:buNone/>
+            </a:pPr>
+            <a:r>
+              <a:rPr lang="en-US" sz="1100" b="1" dirty="0">
                 <a:solidFill>
                   <a:schemeClr val="accent2"/>
                 </a:solidFill>
-                <a:latin typeface="Arial" pitchFamily="34" charset="0"/>
-                <a:ea typeface="Arial" pitchFamily="34" charset="-122"/>
-                <a:cs typeface="Arial" pitchFamily="34" charset="-120"/>
-              </a:rPr>
-              <a:t>14 分钟</a:t>
-            </a:r>
-            <a:endParaRPr lang="en-US" sz="4000" dirty="0"/>
-          </a:p>
-        </p:txBody>
-      </p:sp>
-      <p:sp>
-        <p:nvSpPr>
-          <p:cNvPr id="14" name="结论说明4"/>
+              </a:rPr>
+              <a:t>方法公开</a:t>
+            </a:r>
+            <a:endParaRPr lang="en-US" sz="1100" dirty="0"/>
+          </a:p>
+        </p:txBody>
+      </p:sp>
+      <p:sp>
+        <p:nvSpPr>
+          <p:cNvPr id="18" name="来源说明4"/>
           <p:cNvSpPr txBox="1"/>
           <p:nvPr/>
         </p:nvSpPr>
         <p:spPr>
           <a:xfrm>
-            <a:off x="822960" y="4663440"/>
-            <a:ext cx="3017520" cy="822960"/>
+            <a:off x="9166860" y="1783080"/>
+            <a:ext cx="2331720" cy="868680"/>
           </a:xfrm>
           <a:prstGeom prst="rect">
             <a:avLst/>
@@ -11994,15 +14055,35 @@
           <a:lstStyle/>
           <a:p>
             <a:pPr indent="0" marL="0">
-              <a:buNone/>
-            </a:pPr>
-            <a:r>
-              <a:rPr lang="en-US" sz="1400" dirty="0">
+              <a:spcAft>
+                <a:spcPts val="300"/>
+              </a:spcAft>
+              <a:buNone/>
+            </a:pPr>
+            <a:r>
+              <a:rPr lang="en-US" sz="1400" b="1" dirty="0">
+                <a:solidFill>
+                  <a:schemeClr val="tx2"/>
+                </a:solidFill>
+              </a:rPr>
+              <a:t>Deloitte 数字媒体趋势</a:t>
+            </a:r>
+            <a:endParaRPr lang="en-US" sz="1400" dirty="0"/>
+          </a:p>
+          <a:p>
+            <a:pPr indent="0" marL="0">
+              <a:spcAft>
+                <a:spcPts val="300"/>
+              </a:spcAft>
+              <a:buNone/>
+            </a:pPr>
+            <a:r>
+              <a:rPr lang="en-US" sz="1100" dirty="0">
                 <a:solidFill>
                   <a:schemeClr val="tx1"/>
                 </a:solidFill>
               </a:rPr>
-              <a:t>平均找一个想看的节目所花时间；年轻人（18–34 岁）要 16 分钟</a:t>
+              <a:t>线上 · 美国 14 岁以上 3,595 人 · 按人口普查加权</a:t>
             </a:r>
             <a:endParaRPr lang="en-US" sz="1400" dirty="0"/>
           </a:p>
@@ -12010,18 +14091,18 @@
       </p:sp>
       <p:sp>
         <p:nvSpPr>
-          <p:cNvPr id="15" name="结论卡5"/>
+          <p:cNvPr id="19" name="来源卡5"/>
           <p:cNvSpPr/>
           <p:nvPr/>
         </p:nvSpPr>
         <p:spPr>
           <a:xfrm>
-            <a:off x="4297680" y="3657600"/>
-            <a:ext cx="3474720" cy="1965960"/>
+            <a:off x="548640" y="2862072"/>
+            <a:ext cx="2651760" cy="1371600"/>
           </a:xfrm>
           <a:prstGeom prst="roundRect">
             <a:avLst>
-              <a:gd name="adj" fmla="val 5581"/>
+              <a:gd name="adj" fmla="val 8000"/>
             </a:avLst>
           </a:prstGeom>
           <a:solidFill>
@@ -12037,14 +14118,39 @@
       </p:sp>
       <p:sp>
         <p:nvSpPr>
-          <p:cNvPr id="16" name="结论数字5"/>
+          <p:cNvPr id="20" name="状态点5"/>
+          <p:cNvSpPr/>
+          <p:nvPr/>
+        </p:nvSpPr>
+        <p:spPr>
+          <a:xfrm>
+            <a:off x="731520" y="3044952"/>
+            <a:ext cx="182880" cy="182880"/>
+          </a:xfrm>
+          <a:prstGeom prst="ellipse">
+            <a:avLst/>
+          </a:prstGeom>
+          <a:solidFill>
+            <a:schemeClr val="accent2"/>
+          </a:solidFill>
+          <a:ln w="12700">
+            <a:solidFill>
+              <a:schemeClr val="accent2"/>
+            </a:solidFill>
+            <a:prstDash val="solid"/>
+          </a:ln>
+        </p:spPr>
+      </p:sp>
+      <p:sp>
+        <p:nvSpPr>
+          <p:cNvPr id="21" name="来源类型5"/>
           <p:cNvSpPr txBox="1"/>
           <p:nvPr/>
         </p:nvSpPr>
         <p:spPr>
           <a:xfrm>
-            <a:off x="4572000" y="3840480"/>
-            <a:ext cx="3017520" cy="822960"/>
+            <a:off x="1005840" y="2971800"/>
+            <a:ext cx="2103120" cy="320040"/>
           </a:xfrm>
           <a:prstGeom prst="rect">
             <a:avLst/>
@@ -12060,30 +14166,38 @@
               <a:buNone/>
             </a:pPr>
             <a:r>
-              <a:rPr lang="en-US" sz="4000" b="1" dirty="0">
+              <a:rPr lang="en-US" sz="1100" dirty="0">
+                <a:solidFill>
+                  <a:schemeClr val="accent5"/>
+                </a:solidFill>
+              </a:rPr>
+              <a:t>测量 ｜ </a:t>
+            </a:r>
+            <a:pPr indent="0" marL="0">
+              <a:buNone/>
+            </a:pPr>
+            <a:r>
+              <a:rPr lang="en-US" sz="1100" b="1" dirty="0">
                 <a:solidFill>
                   <a:schemeClr val="accent2"/>
                 </a:solidFill>
-                <a:latin typeface="Arial" pitchFamily="34" charset="0"/>
-                <a:ea typeface="Arial" pitchFamily="34" charset="-122"/>
-                <a:cs typeface="Arial" pitchFamily="34" charset="-120"/>
-              </a:rPr>
-              <a:t>54%</a:t>
-            </a:r>
-            <a:endParaRPr lang="en-US" sz="4000" dirty="0"/>
-          </a:p>
-        </p:txBody>
-      </p:sp>
-      <p:sp>
-        <p:nvSpPr>
-          <p:cNvPr id="17" name="结论说明5"/>
+              </a:rPr>
+              <a:t>方法公开</a:t>
+            </a:r>
+            <a:endParaRPr lang="en-US" sz="1100" dirty="0"/>
+          </a:p>
+        </p:txBody>
+      </p:sp>
+      <p:sp>
+        <p:nvSpPr>
+          <p:cNvPr id="22" name="来源说明5"/>
           <p:cNvSpPr txBox="1"/>
           <p:nvPr/>
         </p:nvSpPr>
         <p:spPr>
           <a:xfrm>
-            <a:off x="4572000" y="4663440"/>
-            <a:ext cx="3017520" cy="822960"/>
+            <a:off x="731520" y="3319272"/>
+            <a:ext cx="2331720" cy="868680"/>
           </a:xfrm>
           <a:prstGeom prst="rect">
             <a:avLst/>
@@ -12096,15 +14210,35 @@
           <a:lstStyle/>
           <a:p>
             <a:pPr indent="0" marL="0">
-              <a:buNone/>
-            </a:pPr>
-            <a:r>
-              <a:rPr lang="en-US" sz="1400" dirty="0">
+              <a:spcAft>
+                <a:spcPts val="300"/>
+              </a:spcAft>
+              <a:buNone/>
+            </a:pPr>
+            <a:r>
+              <a:rPr lang="en-US" sz="1400" b="1" dirty="0">
+                <a:solidFill>
+                  <a:schemeClr val="tx2"/>
+                </a:solidFill>
+              </a:rPr>
+              <a:t>Nielsen NPOWER / Media Impact</a:t>
+            </a:r>
+            <a:endParaRPr lang="en-US" sz="1400" dirty="0"/>
+          </a:p>
+          <a:p>
+            <a:pPr indent="0" marL="0">
+              <a:spcAft>
+                <a:spcPts val="300"/>
+              </a:spcAft>
+              <a:buNone/>
+            </a:pPr>
+            <a:r>
+              <a:rPr lang="en-US" sz="1100" dirty="0">
                 <a:solidFill>
                   <a:schemeClr val="tx1"/>
                 </a:solidFill>
               </a:rPr>
-              <a:t>18–34 岁受访者：找不到想看的，会考虑取消订阅</a:t>
+              <a:t>4.2 万户人员测量仪 + 4,500 万户机顶盒与智能电视数据</a:t>
             </a:r>
             <a:endParaRPr lang="en-US" sz="1400" dirty="0"/>
           </a:p>
@@ -12112,18 +14246,18 @@
       </p:sp>
       <p:sp>
         <p:nvSpPr>
-          <p:cNvPr id="18" name="结论卡6"/>
+          <p:cNvPr id="23" name="来源卡6"/>
           <p:cNvSpPr/>
           <p:nvPr/>
         </p:nvSpPr>
         <p:spPr>
           <a:xfrm>
-            <a:off x="8046720" y="3657600"/>
-            <a:ext cx="3474720" cy="1965960"/>
+            <a:off x="3360420" y="2862072"/>
+            <a:ext cx="2651760" cy="1371600"/>
           </a:xfrm>
           <a:prstGeom prst="roundRect">
             <a:avLst>
-              <a:gd name="adj" fmla="val 5581"/>
+              <a:gd name="adj" fmla="val 8000"/>
             </a:avLst>
           </a:prstGeom>
           <a:solidFill>
@@ -12139,14 +14273,39 @@
       </p:sp>
       <p:sp>
         <p:nvSpPr>
-          <p:cNvPr id="19" name="结论数字6"/>
+          <p:cNvPr id="24" name="状态点6"/>
+          <p:cNvSpPr/>
+          <p:nvPr/>
+        </p:nvSpPr>
+        <p:spPr>
+          <a:xfrm>
+            <a:off x="3543300" y="3044952"/>
+            <a:ext cx="182880" cy="182880"/>
+          </a:xfrm>
+          <a:prstGeom prst="ellipse">
+            <a:avLst/>
+          </a:prstGeom>
+          <a:solidFill>
+            <a:schemeClr val="accent2"/>
+          </a:solidFill>
+          <a:ln w="12700">
+            <a:solidFill>
+              <a:schemeClr val="accent2"/>
+            </a:solidFill>
+            <a:prstDash val="solid"/>
+          </a:ln>
+        </p:spPr>
+      </p:sp>
+      <p:sp>
+        <p:nvSpPr>
+          <p:cNvPr id="25" name="来源类型6"/>
           <p:cNvSpPr txBox="1"/>
           <p:nvPr/>
         </p:nvSpPr>
         <p:spPr>
           <a:xfrm>
-            <a:off x="8321040" y="3840480"/>
-            <a:ext cx="3017520" cy="822960"/>
+            <a:off x="3817620" y="2971800"/>
+            <a:ext cx="2103120" cy="320040"/>
           </a:xfrm>
           <a:prstGeom prst="rect">
             <a:avLst/>
@@ -12162,30 +14321,38 @@
               <a:buNone/>
             </a:pPr>
             <a:r>
-              <a:rPr lang="en-US" sz="4000" b="1" dirty="0">
-                <a:solidFill>
-                  <a:schemeClr val="accent1"/>
-                </a:solidFill>
-                <a:latin typeface="Arial" pitchFamily="34" charset="0"/>
-                <a:ea typeface="Arial" pitchFamily="34" charset="-122"/>
-                <a:cs typeface="Arial" pitchFamily="34" charset="-120"/>
-              </a:rPr>
-              <a:t>52%</a:t>
-            </a:r>
-            <a:endParaRPr lang="en-US" sz="4000" dirty="0"/>
-          </a:p>
-        </p:txBody>
-      </p:sp>
-      <p:sp>
-        <p:nvSpPr>
-          <p:cNvPr id="20" name="结论说明6"/>
+              <a:rPr lang="en-US" sz="1100" dirty="0">
+                <a:solidFill>
+                  <a:schemeClr val="accent5"/>
+                </a:solidFill>
+              </a:rPr>
+              <a:t>测量 ｜ </a:t>
+            </a:r>
+            <a:pPr indent="0" marL="0">
+              <a:buNone/>
+            </a:pPr>
+            <a:r>
+              <a:rPr lang="en-US" sz="1100" b="1" dirty="0">
+                <a:solidFill>
+                  <a:schemeClr val="accent2"/>
+                </a:solidFill>
+              </a:rPr>
+              <a:t>方法公开</a:t>
+            </a:r>
+            <a:endParaRPr lang="en-US" sz="1100" dirty="0"/>
+          </a:p>
+        </p:txBody>
+      </p:sp>
+      <p:sp>
+        <p:nvSpPr>
+          <p:cNvPr id="26" name="来源说明6"/>
           <p:cNvSpPr txBox="1"/>
           <p:nvPr/>
         </p:nvSpPr>
         <p:spPr>
           <a:xfrm>
-            <a:off x="8321040" y="4663440"/>
-            <a:ext cx="3017520" cy="822960"/>
+            <a:off x="3543300" y="3319272"/>
+            <a:ext cx="2331720" cy="868680"/>
           </a:xfrm>
           <a:prstGeom prst="rect">
             <a:avLst/>
@@ -12198,15 +14365,35 @@
           <a:lstStyle/>
           <a:p>
             <a:pPr indent="0" marL="0">
-              <a:buNone/>
-            </a:pPr>
-            <a:r>
-              <a:rPr lang="en-US" sz="1400" dirty="0">
+              <a:spcAft>
+                <a:spcPts val="300"/>
+              </a:spcAft>
+              <a:buNone/>
+            </a:pPr>
+            <a:r>
+              <a:rPr lang="en-US" sz="1400" b="1" dirty="0">
+                <a:solidFill>
+                  <a:schemeClr val="tx2"/>
+                </a:solidFill>
+              </a:rPr>
+              <a:t>Nielsen 流媒体收视</a:t>
+            </a:r>
+            <a:endParaRPr lang="en-US" sz="1400" dirty="0"/>
+          </a:p>
+          <a:p>
+            <a:pPr indent="0" marL="0">
+              <a:spcAft>
+                <a:spcPts val="300"/>
+              </a:spcAft>
+              <a:buNone/>
+            </a:pPr>
+            <a:r>
+              <a:rPr lang="en-US" sz="1100" dirty="0">
                 <a:solidFill>
                   <a:schemeClr val="tx1"/>
                 </a:solidFill>
               </a:rPr>
-              <a:t>美国受访者认为 AI 聊天机器人有可能成为最常用的娱乐信息来源</a:t>
+              <a:t>装流媒体测量仪的样本户，只测电视屏幕</a:t>
             </a:r>
             <a:endParaRPr lang="en-US" sz="1400" dirty="0"/>
           </a:p>
@@ -12214,14 +14401,66 @@
       </p:sp>
       <p:sp>
         <p:nvSpPr>
-          <p:cNvPr id="21" name="颜色说明"/>
+          <p:cNvPr id="27" name="来源卡7"/>
+          <p:cNvSpPr/>
+          <p:nvPr/>
+        </p:nvSpPr>
+        <p:spPr>
+          <a:xfrm>
+            <a:off x="6172200" y="2862072"/>
+            <a:ext cx="2651760" cy="1371600"/>
+          </a:xfrm>
+          <a:prstGeom prst="roundRect">
+            <a:avLst>
+              <a:gd name="adj" fmla="val 8000"/>
+            </a:avLst>
+          </a:prstGeom>
+          <a:solidFill>
+            <a:schemeClr val="bg2"/>
+          </a:solidFill>
+          <a:ln w="12700">
+            <a:solidFill>
+              <a:schemeClr val="bg2"/>
+            </a:solidFill>
+            <a:prstDash val="solid"/>
+          </a:ln>
+        </p:spPr>
+      </p:sp>
+      <p:sp>
+        <p:nvSpPr>
+          <p:cNvPr id="28" name="状态点7"/>
+          <p:cNvSpPr/>
+          <p:nvPr/>
+        </p:nvSpPr>
+        <p:spPr>
+          <a:xfrm>
+            <a:off x="6355080" y="3044952"/>
+            <a:ext cx="182880" cy="182880"/>
+          </a:xfrm>
+          <a:prstGeom prst="ellipse">
+            <a:avLst/>
+          </a:prstGeom>
+          <a:solidFill>
+            <a:schemeClr val="accent3"/>
+          </a:solidFill>
+          <a:ln w="12700">
+            <a:solidFill>
+              <a:schemeClr val="accent3"/>
+            </a:solidFill>
+            <a:prstDash val="solid"/>
+          </a:ln>
+        </p:spPr>
+      </p:sp>
+      <p:sp>
+        <p:nvSpPr>
+          <p:cNvPr id="29" name="来源类型7"/>
           <p:cNvSpPr txBox="1"/>
           <p:nvPr/>
         </p:nvSpPr>
         <p:spPr>
           <a:xfrm>
-            <a:off x="548640" y="5897880"/>
-            <a:ext cx="11064240" cy="320040"/>
+            <a:off x="6629400" y="2971800"/>
+            <a:ext cx="2103120" cy="320040"/>
           </a:xfrm>
           <a:prstGeom prst="rect">
             <a:avLst/>
@@ -12237,23 +14476,167 @@
               <a:buNone/>
             </a:pPr>
             <a:r>
+              <a:rPr lang="en-US" sz="1100" dirty="0">
+                <a:solidFill>
+                  <a:schemeClr val="accent5"/>
+                </a:solidFill>
+              </a:rPr>
+              <a:t>数据库 ｜ </a:t>
+            </a:r>
+            <a:pPr indent="0" marL="0">
+              <a:buNone/>
+            </a:pPr>
+            <a:r>
               <a:rPr lang="en-US" sz="1100" b="1" dirty="0">
                 <a:solidFill>
-                  <a:schemeClr val="accent1"/>
-                </a:solidFill>
-              </a:rPr>
-              <a:t>紫色：</a:t>
-            </a:r>
+                  <a:schemeClr val="accent3"/>
+                </a:solidFill>
+              </a:rPr>
+              <a:t>关键信息未公开</a:t>
+            </a:r>
+            <a:endParaRPr lang="en-US" sz="1100" dirty="0"/>
+          </a:p>
+        </p:txBody>
+      </p:sp>
+      <p:sp>
+        <p:nvSpPr>
+          <p:cNvPr id="30" name="来源说明7"/>
+          <p:cNvSpPr txBox="1"/>
+          <p:nvPr/>
+        </p:nvSpPr>
+        <p:spPr>
+          <a:xfrm>
+            <a:off x="6355080" y="3319272"/>
+            <a:ext cx="2331720" cy="868680"/>
+          </a:xfrm>
+          <a:prstGeom prst="rect">
+            <a:avLst/>
+          </a:prstGeom>
+          <a:noFill/>
+          <a:ln/>
+        </p:spPr>
+        <p:txBody>
+          <a:bodyPr wrap="square" lIns="0" tIns="0" rIns="0" bIns="0" rtlCol="0" anchor="t"/>
+          <a:lstStyle/>
+          <a:p>
             <a:pPr indent="0" marL="0">
+              <a:spcAft>
+                <a:spcPts val="300"/>
+              </a:spcAft>
+              <a:buNone/>
+            </a:pPr>
+            <a:r>
+              <a:rPr lang="en-US" sz="1400" b="1" dirty="0">
+                <a:solidFill>
+                  <a:schemeClr val="tx2"/>
+                </a:solidFill>
+              </a:rPr>
+              <a:t>Gracenote 节目数据库</a:t>
+            </a:r>
+            <a:endParaRPr lang="en-US" sz="1400" dirty="0"/>
+          </a:p>
+          <a:p>
+            <a:pPr indent="0" marL="0">
+              <a:spcAft>
+                <a:spcPts val="300"/>
+              </a:spcAft>
               <a:buNone/>
             </a:pPr>
             <a:r>
               <a:rPr lang="en-US" sz="1100" dirty="0">
                 <a:solidFill>
+                  <a:schemeClr val="tx1"/>
+                </a:solidFill>
+              </a:rPr>
+              <a:t>公司自有元数据，非抽样；采集与核验流程未公开</a:t>
+            </a:r>
+            <a:endParaRPr lang="en-US" sz="1400" dirty="0"/>
+          </a:p>
+        </p:txBody>
+      </p:sp>
+      <p:sp>
+        <p:nvSpPr>
+          <p:cNvPr id="31" name="来源卡8"/>
+          <p:cNvSpPr/>
+          <p:nvPr/>
+        </p:nvSpPr>
+        <p:spPr>
+          <a:xfrm>
+            <a:off x="8983980" y="2862072"/>
+            <a:ext cx="2651760" cy="1371600"/>
+          </a:xfrm>
+          <a:prstGeom prst="roundRect">
+            <a:avLst>
+              <a:gd name="adj" fmla="val 8000"/>
+            </a:avLst>
+          </a:prstGeom>
+          <a:solidFill>
+            <a:schemeClr val="bg2"/>
+          </a:solidFill>
+          <a:ln w="12700">
+            <a:solidFill>
+              <a:schemeClr val="bg2"/>
+            </a:solidFill>
+            <a:prstDash val="solid"/>
+          </a:ln>
+        </p:spPr>
+      </p:sp>
+      <p:sp>
+        <p:nvSpPr>
+          <p:cNvPr id="32" name="状态点8"/>
+          <p:cNvSpPr/>
+          <p:nvPr/>
+        </p:nvSpPr>
+        <p:spPr>
+          <a:xfrm>
+            <a:off x="9166860" y="3044952"/>
+            <a:ext cx="182880" cy="182880"/>
+          </a:xfrm>
+          <a:prstGeom prst="ellipse">
+            <a:avLst/>
+          </a:prstGeom>
+          <a:solidFill>
+            <a:schemeClr val="accent5"/>
+          </a:solidFill>
+          <a:ln w="12700">
+            <a:solidFill>
+              <a:schemeClr val="accent5"/>
+            </a:solidFill>
+            <a:prstDash val="solid"/>
+          </a:ln>
+        </p:spPr>
+      </p:sp>
+      <p:sp>
+        <p:nvSpPr>
+          <p:cNvPr id="33" name="来源类型8"/>
+          <p:cNvSpPr txBox="1"/>
+          <p:nvPr/>
+        </p:nvSpPr>
+        <p:spPr>
+          <a:xfrm>
+            <a:off x="9441180" y="2971800"/>
+            <a:ext cx="2103120" cy="320040"/>
+          </a:xfrm>
+          <a:prstGeom prst="rect">
+            <a:avLst/>
+          </a:prstGeom>
+          <a:noFill/>
+          <a:ln/>
+        </p:spPr>
+        <p:txBody>
+          <a:bodyPr wrap="square" lIns="0" tIns="0" rIns="0" bIns="0" rtlCol="0" anchor="ctr"/>
+          <a:lstStyle/>
+          <a:p>
+            <a:pPr indent="0" marL="0">
+              <a:buNone/>
+            </a:pPr>
+            <a:r>
+              <a:rPr lang="en-US" sz="1100" dirty="0">
+                <a:solidFill>
                   <a:schemeClr val="accent5"/>
                 </a:solidFill>
               </a:rPr>
-              <a:t>2026 生成式 AI 使用调查    </a:t>
+              <a:t>预测 ｜ </a:t>
             </a:r>
             <a:pPr indent="0" marL="0">
               <a:buNone/>
@@ -12261,23 +14644,632 @@
             <a:r>
               <a:rPr lang="en-US" sz="1100" b="1" dirty="0">
                 <a:solidFill>
+                  <a:schemeClr val="accent5"/>
+                </a:solidFill>
+              </a:rPr>
+              <a:t>部分公开</a:t>
+            </a:r>
+            <a:endParaRPr lang="en-US" sz="1100" dirty="0"/>
+          </a:p>
+        </p:txBody>
+      </p:sp>
+      <p:sp>
+        <p:nvSpPr>
+          <p:cNvPr id="34" name="来源说明8"/>
+          <p:cNvSpPr txBox="1"/>
+          <p:nvPr/>
+        </p:nvSpPr>
+        <p:spPr>
+          <a:xfrm>
+            <a:off x="9166860" y="3319272"/>
+            <a:ext cx="2331720" cy="868680"/>
+          </a:xfrm>
+          <a:prstGeom prst="rect">
+            <a:avLst/>
+          </a:prstGeom>
+          <a:noFill/>
+          <a:ln/>
+        </p:spPr>
+        <p:txBody>
+          <a:bodyPr wrap="square" lIns="0" tIns="0" rIns="0" bIns="0" rtlCol="0" anchor="t"/>
+          <a:lstStyle/>
+          <a:p>
+            <a:pPr indent="0" marL="0">
+              <a:spcAft>
+                <a:spcPts val="300"/>
+              </a:spcAft>
+              <a:buNone/>
+            </a:pPr>
+            <a:r>
+              <a:rPr lang="en-US" sz="1400" b="1" dirty="0">
+                <a:solidFill>
+                  <a:schemeClr val="tx2"/>
+                </a:solidFill>
+              </a:rPr>
+              <a:t>PwC 娱乐与媒体展望</a:t>
+            </a:r>
+            <a:endParaRPr lang="en-US" sz="1400" dirty="0"/>
+          </a:p>
+          <a:p>
+            <a:pPr indent="0" marL="0">
+              <a:spcAft>
+                <a:spcPts val="300"/>
+              </a:spcAft>
+              <a:buNone/>
+            </a:pPr>
+            <a:r>
+              <a:rPr lang="en-US" sz="1100" dirty="0">
+                <a:solidFill>
+                  <a:schemeClr val="tx1"/>
+                </a:solidFill>
+              </a:rPr>
+              <a:t>公开数据 + 行业访谈 + 建模；54 个国家和地区合计</a:t>
+            </a:r>
+            <a:endParaRPr lang="en-US" sz="1400" dirty="0"/>
+          </a:p>
+        </p:txBody>
+      </p:sp>
+      <p:sp>
+        <p:nvSpPr>
+          <p:cNvPr id="35" name="来源卡9"/>
+          <p:cNvSpPr/>
+          <p:nvPr/>
+        </p:nvSpPr>
+        <p:spPr>
+          <a:xfrm>
+            <a:off x="548640" y="4398264"/>
+            <a:ext cx="2651760" cy="1371600"/>
+          </a:xfrm>
+          <a:prstGeom prst="roundRect">
+            <a:avLst>
+              <a:gd name="adj" fmla="val 8000"/>
+            </a:avLst>
+          </a:prstGeom>
+          <a:solidFill>
+            <a:schemeClr val="bg2"/>
+          </a:solidFill>
+          <a:ln w="12700">
+            <a:solidFill>
+              <a:schemeClr val="bg2"/>
+            </a:solidFill>
+            <a:prstDash val="solid"/>
+          </a:ln>
+        </p:spPr>
+      </p:sp>
+      <p:sp>
+        <p:nvSpPr>
+          <p:cNvPr id="36" name="状态点9"/>
+          <p:cNvSpPr/>
+          <p:nvPr/>
+        </p:nvSpPr>
+        <p:spPr>
+          <a:xfrm>
+            <a:off x="731520" y="4581144"/>
+            <a:ext cx="182880" cy="182880"/>
+          </a:xfrm>
+          <a:prstGeom prst="ellipse">
+            <a:avLst/>
+          </a:prstGeom>
+          <a:solidFill>
+            <a:schemeClr val="accent3"/>
+          </a:solidFill>
+          <a:ln w="12700">
+            <a:solidFill>
+              <a:schemeClr val="accent3"/>
+            </a:solidFill>
+            <a:prstDash val="solid"/>
+          </a:ln>
+        </p:spPr>
+      </p:sp>
+      <p:sp>
+        <p:nvSpPr>
+          <p:cNvPr id="37" name="来源类型9"/>
+          <p:cNvSpPr txBox="1"/>
+          <p:nvPr/>
+        </p:nvSpPr>
+        <p:spPr>
+          <a:xfrm>
+            <a:off x="1005840" y="4507992"/>
+            <a:ext cx="2103120" cy="320040"/>
+          </a:xfrm>
+          <a:prstGeom prst="rect">
+            <a:avLst/>
+          </a:prstGeom>
+          <a:noFill/>
+          <a:ln/>
+        </p:spPr>
+        <p:txBody>
+          <a:bodyPr wrap="square" lIns="0" tIns="0" rIns="0" bIns="0" rtlCol="0" anchor="ctr"/>
+          <a:lstStyle/>
+          <a:p>
+            <a:pPr indent="0" marL="0">
+              <a:buNone/>
+            </a:pPr>
+            <a:r>
+              <a:rPr lang="en-US" sz="1100" dirty="0">
+                <a:solidFill>
+                  <a:schemeClr val="accent5"/>
+                </a:solidFill>
+              </a:rPr>
+              <a:t>测试 ｜ </a:t>
+            </a:r>
+            <a:pPr indent="0" marL="0">
+              <a:buNone/>
+            </a:pPr>
+            <a:r>
+              <a:rPr lang="en-US" sz="1100" b="1" dirty="0">
+                <a:solidFill>
+                  <a:schemeClr val="accent3"/>
+                </a:solidFill>
+              </a:rPr>
+              <a:t>关键信息未公开</a:t>
+            </a:r>
+            <a:endParaRPr lang="en-US" sz="1100" dirty="0"/>
+          </a:p>
+        </p:txBody>
+      </p:sp>
+      <p:sp>
+        <p:nvSpPr>
+          <p:cNvPr id="38" name="来源说明9"/>
+          <p:cNvSpPr txBox="1"/>
+          <p:nvPr/>
+        </p:nvSpPr>
+        <p:spPr>
+          <a:xfrm>
+            <a:off x="731520" y="4855464"/>
+            <a:ext cx="2331720" cy="868680"/>
+          </a:xfrm>
+          <a:prstGeom prst="rect">
+            <a:avLst/>
+          </a:prstGeom>
+          <a:noFill/>
+          <a:ln/>
+        </p:spPr>
+        <p:txBody>
+          <a:bodyPr wrap="square" lIns="0" tIns="0" rIns="0" bIns="0" rtlCol="0" anchor="t"/>
+          <a:lstStyle/>
+          <a:p>
+            <a:pPr indent="0" marL="0">
+              <a:spcAft>
+                <a:spcPts val="300"/>
+              </a:spcAft>
+              <a:buNone/>
+            </a:pPr>
+            <a:r>
+              <a:rPr lang="en-US" sz="1400" b="1" dirty="0">
+                <a:solidFill>
+                  <a:schemeClr val="tx2"/>
+                </a:solidFill>
+              </a:rPr>
+              <a:t>Veed Analytics 聊天机器人测试</a:t>
+            </a:r>
+            <a:endParaRPr lang="en-US" sz="1400" dirty="0"/>
+          </a:p>
+          <a:p>
+            <a:pPr indent="0" marL="0">
+              <a:spcAft>
+                <a:spcPts val="300"/>
+              </a:spcAft>
+              <a:buNone/>
+            </a:pPr>
+            <a:r>
+              <a:rPr lang="en-US" sz="1100" dirty="0">
+                <a:solidFill>
+                  <a:schemeClr val="tx1"/>
+                </a:solidFill>
+              </a:rPr>
+              <a:t>美欧多国提问评分；题量、日期、评分标准未公开</a:t>
+            </a:r>
+            <a:endParaRPr lang="en-US" sz="1400" dirty="0"/>
+          </a:p>
+        </p:txBody>
+      </p:sp>
+      <p:sp>
+        <p:nvSpPr>
+          <p:cNvPr id="39" name="来源卡10"/>
+          <p:cNvSpPr/>
+          <p:nvPr/>
+        </p:nvSpPr>
+        <p:spPr>
+          <a:xfrm>
+            <a:off x="3360420" y="4398264"/>
+            <a:ext cx="2651760" cy="1371600"/>
+          </a:xfrm>
+          <a:prstGeom prst="roundRect">
+            <a:avLst>
+              <a:gd name="adj" fmla="val 8000"/>
+            </a:avLst>
+          </a:prstGeom>
+          <a:solidFill>
+            <a:schemeClr val="bg2"/>
+          </a:solidFill>
+          <a:ln w="12700">
+            <a:solidFill>
+              <a:schemeClr val="bg2"/>
+            </a:solidFill>
+            <a:prstDash val="solid"/>
+          </a:ln>
+        </p:spPr>
+      </p:sp>
+      <p:sp>
+        <p:nvSpPr>
+          <p:cNvPr id="40" name="状态点10"/>
+          <p:cNvSpPr/>
+          <p:nvPr/>
+        </p:nvSpPr>
+        <p:spPr>
+          <a:xfrm>
+            <a:off x="3543300" y="4581144"/>
+            <a:ext cx="182880" cy="182880"/>
+          </a:xfrm>
+          <a:prstGeom prst="ellipse">
+            <a:avLst/>
+          </a:prstGeom>
+          <a:solidFill>
+            <a:schemeClr val="accent2"/>
+          </a:solidFill>
+          <a:ln w="12700">
+            <a:solidFill>
+              <a:schemeClr val="accent2"/>
+            </a:solidFill>
+            <a:prstDash val="solid"/>
+          </a:ln>
+        </p:spPr>
+      </p:sp>
+      <p:sp>
+        <p:nvSpPr>
+          <p:cNvPr id="41" name="来源类型10"/>
+          <p:cNvSpPr txBox="1"/>
+          <p:nvPr/>
+        </p:nvSpPr>
+        <p:spPr>
+          <a:xfrm>
+            <a:off x="3817620" y="4507992"/>
+            <a:ext cx="2103120" cy="320040"/>
+          </a:xfrm>
+          <a:prstGeom prst="rect">
+            <a:avLst/>
+          </a:prstGeom>
+          <a:noFill/>
+          <a:ln/>
+        </p:spPr>
+        <p:txBody>
+          <a:bodyPr wrap="square" lIns="0" tIns="0" rIns="0" bIns="0" rtlCol="0" anchor="ctr"/>
+          <a:lstStyle/>
+          <a:p>
+            <a:pPr indent="0" marL="0">
+              <a:buNone/>
+            </a:pPr>
+            <a:r>
+              <a:rPr lang="en-US" sz="1100" dirty="0">
+                <a:solidFill>
+                  <a:schemeClr val="accent5"/>
+                </a:solidFill>
+              </a:rPr>
+              <a:t>论文 ｜ </a:t>
+            </a:r>
+            <a:pPr indent="0" marL="0">
+              <a:buNone/>
+            </a:pPr>
+            <a:r>
+              <a:rPr lang="en-US" sz="1100" b="1" dirty="0">
+                <a:solidFill>
                   <a:schemeClr val="accent2"/>
                 </a:solidFill>
               </a:rPr>
-              <a:t>青色：</a:t>
-            </a:r>
+              <a:t>方法公开</a:t>
+            </a:r>
+            <a:endParaRPr lang="en-US" sz="1100" dirty="0"/>
+          </a:p>
+        </p:txBody>
+      </p:sp>
+      <p:sp>
+        <p:nvSpPr>
+          <p:cNvPr id="42" name="来源说明10"/>
+          <p:cNvSpPr txBox="1"/>
+          <p:nvPr/>
+        </p:nvSpPr>
+        <p:spPr>
+          <a:xfrm>
+            <a:off x="3543300" y="4855464"/>
+            <a:ext cx="2331720" cy="868680"/>
+          </a:xfrm>
+          <a:prstGeom prst="rect">
+            <a:avLst/>
+          </a:prstGeom>
+          <a:noFill/>
+          <a:ln/>
+        </p:spPr>
+        <p:txBody>
+          <a:bodyPr wrap="square" lIns="0" tIns="0" rIns="0" bIns="0" rtlCol="0" anchor="t"/>
+          <a:lstStyle/>
+          <a:p>
             <a:pPr indent="0" marL="0">
+              <a:spcAft>
+                <a:spcPts val="300"/>
+              </a:spcAft>
+              <a:buNone/>
+            </a:pPr>
+            <a:r>
+              <a:rPr lang="en-US" sz="1400" b="1" dirty="0">
+                <a:solidFill>
+                  <a:schemeClr val="tx2"/>
+                </a:solidFill>
+              </a:rPr>
+              <a:t>USC 知识库偏差研究</a:t>
+            </a:r>
+            <a:endParaRPr lang="en-US" sz="1400" dirty="0"/>
+          </a:p>
+          <a:p>
+            <a:pPr indent="0" marL="0">
+              <a:spcAft>
+                <a:spcPts val="300"/>
+              </a:spcAft>
               <a:buNone/>
             </a:pPr>
             <a:r>
               <a:rPr lang="en-US" sz="1100" dirty="0">
                 <a:solidFill>
+                  <a:schemeClr val="tx1"/>
+                </a:solidFill>
+              </a:rPr>
+              <a:t>同行评审论文（EMNLP 2021），两个知识库、自动指标</a:t>
+            </a:r>
+            <a:endParaRPr lang="en-US" sz="1400" dirty="0"/>
+          </a:p>
+        </p:txBody>
+      </p:sp>
+      <p:sp>
+        <p:nvSpPr>
+          <p:cNvPr id="43" name="来源卡11"/>
+          <p:cNvSpPr/>
+          <p:nvPr/>
+        </p:nvSpPr>
+        <p:spPr>
+          <a:xfrm>
+            <a:off x="6172200" y="4398264"/>
+            <a:ext cx="2651760" cy="1371600"/>
+          </a:xfrm>
+          <a:prstGeom prst="roundRect">
+            <a:avLst>
+              <a:gd name="adj" fmla="val 8000"/>
+            </a:avLst>
+          </a:prstGeom>
+          <a:solidFill>
+            <a:schemeClr val="bg2"/>
+          </a:solidFill>
+          <a:ln w="12700">
+            <a:solidFill>
+              <a:schemeClr val="bg2"/>
+            </a:solidFill>
+            <a:prstDash val="solid"/>
+          </a:ln>
+        </p:spPr>
+      </p:sp>
+      <p:sp>
+        <p:nvSpPr>
+          <p:cNvPr id="44" name="状态点11"/>
+          <p:cNvSpPr/>
+          <p:nvPr/>
+        </p:nvSpPr>
+        <p:spPr>
+          <a:xfrm>
+            <a:off x="6355080" y="4581144"/>
+            <a:ext cx="182880" cy="182880"/>
+          </a:xfrm>
+          <a:prstGeom prst="ellipse">
+            <a:avLst/>
+          </a:prstGeom>
+          <a:solidFill>
+            <a:schemeClr val="accent3"/>
+          </a:solidFill>
+          <a:ln w="12700">
+            <a:solidFill>
+              <a:schemeClr val="accent3"/>
+            </a:solidFill>
+            <a:prstDash val="solid"/>
+          </a:ln>
+        </p:spPr>
+      </p:sp>
+      <p:sp>
+        <p:nvSpPr>
+          <p:cNvPr id="45" name="来源类型11"/>
+          <p:cNvSpPr txBox="1"/>
+          <p:nvPr/>
+        </p:nvSpPr>
+        <p:spPr>
+          <a:xfrm>
+            <a:off x="6629400" y="4507992"/>
+            <a:ext cx="2103120" cy="320040"/>
+          </a:xfrm>
+          <a:prstGeom prst="rect">
+            <a:avLst/>
+          </a:prstGeom>
+          <a:noFill/>
+          <a:ln/>
+        </p:spPr>
+        <p:txBody>
+          <a:bodyPr wrap="square" lIns="0" tIns="0" rIns="0" bIns="0" rtlCol="0" anchor="ctr"/>
+          <a:lstStyle/>
+          <a:p>
+            <a:pPr indent="0" marL="0">
+              <a:buNone/>
+            </a:pPr>
+            <a:r>
+              <a:rPr lang="en-US" sz="1100" dirty="0">
+                <a:solidFill>
                   <a:schemeClr val="accent5"/>
                 </a:solidFill>
               </a:rPr>
-              <a:t>2025 流媒体消费者调查（6 国）。两份调查的对象和时间都不同。</a:t>
+              <a:t>行业 ｜ </a:t>
+            </a:r>
+            <a:pPr indent="0" marL="0">
+              <a:buNone/>
+            </a:pPr>
+            <a:r>
+              <a:rPr lang="en-US" sz="1100" b="1" dirty="0">
+                <a:solidFill>
+                  <a:schemeClr val="accent3"/>
+                </a:solidFill>
+              </a:rPr>
+              <a:t>关键信息未公开</a:t>
             </a:r>
             <a:endParaRPr lang="en-US" sz="1100" dirty="0"/>
+          </a:p>
+        </p:txBody>
+      </p:sp>
+      <p:sp>
+        <p:nvSpPr>
+          <p:cNvPr id="46" name="来源说明11"/>
+          <p:cNvSpPr txBox="1"/>
+          <p:nvPr/>
+        </p:nvSpPr>
+        <p:spPr>
+          <a:xfrm>
+            <a:off x="6355080" y="4855464"/>
+            <a:ext cx="2331720" cy="868680"/>
+          </a:xfrm>
+          <a:prstGeom prst="rect">
+            <a:avLst/>
+          </a:prstGeom>
+          <a:noFill/>
+          <a:ln/>
+        </p:spPr>
+        <p:txBody>
+          <a:bodyPr wrap="square" lIns="0" tIns="0" rIns="0" bIns="0" rtlCol="0" anchor="t"/>
+          <a:lstStyle/>
+          <a:p>
+            <a:pPr indent="0" marL="0">
+              <a:spcAft>
+                <a:spcPts val="300"/>
+              </a:spcAft>
+              <a:buNone/>
+            </a:pPr>
+            <a:r>
+              <a:rPr lang="en-US" sz="1400" b="1" dirty="0">
+                <a:solidFill>
+                  <a:schemeClr val="tx2"/>
+                </a:solidFill>
+              </a:rPr>
+              <a:t>Fabric 流失率</a:t>
+            </a:r>
+            <a:endParaRPr lang="en-US" sz="1400" dirty="0"/>
+          </a:p>
+          <a:p>
+            <a:pPr indent="0" marL="0">
+              <a:spcAft>
+                <a:spcPts val="300"/>
+              </a:spcAft>
+              <a:buNone/>
+            </a:pPr>
+            <a:r>
+              <a:rPr lang="en-US" sz="1100" dirty="0">
+                <a:solidFill>
+                  <a:schemeClr val="tx1"/>
+                </a:solidFill>
+              </a:rPr>
+              <a:t>自动抓取 + 人工核验；流失率定义未公开</a:t>
+            </a:r>
+            <a:endParaRPr lang="en-US" sz="1400" dirty="0"/>
+          </a:p>
+        </p:txBody>
+      </p:sp>
+      <p:sp>
+        <p:nvSpPr>
+          <p:cNvPr id="47" name="来源小结卡"/>
+          <p:cNvSpPr/>
+          <p:nvPr/>
+        </p:nvSpPr>
+        <p:spPr>
+          <a:xfrm>
+            <a:off x="8983980" y="4398264"/>
+            <a:ext cx="2651760" cy="1371600"/>
+          </a:xfrm>
+          <a:prstGeom prst="roundRect">
+            <a:avLst>
+              <a:gd name="adj" fmla="val 8000"/>
+            </a:avLst>
+          </a:prstGeom>
+          <a:solidFill>
+            <a:schemeClr val="tx2"/>
+          </a:solidFill>
+          <a:ln w="12700">
+            <a:solidFill>
+              <a:schemeClr val="tx2"/>
+            </a:solidFill>
+            <a:prstDash val="solid"/>
+          </a:ln>
+        </p:spPr>
+      </p:sp>
+      <p:sp>
+        <p:nvSpPr>
+          <p:cNvPr id="48" name="来源小结"/>
+          <p:cNvSpPr txBox="1"/>
+          <p:nvPr/>
+        </p:nvSpPr>
+        <p:spPr>
+          <a:xfrm>
+            <a:off x="9166860" y="4398264"/>
+            <a:ext cx="2286000" cy="1371600"/>
+          </a:xfrm>
+          <a:prstGeom prst="rect">
+            <a:avLst/>
+          </a:prstGeom>
+          <a:noFill/>
+          <a:ln/>
+        </p:spPr>
+        <p:txBody>
+          <a:bodyPr wrap="square" lIns="0" tIns="0" rIns="0" bIns="0" rtlCol="0" anchor="ctr"/>
+          <a:lstStyle/>
+          <a:p>
+            <a:pPr indent="0" marL="0">
+              <a:buNone/>
+            </a:pPr>
+            <a:r>
+              <a:rPr lang="en-US" sz="1400" b="1" dirty="0">
+                <a:solidFill>
+                  <a:schemeClr val="bg1"/>
+                </a:solidFill>
+              </a:rPr>
+              <a:t>Gracenote 自己的两份问卷，恰恰是方法最不透明的两项</a:t>
+            </a:r>
+            <a:endParaRPr lang="en-US" sz="1400" dirty="0"/>
+          </a:p>
+        </p:txBody>
+      </p:sp>
+      <p:sp>
+        <p:nvSpPr>
+          <p:cNvPr id="49" name="来源说明"/>
+          <p:cNvSpPr txBox="1"/>
+          <p:nvPr/>
+        </p:nvSpPr>
+        <p:spPr>
+          <a:xfrm>
+            <a:off x="548640" y="5989320"/>
+            <a:ext cx="11064240" cy="292608"/>
+          </a:xfrm>
+          <a:prstGeom prst="rect">
+            <a:avLst/>
+          </a:prstGeom>
+          <a:noFill/>
+          <a:ln/>
+        </p:spPr>
+        <p:txBody>
+          <a:bodyPr wrap="square" lIns="0" tIns="0" rIns="0" bIns="0" rtlCol="0" anchor="ctr"/>
+          <a:lstStyle/>
+          <a:p>
+            <a:pPr indent="0" marL="0">
+              <a:buNone/>
+            </a:pPr>
+            <a:r>
+              <a:rPr lang="en-US" sz="1000" dirty="0">
+                <a:solidFill>
+                  <a:schemeClr val="accent5"/>
+                </a:solidFill>
+              </a:rPr>
+              <a:t>核查依据：报告第 23 页；Gracenote 2025《State of Play》第 20 页；各机构方法说明与新闻稿（详见仓库中的核查文档）。</a:t>
+            </a:r>
+            <a:endParaRPr lang="en-US" sz="1000" dirty="0"/>
           </a:p>
         </p:txBody>
       </p:sp>
@@ -12383,38 +15375,22 @@
                   <a:schemeClr val="tx2"/>
                 </a:solidFill>
               </a:rPr>
-              <a:t>年龄越小，每天用 AI 的比例越高</a:t>
+              <a:t>报告的主要结论</a:t>
             </a:r>
             <a:endParaRPr lang="en-US" sz="3000" dirty="0"/>
           </a:p>
         </p:txBody>
       </p:sp>
-      <p:graphicFrame>
-        <p:nvGraphicFramePr>
-          <p:cNvPr id="3" name="每日使用图" descr=""/>
-          <p:cNvGraphicFramePr/>
-          <p:nvPr/>
-        </p:nvGraphicFramePr>
-        <p:xfrm>
-          <a:off x="548640" y="1371600"/>
-          <a:ext cx="6949440" cy="4434840"/>
-        </p:xfrm>
-        <a:graphic xmlns:a="http://schemas.openxmlformats.org/drawingml/2006/main">
-          <a:graphicData uri="http://schemas.openxmlformats.org/drawingml/2006/chart">
-            <c:chart xmlns:c="http://schemas.openxmlformats.org/drawingml/2006/chart" r:id="rId1"/>
-          </a:graphicData>
-        </a:graphic>
-      </p:graphicFrame>
-      <p:sp>
-        <p:nvSpPr>
-          <p:cNvPr id="4" name="说明卡1"/>
+      <p:sp>
+        <p:nvSpPr>
+          <p:cNvPr id="3" name="结论卡1"/>
           <p:cNvSpPr/>
           <p:nvPr/>
         </p:nvSpPr>
         <p:spPr>
           <a:xfrm>
-            <a:off x="7863840" y="1371600"/>
-            <a:ext cx="3749040" cy="1965960"/>
+            <a:off x="548640" y="1417320"/>
+            <a:ext cx="3474720" cy="1965960"/>
           </a:xfrm>
           <a:prstGeom prst="roundRect">
             <a:avLst>
@@ -12434,14 +15410,14 @@
       </p:sp>
       <p:sp>
         <p:nvSpPr>
-          <p:cNvPr id="5" name="说明1"/>
+          <p:cNvPr id="4" name="结论数字1"/>
           <p:cNvSpPr txBox="1"/>
           <p:nvPr/>
         </p:nvSpPr>
         <p:spPr>
           <a:xfrm>
-            <a:off x="8138160" y="1508760"/>
-            <a:ext cx="3246120" cy="1737360"/>
+            <a:off x="822960" y="1600200"/>
+            <a:ext cx="3017520" cy="822960"/>
           </a:xfrm>
           <a:prstGeom prst="rect">
             <a:avLst/>
@@ -12457,18 +15433,40 @@
               <a:buNone/>
             </a:pPr>
             <a:r>
-              <a:rPr lang="en-US" sz="3600" b="1" dirty="0">
-                <a:solidFill>
-                  <a:schemeClr val="accent2"/>
+              <a:rPr lang="en-US" sz="4000" b="1" dirty="0">
+                <a:solidFill>
+                  <a:schemeClr val="accent1"/>
                 </a:solidFill>
                 <a:latin typeface="Arial" pitchFamily="34" charset="0"/>
                 <a:ea typeface="Arial" pitchFamily="34" charset="-122"/>
                 <a:cs typeface="Arial" pitchFamily="34" charset="-120"/>
               </a:rPr>
-              <a:t>76%</a:t>
-            </a:r>
-            <a:endParaRPr lang="en-US" sz="3600" dirty="0"/>
-          </a:p>
+              <a:t>54%</a:t>
+            </a:r>
+            <a:endParaRPr lang="en-US" sz="4000" dirty="0"/>
+          </a:p>
+        </p:txBody>
+      </p:sp>
+      <p:sp>
+        <p:nvSpPr>
+          <p:cNvPr id="5" name="结论说明1"/>
+          <p:cNvSpPr txBox="1"/>
+          <p:nvPr/>
+        </p:nvSpPr>
+        <p:spPr>
+          <a:xfrm>
+            <a:off x="822960" y="2423160"/>
+            <a:ext cx="3017520" cy="822960"/>
+          </a:xfrm>
+          <a:prstGeom prst="rect">
+            <a:avLst/>
+          </a:prstGeom>
+          <a:noFill/>
+          <a:ln/>
+        </p:spPr>
+        <p:txBody>
+          <a:bodyPr wrap="square" lIns="0" tIns="0" rIns="0" bIns="0" rtlCol="0" anchor="t"/>
+          <a:lstStyle/>
           <a:p>
             <a:pPr indent="0" marL="0">
               <a:buNone/>
@@ -12479,26 +15477,26 @@
                   <a:schemeClr val="tx1"/>
                 </a:solidFill>
               </a:rPr>
-              <a:t>全体平均：每天 38% + 每周多次 38%，即报告说的“75% 每周多次使用”</a:t>
-            </a:r>
-            <a:endParaRPr lang="en-US" sz="3600" dirty="0"/>
-          </a:p>
-        </p:txBody>
-      </p:sp>
-      <p:sp>
-        <p:nvSpPr>
-          <p:cNvPr id="6" name="说明卡2"/>
+              <a:t>Alpha 世代（13–14 岁受访者）每天使用 AI 聊天机器人</a:t>
+            </a:r>
+            <a:endParaRPr lang="en-US" sz="1400" dirty="0"/>
+          </a:p>
+        </p:txBody>
+      </p:sp>
+      <p:sp>
+        <p:nvSpPr>
+          <p:cNvPr id="6" name="结论卡2"/>
           <p:cNvSpPr/>
           <p:nvPr/>
         </p:nvSpPr>
         <p:spPr>
           <a:xfrm>
-            <a:off x="7863840" y="3611880"/>
-            <a:ext cx="3749040" cy="2194560"/>
+            <a:off x="4297680" y="1417320"/>
+            <a:ext cx="3474720" cy="1965960"/>
           </a:xfrm>
           <a:prstGeom prst="roundRect">
             <a:avLst>
-              <a:gd name="adj" fmla="val 5000"/>
+              <a:gd name="adj" fmla="val 5581"/>
             </a:avLst>
           </a:prstGeom>
           <a:solidFill>
@@ -12514,14 +15512,14 @@
       </p:sp>
       <p:sp>
         <p:nvSpPr>
-          <p:cNvPr id="7" name="说明2"/>
+          <p:cNvPr id="7" name="结论数字2"/>
           <p:cNvSpPr txBox="1"/>
           <p:nvPr/>
         </p:nvSpPr>
         <p:spPr>
           <a:xfrm>
-            <a:off x="8138160" y="3749040"/>
-            <a:ext cx="3246120" cy="1920240"/>
+            <a:off x="4572000" y="1600200"/>
+            <a:ext cx="3017520" cy="822960"/>
           </a:xfrm>
           <a:prstGeom prst="rect">
             <a:avLst/>
@@ -12534,50 +15532,33 @@
           <a:lstStyle/>
           <a:p>
             <a:pPr indent="0" marL="0">
-              <a:spcAft>
-                <a:spcPts val="600"/>
-              </a:spcAft>
-              <a:buNone/>
-            </a:pPr>
-            <a:r>
-              <a:rPr lang="en-US" sz="1600" b="1" dirty="0">
-                <a:solidFill>
-                  <a:schemeClr val="accent3"/>
-                </a:solidFill>
-              </a:rPr>
-              <a:t>先记住分母</a:t>
-            </a:r>
-            <a:endParaRPr lang="en-US" sz="1600" dirty="0"/>
-          </a:p>
-          <a:p>
-            <a:pPr indent="0" marL="0">
-              <a:spcAft>
-                <a:spcPts val="600"/>
-              </a:spcAft>
-              <a:buNone/>
-            </a:pPr>
-            <a:r>
-              <a:rPr lang="en-US" sz="1400" dirty="0">
-                <a:solidFill>
-                  <a:schemeClr val="tx1"/>
-                </a:solidFill>
-              </a:rPr>
-              <a:t>这些比例都是在“互联网和 AI 聊天机器人用户”中算的，不是全体美国人中有多少人每天用 AI。</a:t>
-            </a:r>
-            <a:endParaRPr lang="en-US" sz="1600" dirty="0"/>
-          </a:p>
-        </p:txBody>
-      </p:sp>
-      <p:sp>
-        <p:nvSpPr>
-          <p:cNvPr id="8" name="来源说明"/>
+              <a:buNone/>
+            </a:pPr>
+            <a:r>
+              <a:rPr lang="en-US" sz="4000" b="1" dirty="0">
+                <a:solidFill>
+                  <a:schemeClr val="accent1"/>
+                </a:solidFill>
+                <a:latin typeface="Arial" pitchFamily="34" charset="0"/>
+                <a:ea typeface="Arial" pitchFamily="34" charset="-122"/>
+                <a:cs typeface="Arial" pitchFamily="34" charset="-120"/>
+              </a:rPr>
+              <a:t>80%</a:t>
+            </a:r>
+            <a:endParaRPr lang="en-US" sz="4000" dirty="0"/>
+          </a:p>
+        </p:txBody>
+      </p:sp>
+      <p:sp>
+        <p:nvSpPr>
+          <p:cNvPr id="8" name="结论说明2"/>
           <p:cNvSpPr txBox="1"/>
           <p:nvPr/>
         </p:nvSpPr>
         <p:spPr>
           <a:xfrm>
-            <a:off x="548640" y="5943600"/>
-            <a:ext cx="11064240" cy="292608"/>
+            <a:off x="4572000" y="2423160"/>
+            <a:ext cx="3017520" cy="822960"/>
           </a:xfrm>
           <a:prstGeom prst="rect">
             <a:avLst/>
@@ -12586,6 +15567,69 @@
           <a:ln/>
         </p:spPr>
         <p:txBody>
+          <a:bodyPr wrap="square" lIns="0" tIns="0" rIns="0" bIns="0" rtlCol="0" anchor="t"/>
+          <a:lstStyle/>
+          <a:p>
+            <a:pPr indent="0" marL="0">
+              <a:buNone/>
+            </a:pPr>
+            <a:r>
+              <a:rPr lang="en-US" sz="1400" dirty="0">
+                <a:solidFill>
+                  <a:schemeClr val="tx1"/>
+                </a:solidFill>
+              </a:rPr>
+              <a:t>Alpha 世代称过去 12–18 个月用得更多了</a:t>
+            </a:r>
+            <a:endParaRPr lang="en-US" sz="1400" dirty="0"/>
+          </a:p>
+        </p:txBody>
+      </p:sp>
+      <p:sp>
+        <p:nvSpPr>
+          <p:cNvPr id="9" name="结论卡3"/>
+          <p:cNvSpPr/>
+          <p:nvPr/>
+        </p:nvSpPr>
+        <p:spPr>
+          <a:xfrm>
+            <a:off x="8046720" y="1417320"/>
+            <a:ext cx="3474720" cy="1965960"/>
+          </a:xfrm>
+          <a:prstGeom prst="roundRect">
+            <a:avLst>
+              <a:gd name="adj" fmla="val 5581"/>
+            </a:avLst>
+          </a:prstGeom>
+          <a:solidFill>
+            <a:schemeClr val="bg2"/>
+          </a:solidFill>
+          <a:ln w="12700">
+            <a:solidFill>
+              <a:schemeClr val="bg2"/>
+            </a:solidFill>
+            <a:prstDash val="solid"/>
+          </a:ln>
+        </p:spPr>
+      </p:sp>
+      <p:sp>
+        <p:nvSpPr>
+          <p:cNvPr id="10" name="结论数字3"/>
+          <p:cNvSpPr txBox="1"/>
+          <p:nvPr/>
+        </p:nvSpPr>
+        <p:spPr>
+          <a:xfrm>
+            <a:off x="8321040" y="1600200"/>
+            <a:ext cx="3017520" cy="822960"/>
+          </a:xfrm>
+          <a:prstGeom prst="rect">
+            <a:avLst/>
+          </a:prstGeom>
+          <a:noFill/>
+          <a:ln/>
+        </p:spPr>
+        <p:txBody>
           <a:bodyPr wrap="square" lIns="0" tIns="0" rIns="0" bIns="0" rtlCol="0" anchor="ctr"/>
           <a:lstStyle/>
           <a:p>
@@ -12593,14 +15637,428 @@
               <a:buNone/>
             </a:pPr>
             <a:r>
-              <a:rPr lang="en-US" sz="1000" dirty="0">
+              <a:rPr lang="en-US" sz="4000" b="1" dirty="0">
+                <a:solidFill>
+                  <a:schemeClr val="accent1"/>
+                </a:solidFill>
+                <a:latin typeface="Arial" pitchFamily="34" charset="0"/>
+                <a:ea typeface="Arial" pitchFamily="34" charset="-122"/>
+                <a:cs typeface="Arial" pitchFamily="34" charset="-120"/>
+              </a:rPr>
+              <a:t>75%</a:t>
+            </a:r>
+            <a:endParaRPr lang="en-US" sz="4000" dirty="0"/>
+          </a:p>
+        </p:txBody>
+      </p:sp>
+      <p:sp>
+        <p:nvSpPr>
+          <p:cNvPr id="11" name="结论说明3"/>
+          <p:cNvSpPr txBox="1"/>
+          <p:nvPr/>
+        </p:nvSpPr>
+        <p:spPr>
+          <a:xfrm>
+            <a:off x="8321040" y="2423160"/>
+            <a:ext cx="3017520" cy="822960"/>
+          </a:xfrm>
+          <a:prstGeom prst="rect">
+            <a:avLst/>
+          </a:prstGeom>
+          <a:noFill/>
+          <a:ln/>
+        </p:spPr>
+        <p:txBody>
+          <a:bodyPr wrap="square" lIns="0" tIns="0" rIns="0" bIns="0" rtlCol="0" anchor="t"/>
+          <a:lstStyle/>
+          <a:p>
+            <a:pPr indent="0" marL="0">
+              <a:buNone/>
+            </a:pPr>
+            <a:r>
+              <a:rPr lang="en-US" sz="1400" dirty="0">
+                <a:solidFill>
+                  <a:schemeClr val="tx1"/>
+                </a:solidFill>
+              </a:rPr>
+              <a:t>受访者会核查聊天机器人给出的答案</a:t>
+            </a:r>
+            <a:endParaRPr lang="en-US" sz="1400" dirty="0"/>
+          </a:p>
+        </p:txBody>
+      </p:sp>
+      <p:sp>
+        <p:nvSpPr>
+          <p:cNvPr id="12" name="结论卡4"/>
+          <p:cNvSpPr/>
+          <p:nvPr/>
+        </p:nvSpPr>
+        <p:spPr>
+          <a:xfrm>
+            <a:off x="548640" y="3657600"/>
+            <a:ext cx="3474720" cy="1965960"/>
+          </a:xfrm>
+          <a:prstGeom prst="roundRect">
+            <a:avLst>
+              <a:gd name="adj" fmla="val 5581"/>
+            </a:avLst>
+          </a:prstGeom>
+          <a:solidFill>
+            <a:schemeClr val="bg2"/>
+          </a:solidFill>
+          <a:ln w="12700">
+            <a:solidFill>
+              <a:schemeClr val="bg2"/>
+            </a:solidFill>
+            <a:prstDash val="solid"/>
+          </a:ln>
+        </p:spPr>
+      </p:sp>
+      <p:sp>
+        <p:nvSpPr>
+          <p:cNvPr id="13" name="结论数字4"/>
+          <p:cNvSpPr txBox="1"/>
+          <p:nvPr/>
+        </p:nvSpPr>
+        <p:spPr>
+          <a:xfrm>
+            <a:off x="822960" y="3840480"/>
+            <a:ext cx="3017520" cy="822960"/>
+          </a:xfrm>
+          <a:prstGeom prst="rect">
+            <a:avLst/>
+          </a:prstGeom>
+          <a:noFill/>
+          <a:ln/>
+        </p:spPr>
+        <p:txBody>
+          <a:bodyPr wrap="square" lIns="0" tIns="0" rIns="0" bIns="0" rtlCol="0" anchor="ctr"/>
+          <a:lstStyle/>
+          <a:p>
+            <a:pPr indent="0" marL="0">
+              <a:buNone/>
+            </a:pPr>
+            <a:r>
+              <a:rPr lang="en-US" sz="4000" b="1" dirty="0">
+                <a:solidFill>
+                  <a:schemeClr val="accent2"/>
+                </a:solidFill>
+                <a:latin typeface="Arial" pitchFamily="34" charset="0"/>
+                <a:ea typeface="Arial" pitchFamily="34" charset="-122"/>
+                <a:cs typeface="Arial" pitchFamily="34" charset="-120"/>
+              </a:rPr>
+              <a:t>14 分钟</a:t>
+            </a:r>
+            <a:endParaRPr lang="en-US" sz="4000" dirty="0"/>
+          </a:p>
+        </p:txBody>
+      </p:sp>
+      <p:sp>
+        <p:nvSpPr>
+          <p:cNvPr id="14" name="结论说明4"/>
+          <p:cNvSpPr txBox="1"/>
+          <p:nvPr/>
+        </p:nvSpPr>
+        <p:spPr>
+          <a:xfrm>
+            <a:off x="822960" y="4663440"/>
+            <a:ext cx="3017520" cy="822960"/>
+          </a:xfrm>
+          <a:prstGeom prst="rect">
+            <a:avLst/>
+          </a:prstGeom>
+          <a:noFill/>
+          <a:ln/>
+        </p:spPr>
+        <p:txBody>
+          <a:bodyPr wrap="square" lIns="0" tIns="0" rIns="0" bIns="0" rtlCol="0" anchor="t"/>
+          <a:lstStyle/>
+          <a:p>
+            <a:pPr indent="0" marL="0">
+              <a:buNone/>
+            </a:pPr>
+            <a:r>
+              <a:rPr lang="en-US" sz="1400" dirty="0">
+                <a:solidFill>
+                  <a:schemeClr val="tx1"/>
+                </a:solidFill>
+              </a:rPr>
+              <a:t>六国平均找一个想看的节目所花时间；美国受访者为 12 分钟</a:t>
+            </a:r>
+            <a:endParaRPr lang="en-US" sz="1400" dirty="0"/>
+          </a:p>
+        </p:txBody>
+      </p:sp>
+      <p:sp>
+        <p:nvSpPr>
+          <p:cNvPr id="15" name="结论卡5"/>
+          <p:cNvSpPr/>
+          <p:nvPr/>
+        </p:nvSpPr>
+        <p:spPr>
+          <a:xfrm>
+            <a:off x="4297680" y="3657600"/>
+            <a:ext cx="3474720" cy="1965960"/>
+          </a:xfrm>
+          <a:prstGeom prst="roundRect">
+            <a:avLst>
+              <a:gd name="adj" fmla="val 5581"/>
+            </a:avLst>
+          </a:prstGeom>
+          <a:solidFill>
+            <a:schemeClr val="bg2"/>
+          </a:solidFill>
+          <a:ln w="12700">
+            <a:solidFill>
+              <a:schemeClr val="bg2"/>
+            </a:solidFill>
+            <a:prstDash val="solid"/>
+          </a:ln>
+        </p:spPr>
+      </p:sp>
+      <p:sp>
+        <p:nvSpPr>
+          <p:cNvPr id="16" name="结论数字5"/>
+          <p:cNvSpPr txBox="1"/>
+          <p:nvPr/>
+        </p:nvSpPr>
+        <p:spPr>
+          <a:xfrm>
+            <a:off x="4572000" y="3840480"/>
+            <a:ext cx="3017520" cy="822960"/>
+          </a:xfrm>
+          <a:prstGeom prst="rect">
+            <a:avLst/>
+          </a:prstGeom>
+          <a:noFill/>
+          <a:ln/>
+        </p:spPr>
+        <p:txBody>
+          <a:bodyPr wrap="square" lIns="0" tIns="0" rIns="0" bIns="0" rtlCol="0" anchor="ctr"/>
+          <a:lstStyle/>
+          <a:p>
+            <a:pPr indent="0" marL="0">
+              <a:buNone/>
+            </a:pPr>
+            <a:r>
+              <a:rPr lang="en-US" sz="4000" b="1" dirty="0">
+                <a:solidFill>
+                  <a:schemeClr val="accent2"/>
+                </a:solidFill>
+                <a:latin typeface="Arial" pitchFamily="34" charset="0"/>
+                <a:ea typeface="Arial" pitchFamily="34" charset="-122"/>
+                <a:cs typeface="Arial" pitchFamily="34" charset="-120"/>
+              </a:rPr>
+              <a:t>54%</a:t>
+            </a:r>
+            <a:endParaRPr lang="en-US" sz="4000" dirty="0"/>
+          </a:p>
+        </p:txBody>
+      </p:sp>
+      <p:sp>
+        <p:nvSpPr>
+          <p:cNvPr id="17" name="结论说明5"/>
+          <p:cNvSpPr txBox="1"/>
+          <p:nvPr/>
+        </p:nvSpPr>
+        <p:spPr>
+          <a:xfrm>
+            <a:off x="4572000" y="4663440"/>
+            <a:ext cx="3017520" cy="822960"/>
+          </a:xfrm>
+          <a:prstGeom prst="rect">
+            <a:avLst/>
+          </a:prstGeom>
+          <a:noFill/>
+          <a:ln/>
+        </p:spPr>
+        <p:txBody>
+          <a:bodyPr wrap="square" lIns="0" tIns="0" rIns="0" bIns="0" rtlCol="0" anchor="t"/>
+          <a:lstStyle/>
+          <a:p>
+            <a:pPr indent="0" marL="0">
+              <a:buNone/>
+            </a:pPr>
+            <a:r>
+              <a:rPr lang="en-US" sz="1400" dirty="0">
+                <a:solidFill>
+                  <a:schemeClr val="tx1"/>
+                </a:solidFill>
+              </a:rPr>
+              <a:t>18–34 岁受访者（六国）：找不到想看的，可能会取消订阅</a:t>
+            </a:r>
+            <a:endParaRPr lang="en-US" sz="1400" dirty="0"/>
+          </a:p>
+        </p:txBody>
+      </p:sp>
+      <p:sp>
+        <p:nvSpPr>
+          <p:cNvPr id="18" name="结论卡6"/>
+          <p:cNvSpPr/>
+          <p:nvPr/>
+        </p:nvSpPr>
+        <p:spPr>
+          <a:xfrm>
+            <a:off x="8046720" y="3657600"/>
+            <a:ext cx="3474720" cy="1965960"/>
+          </a:xfrm>
+          <a:prstGeom prst="roundRect">
+            <a:avLst>
+              <a:gd name="adj" fmla="val 5581"/>
+            </a:avLst>
+          </a:prstGeom>
+          <a:solidFill>
+            <a:schemeClr val="bg2"/>
+          </a:solidFill>
+          <a:ln w="12700">
+            <a:solidFill>
+              <a:schemeClr val="bg2"/>
+            </a:solidFill>
+            <a:prstDash val="solid"/>
+          </a:ln>
+        </p:spPr>
+      </p:sp>
+      <p:sp>
+        <p:nvSpPr>
+          <p:cNvPr id="19" name="结论数字6"/>
+          <p:cNvSpPr txBox="1"/>
+          <p:nvPr/>
+        </p:nvSpPr>
+        <p:spPr>
+          <a:xfrm>
+            <a:off x="8321040" y="3840480"/>
+            <a:ext cx="3017520" cy="822960"/>
+          </a:xfrm>
+          <a:prstGeom prst="rect">
+            <a:avLst/>
+          </a:prstGeom>
+          <a:noFill/>
+          <a:ln/>
+        </p:spPr>
+        <p:txBody>
+          <a:bodyPr wrap="square" lIns="0" tIns="0" rIns="0" bIns="0" rtlCol="0" anchor="ctr"/>
+          <a:lstStyle/>
+          <a:p>
+            <a:pPr indent="0" marL="0">
+              <a:buNone/>
+            </a:pPr>
+            <a:r>
+              <a:rPr lang="en-US" sz="4000" b="1" dirty="0">
+                <a:solidFill>
+                  <a:schemeClr val="accent1"/>
+                </a:solidFill>
+                <a:latin typeface="Arial" pitchFamily="34" charset="0"/>
+                <a:ea typeface="Arial" pitchFamily="34" charset="-122"/>
+                <a:cs typeface="Arial" pitchFamily="34" charset="-120"/>
+              </a:rPr>
+              <a:t>52%</a:t>
+            </a:r>
+            <a:endParaRPr lang="en-US" sz="4000" dirty="0"/>
+          </a:p>
+        </p:txBody>
+      </p:sp>
+      <p:sp>
+        <p:nvSpPr>
+          <p:cNvPr id="20" name="结论说明6"/>
+          <p:cNvSpPr txBox="1"/>
+          <p:nvPr/>
+        </p:nvSpPr>
+        <p:spPr>
+          <a:xfrm>
+            <a:off x="8321040" y="4663440"/>
+            <a:ext cx="3017520" cy="822960"/>
+          </a:xfrm>
+          <a:prstGeom prst="rect">
+            <a:avLst/>
+          </a:prstGeom>
+          <a:noFill/>
+          <a:ln/>
+        </p:spPr>
+        <p:txBody>
+          <a:bodyPr wrap="square" lIns="0" tIns="0" rIns="0" bIns="0" rtlCol="0" anchor="t"/>
+          <a:lstStyle/>
+          <a:p>
+            <a:pPr indent="0" marL="0">
+              <a:buNone/>
+            </a:pPr>
+            <a:r>
+              <a:rPr lang="en-US" sz="1400" dirty="0">
+                <a:solidFill>
+                  <a:schemeClr val="tx1"/>
+                </a:solidFill>
+              </a:rPr>
+              <a:t>美国受访者认为 AI 聊天机器人有可能成为最常用的娱乐信息来源</a:t>
+            </a:r>
+            <a:endParaRPr lang="en-US" sz="1400" dirty="0"/>
+          </a:p>
+        </p:txBody>
+      </p:sp>
+      <p:sp>
+        <p:nvSpPr>
+          <p:cNvPr id="21" name="颜色说明"/>
+          <p:cNvSpPr txBox="1"/>
+          <p:nvPr/>
+        </p:nvSpPr>
+        <p:spPr>
+          <a:xfrm>
+            <a:off x="548640" y="5897880"/>
+            <a:ext cx="11064240" cy="320040"/>
+          </a:xfrm>
+          <a:prstGeom prst="rect">
+            <a:avLst/>
+          </a:prstGeom>
+          <a:noFill/>
+          <a:ln/>
+        </p:spPr>
+        <p:txBody>
+          <a:bodyPr wrap="square" lIns="0" tIns="0" rIns="0" bIns="0" rtlCol="0" anchor="ctr"/>
+          <a:lstStyle/>
+          <a:p>
+            <a:pPr indent="0" marL="0">
+              <a:buNone/>
+            </a:pPr>
+            <a:r>
+              <a:rPr lang="en-US" sz="1100" b="1" dirty="0">
+                <a:solidFill>
+                  <a:schemeClr val="accent1"/>
+                </a:solidFill>
+              </a:rPr>
+              <a:t>紫色：</a:t>
+            </a:r>
+            <a:pPr indent="0" marL="0">
+              <a:buNone/>
+            </a:pPr>
+            <a:r>
+              <a:rPr lang="en-US" sz="1100" dirty="0">
                 <a:solidFill>
                   <a:schemeClr val="accent5"/>
                 </a:solidFill>
               </a:rPr>
-              <a:t>来源：报告第 14 页“Daily use of AI chatbots”，Gracenote 2026 生成式 AI 使用调查。</a:t>
-            </a:r>
-            <a:endParaRPr lang="en-US" sz="1000" dirty="0"/>
+              <a:t>2026 生成式 AI 使用调查    </a:t>
+            </a:r>
+            <a:pPr indent="0" marL="0">
+              <a:buNone/>
+            </a:pPr>
+            <a:r>
+              <a:rPr lang="en-US" sz="1100" b="1" dirty="0">
+                <a:solidFill>
+                  <a:schemeClr val="accent2"/>
+                </a:solidFill>
+              </a:rPr>
+              <a:t>青色：</a:t>
+            </a:r>
+            <a:pPr indent="0" marL="0">
+              <a:buNone/>
+            </a:pPr>
+            <a:r>
+              <a:rPr lang="en-US" sz="1100" dirty="0">
+                <a:solidFill>
+                  <a:schemeClr val="accent5"/>
+                </a:solidFill>
+              </a:rPr>
+              <a:t>2025 流媒体消费者调查（六国平均）。两份调查的对象、国家和时间都不同。</a:t>
+            </a:r>
+            <a:endParaRPr lang="en-US" sz="1100" dirty="0"/>
           </a:p>
         </p:txBody>
       </p:sp>
@@ -12706,7 +16164,7 @@
                   <a:schemeClr val="tx2"/>
                 </a:solidFill>
               </a:rPr>
-              <a:t>用得多，不等于信得过</a:t>
+              <a:t>年龄越小，每天用 AI 的比例越高</a:t>
             </a:r>
             <a:endParaRPr lang="en-US" sz="3000" dirty="0"/>
           </a:p>
@@ -12714,7 +16172,7 @@
       </p:sp>
       <p:graphicFrame>
         <p:nvGraphicFramePr>
-          <p:cNvPr id="3" name="准确性图" descr=""/>
+          <p:cNvPr id="3" name="每日使用图" descr=""/>
           <p:cNvGraphicFramePr/>
           <p:nvPr/>
         </p:nvGraphicFramePr>
@@ -12730,18 +16188,18 @@
       </p:graphicFrame>
       <p:sp>
         <p:nvSpPr>
-          <p:cNvPr id="4" name="信任卡1"/>
+          <p:cNvPr id="4" name="说明卡1"/>
           <p:cNvSpPr/>
           <p:nvPr/>
         </p:nvSpPr>
         <p:spPr>
           <a:xfrm>
             <a:off x="7863840" y="1371600"/>
-            <a:ext cx="3749040" cy="2011680"/>
+            <a:ext cx="3749040" cy="1965960"/>
           </a:xfrm>
           <a:prstGeom prst="roundRect">
             <a:avLst>
-              <a:gd name="adj" fmla="val 5455"/>
+              <a:gd name="adj" fmla="val 5581"/>
             </a:avLst>
           </a:prstGeom>
           <a:solidFill>
@@ -12757,14 +16215,14 @@
       </p:sp>
       <p:sp>
         <p:nvSpPr>
-          <p:cNvPr id="5" name="信任说明1"/>
+          <p:cNvPr id="5" name="说明1"/>
           <p:cNvSpPr txBox="1"/>
           <p:nvPr/>
         </p:nvSpPr>
         <p:spPr>
           <a:xfrm>
-            <a:off x="8138160" y="1481328"/>
-            <a:ext cx="3246120" cy="1792224"/>
+            <a:off x="8138160" y="1508760"/>
+            <a:ext cx="3246120" cy="1737360"/>
           </a:xfrm>
           <a:prstGeom prst="rect">
             <a:avLst/>
@@ -12782,13 +16240,13 @@
             <a:r>
               <a:rPr lang="en-US" sz="3600" b="1" dirty="0">
                 <a:solidFill>
-                  <a:schemeClr val="accent1"/>
+                  <a:schemeClr val="accent2"/>
                 </a:solidFill>
                 <a:latin typeface="Arial" pitchFamily="34" charset="0"/>
                 <a:ea typeface="Arial" pitchFamily="34" charset="-122"/>
                 <a:cs typeface="Arial" pitchFamily="34" charset="-120"/>
               </a:rPr>
-              <a:t>75%</a:t>
+              <a:t>76%</a:t>
             </a:r>
             <a:endParaRPr lang="en-US" sz="3600" dirty="0"/>
           </a:p>
@@ -12802,7 +16260,7 @@
                   <a:schemeClr val="tx1"/>
                 </a:solidFill>
               </a:rPr>
-              <a:t>会核查 AI 的答案，最常用的核查办法是再用传统搜索查一遍</a:t>
+              <a:t>全体平均：每天 38% + 每周多次 38%，即报告说的“75% 每周多次使用”</a:t>
             </a:r>
             <a:endParaRPr lang="en-US" sz="3600" dirty="0"/>
           </a:p>
@@ -12810,18 +16268,18 @@
       </p:sp>
       <p:sp>
         <p:nvSpPr>
-          <p:cNvPr id="6" name="信任卡2"/>
+          <p:cNvPr id="6" name="说明卡2"/>
           <p:cNvSpPr/>
           <p:nvPr/>
         </p:nvSpPr>
         <p:spPr>
           <a:xfrm>
-            <a:off x="7863840" y="3657600"/>
-            <a:ext cx="3749040" cy="2011680"/>
+            <a:off x="7863840" y="3611880"/>
+            <a:ext cx="3749040" cy="2194560"/>
           </a:xfrm>
           <a:prstGeom prst="roundRect">
             <a:avLst>
-              <a:gd name="adj" fmla="val 5455"/>
+              <a:gd name="adj" fmla="val 5000"/>
             </a:avLst>
           </a:prstGeom>
           <a:solidFill>
@@ -12837,14 +16295,14 @@
       </p:sp>
       <p:sp>
         <p:nvSpPr>
-          <p:cNvPr id="7" name="信任说明2"/>
+          <p:cNvPr id="7" name="说明2"/>
           <p:cNvSpPr txBox="1"/>
           <p:nvPr/>
         </p:nvSpPr>
         <p:spPr>
           <a:xfrm>
-            <a:off x="8138160" y="3767328"/>
-            <a:ext cx="3246120" cy="1792224"/>
+            <a:off x="8138160" y="3749040"/>
+            <a:ext cx="3246120" cy="1920240"/>
           </a:xfrm>
           <a:prstGeom prst="rect">
             <a:avLst/>
@@ -12857,23 +16315,26 @@
           <a:lstStyle/>
           <a:p>
             <a:pPr indent="0" marL="0">
-              <a:buNone/>
-            </a:pPr>
-            <a:r>
-              <a:rPr lang="en-US" sz="3600" b="1" dirty="0">
-                <a:solidFill>
-                  <a:schemeClr val="accent1"/>
-                </a:solidFill>
-                <a:latin typeface="Arial" pitchFamily="34" charset="0"/>
-                <a:ea typeface="Arial" pitchFamily="34" charset="-122"/>
-                <a:cs typeface="Arial" pitchFamily="34" charset="-120"/>
-              </a:rPr>
-              <a:t>77%</a:t>
-            </a:r>
-            <a:endParaRPr lang="en-US" sz="3600" dirty="0"/>
+              <a:spcAft>
+                <a:spcPts val="600"/>
+              </a:spcAft>
+              <a:buNone/>
+            </a:pPr>
+            <a:r>
+              <a:rPr lang="en-US" sz="1600" b="1" dirty="0">
+                <a:solidFill>
+                  <a:schemeClr val="accent3"/>
+                </a:solidFill>
+              </a:rPr>
+              <a:t>先记住分母</a:t>
+            </a:r>
+            <a:endParaRPr lang="en-US" sz="1600" dirty="0"/>
           </a:p>
           <a:p>
             <a:pPr indent="0" marL="0">
+              <a:spcAft>
+                <a:spcPts val="600"/>
+              </a:spcAft>
               <a:buNone/>
             </a:pPr>
             <a:r>
@@ -12882,9 +16343,9 @@
                   <a:schemeClr val="tx1"/>
                 </a:solidFill>
               </a:rPr>
-              <a:t>对 AI 的结果有顾虑，最常见的是信息不够新、听起来对其实错</a:t>
-            </a:r>
-            <a:endParaRPr lang="en-US" sz="3600" dirty="0"/>
+              <a:t>这些比例都是在“互联网和 AI 聊天机器人用户”中算的，不是全体美国人中有多少人每天用 AI。</a:t>
+            </a:r>
+            <a:endParaRPr lang="en-US" sz="1600" dirty="0"/>
           </a:p>
         </p:txBody>
       </p:sp>
@@ -12918,7 +16379,7 @@
                   <a:schemeClr val="accent5"/>
                 </a:solidFill>
               </a:rPr>
-              <a:t>来源：报告第 15、18、20 页，Gracenote 2026 生成式 AI 使用调查。</a:t>
+              <a:t>来源：报告第 14 页“Daily use of AI chatbots”，Gracenote 2026 生成式 AI 使用调查。</a:t>
             </a:r>
             <a:endParaRPr lang="en-US" sz="1000" dirty="0"/>
           </a:p>
@@ -13004,8 +16465,8 @@
         </p:nvSpPr>
         <p:spPr>
           <a:xfrm>
-            <a:off x="731520" y="502920"/>
-            <a:ext cx="10698480" cy="914400"/>
+            <a:off x="548640" y="365760"/>
+            <a:ext cx="8778240" cy="777240"/>
           </a:xfrm>
           <a:prstGeom prst="rect">
             <a:avLst/>
@@ -13021,75 +16482,55 @@
               <a:buNone/>
             </a:pPr>
             <a:r>
-              <a:rPr lang="en-US" sz="3200" b="1" dirty="0">
-                <a:solidFill>
-                  <a:schemeClr val="bg1"/>
-                </a:solidFill>
-              </a:rPr>
-              <a:t>怎么评价：比起结果，更该看方法和过程</a:t>
-            </a:r>
-            <a:endParaRPr lang="en-US" sz="3200" dirty="0"/>
-          </a:p>
-        </p:txBody>
-      </p:sp>
-      <p:sp>
-        <p:nvSpPr>
-          <p:cNvPr id="3" name="框架引言"/>
-          <p:cNvSpPr txBox="1"/>
-          <p:nvPr/>
-        </p:nvSpPr>
-        <p:spPr>
-          <a:xfrm>
-            <a:off x="731520" y="1508760"/>
-            <a:ext cx="10698480" cy="640080"/>
-          </a:xfrm>
-          <a:prstGeom prst="rect">
-            <a:avLst/>
-          </a:prstGeom>
-          <a:noFill/>
-          <a:ln/>
-        </p:spPr>
-        <p:txBody>
-          <a:bodyPr wrap="square" lIns="0" tIns="0" rIns="0" bIns="0" rtlCol="0" anchor="ctr"/>
-          <a:lstStyle/>
-          <a:p>
-            <a:pPr indent="0" marL="0">
-              <a:buNone/>
-            </a:pPr>
-            <a:r>
-              <a:rPr lang="en-US" sz="1600" dirty="0">
-                <a:solidFill>
-                  <a:schemeClr val="accent6"/>
-                </a:solidFill>
-              </a:rPr>
-              <a:t>课上的春晚满意度案例：央视 81.6% vs 新浪网 11.5%。差异来自四个方面，我用同样的四个角度检查这份报告。</a:t>
-            </a:r>
-            <a:endParaRPr lang="en-US" sz="1600" dirty="0"/>
-          </a:p>
-        </p:txBody>
-      </p:sp>
-      <p:sp>
-        <p:nvSpPr>
-          <p:cNvPr id="4" name="框架卡1"/>
+              <a:rPr lang="en-US" sz="3000" b="1" dirty="0">
+                <a:solidFill>
+                  <a:schemeClr val="tx2"/>
+                </a:solidFill>
+              </a:rPr>
+              <a:t>用得多，不等于信得过</a:t>
+            </a:r>
+            <a:endParaRPr lang="en-US" sz="3000" dirty="0"/>
+          </a:p>
+        </p:txBody>
+      </p:sp>
+      <p:graphicFrame>
+        <p:nvGraphicFramePr>
+          <p:cNvPr id="3" name="准确性图" descr=""/>
+          <p:cNvGraphicFramePr/>
+          <p:nvPr/>
+        </p:nvGraphicFramePr>
+        <p:xfrm>
+          <a:off x="548640" y="1371600"/>
+          <a:ext cx="6949440" cy="4434840"/>
+        </p:xfrm>
+        <a:graphic xmlns:a="http://schemas.openxmlformats.org/drawingml/2006/main">
+          <a:graphicData uri="http://schemas.openxmlformats.org/drawingml/2006/chart">
+            <c:chart xmlns:c="http://schemas.openxmlformats.org/drawingml/2006/chart" r:id="rId1"/>
+          </a:graphicData>
+        </a:graphic>
+      </p:graphicFrame>
+      <p:sp>
+        <p:nvSpPr>
+          <p:cNvPr id="4" name="信任卡1"/>
           <p:cNvSpPr/>
           <p:nvPr/>
         </p:nvSpPr>
         <p:spPr>
           <a:xfrm>
-            <a:off x="731520" y="2377440"/>
-            <a:ext cx="5257800" cy="1554480"/>
+            <a:off x="7863840" y="1371600"/>
+            <a:ext cx="3749040" cy="2011680"/>
           </a:xfrm>
           <a:prstGeom prst="roundRect">
             <a:avLst>
-              <a:gd name="adj" fmla="val 7059"/>
+              <a:gd name="adj" fmla="val 5455"/>
             </a:avLst>
           </a:prstGeom>
           <a:solidFill>
-            <a:schemeClr val="accent1"/>
+            <a:schemeClr val="bg2"/>
           </a:solidFill>
           <a:ln w="12700">
             <a:solidFill>
-              <a:schemeClr val="accent1"/>
+              <a:schemeClr val="bg2"/>
             </a:solidFill>
             <a:prstDash val="solid"/>
           </a:ln>
@@ -13097,63 +16538,94 @@
       </p:sp>
       <p:sp>
         <p:nvSpPr>
-          <p:cNvPr id="5" name="图标底"/>
+          <p:cNvPr id="5" name="信任说明1"/>
+          <p:cNvSpPr txBox="1"/>
+          <p:nvPr/>
+        </p:nvSpPr>
+        <p:spPr>
+          <a:xfrm>
+            <a:off x="8138160" y="1481328"/>
+            <a:ext cx="3246120" cy="1792224"/>
+          </a:xfrm>
+          <a:prstGeom prst="rect">
+            <a:avLst/>
+          </a:prstGeom>
+          <a:noFill/>
+          <a:ln/>
+        </p:spPr>
+        <p:txBody>
+          <a:bodyPr wrap="square" lIns="0" tIns="0" rIns="0" bIns="0" rtlCol="0" anchor="ctr"/>
+          <a:lstStyle/>
+          <a:p>
+            <a:pPr indent="0" marL="0">
+              <a:buNone/>
+            </a:pPr>
+            <a:r>
+              <a:rPr lang="en-US" sz="3600" b="1" dirty="0">
+                <a:solidFill>
+                  <a:schemeClr val="accent1"/>
+                </a:solidFill>
+                <a:latin typeface="Arial" pitchFamily="34" charset="0"/>
+                <a:ea typeface="Arial" pitchFamily="34" charset="-122"/>
+                <a:cs typeface="Arial" pitchFamily="34" charset="-120"/>
+              </a:rPr>
+              <a:t>75%</a:t>
+            </a:r>
+            <a:endParaRPr lang="en-US" sz="3600" dirty="0"/>
+          </a:p>
+          <a:p>
+            <a:pPr indent="0" marL="0">
+              <a:buNone/>
+            </a:pPr>
+            <a:r>
+              <a:rPr lang="en-US" sz="1400" dirty="0">
+                <a:solidFill>
+                  <a:schemeClr val="tx1"/>
+                </a:solidFill>
+              </a:rPr>
+              <a:t>会核查 AI 的答案，最常用的核查办法是再用传统搜索查一遍</a:t>
+            </a:r>
+            <a:endParaRPr lang="en-US" sz="3600" dirty="0"/>
+          </a:p>
+        </p:txBody>
+      </p:sp>
+      <p:sp>
+        <p:nvSpPr>
+          <p:cNvPr id="6" name="信任卡2"/>
           <p:cNvSpPr/>
           <p:nvPr/>
         </p:nvSpPr>
         <p:spPr>
           <a:xfrm>
-            <a:off x="1005840" y="2788920"/>
-            <a:ext cx="731520" cy="731520"/>
-          </a:xfrm>
-          <a:prstGeom prst="ellipse">
-            <a:avLst/>
+            <a:off x="7863840" y="3657600"/>
+            <a:ext cx="3749040" cy="2011680"/>
+          </a:xfrm>
+          <a:prstGeom prst="roundRect">
+            <a:avLst>
+              <a:gd name="adj" fmla="val 5455"/>
+            </a:avLst>
           </a:prstGeom>
           <a:solidFill>
-            <a:schemeClr val="tx2"/>
+            <a:schemeClr val="bg2"/>
           </a:solidFill>
           <a:ln w="12700">
             <a:solidFill>
-              <a:schemeClr val="tx2"/>
+              <a:schemeClr val="bg2"/>
             </a:solidFill>
             <a:prstDash val="solid"/>
           </a:ln>
         </p:spPr>
       </p:sp>
-      <p:pic>
-        <p:nvPicPr>
-          <p:cNvPr id="6" name="图标" descr="preencoded.png">    </p:cNvPr>
-          <p:cNvPicPr>
-            <a:picLocks noChangeAspect="1"/>
-          </p:cNvPicPr>
-          <p:nvPr/>
-        </p:nvPicPr>
-        <p:blipFill>
-          <a:blip r:embed="rId1"/>
-          <a:stretch>
-            <a:fillRect/>
-          </a:stretch>
-        </p:blipFill>
-        <p:spPr>
-          <a:xfrm>
-            <a:off x="1188720" y="2971800"/>
-            <a:ext cx="365760" cy="365760"/>
-          </a:xfrm>
-          <a:prstGeom prst="rect">
-            <a:avLst/>
-          </a:prstGeom>
-        </p:spPr>
-      </p:pic>
-      <p:sp>
-        <p:nvSpPr>
-          <p:cNvPr id="7" name="框架文字1"/>
+      <p:sp>
+        <p:nvSpPr>
+          <p:cNvPr id="7" name="信任说明2"/>
           <p:cNvSpPr txBox="1"/>
           <p:nvPr/>
         </p:nvSpPr>
         <p:spPr>
           <a:xfrm>
-            <a:off x="1965960" y="2487168"/>
-            <a:ext cx="3840480" cy="1335024"/>
+            <a:off x="8138160" y="3767328"/>
+            <a:ext cx="3246120" cy="1792224"/>
           </a:xfrm>
           <a:prstGeom prst="rect">
             <a:avLst/>
@@ -13169,14 +16641,17 @@
               <a:buNone/>
             </a:pPr>
             <a:r>
-              <a:rPr lang="en-US" sz="2000" b="1" dirty="0">
-                <a:solidFill>
-                  <a:schemeClr val="bg1"/>
-                </a:solidFill>
-              </a:rPr>
-              <a:t>调查对象</a:t>
-            </a:r>
-            <a:endParaRPr lang="en-US" sz="2000" dirty="0"/>
+              <a:rPr lang="en-US" sz="3600" b="1" dirty="0">
+                <a:solidFill>
+                  <a:schemeClr val="accent1"/>
+                </a:solidFill>
+                <a:latin typeface="Arial" pitchFamily="34" charset="0"/>
+                <a:ea typeface="Arial" pitchFamily="34" charset="-122"/>
+                <a:cs typeface="Arial" pitchFamily="34" charset="-120"/>
+              </a:rPr>
+              <a:t>77%</a:t>
+            </a:r>
+            <a:endParaRPr lang="en-US" sz="3600" dirty="0"/>
           </a:p>
           <a:p>
             <a:pPr indent="0" marL="0">
@@ -13185,115 +16660,25 @@
             <a:r>
               <a:rPr lang="en-US" sz="1400" dirty="0">
                 <a:solidFill>
-                  <a:schemeClr val="bg1"/>
-                </a:solidFill>
-              </a:rPr>
-              <a:t>问的是谁？AI 用户还是所有人？</a:t>
-            </a:r>
-            <a:endParaRPr lang="en-US" sz="2000" dirty="0"/>
-          </a:p>
-          <a:p>
-            <a:pPr indent="0" marL="0">
-              <a:buNone/>
-            </a:pPr>
-            <a:r>
-              <a:rPr lang="en-US" sz="1200" dirty="0">
-                <a:solidFill>
-                  <a:schemeClr val="accent6"/>
-                </a:solidFill>
-              </a:rPr>
-              <a:t>→ 局限一、二</a:t>
-            </a:r>
-            <a:endParaRPr lang="en-US" sz="2000" dirty="0"/>
-          </a:p>
-        </p:txBody>
-      </p:sp>
-      <p:sp>
-        <p:nvSpPr>
-          <p:cNvPr id="8" name="框架卡2"/>
-          <p:cNvSpPr/>
-          <p:nvPr/>
-        </p:nvSpPr>
-        <p:spPr>
-          <a:xfrm>
-            <a:off x="6172200" y="2377440"/>
-            <a:ext cx="5257800" cy="1554480"/>
-          </a:xfrm>
-          <a:prstGeom prst="roundRect">
-            <a:avLst>
-              <a:gd name="adj" fmla="val 7059"/>
-            </a:avLst>
-          </a:prstGeom>
-          <a:solidFill>
-            <a:schemeClr val="accent1"/>
-          </a:solidFill>
-          <a:ln w="12700">
-            <a:solidFill>
-              <a:schemeClr val="accent1"/>
-            </a:solidFill>
-            <a:prstDash val="solid"/>
-          </a:ln>
-        </p:spPr>
-      </p:sp>
-      <p:sp>
-        <p:nvSpPr>
-          <p:cNvPr id="9" name="图标底"/>
-          <p:cNvSpPr/>
-          <p:nvPr/>
-        </p:nvSpPr>
-        <p:spPr>
-          <a:xfrm>
-            <a:off x="6446520" y="2788920"/>
-            <a:ext cx="731520" cy="731520"/>
-          </a:xfrm>
-          <a:prstGeom prst="ellipse">
-            <a:avLst/>
-          </a:prstGeom>
-          <a:solidFill>
-            <a:schemeClr val="tx2"/>
-          </a:solidFill>
-          <a:ln w="12700">
-            <a:solidFill>
-              <a:schemeClr val="tx2"/>
-            </a:solidFill>
-            <a:prstDash val="solid"/>
-          </a:ln>
-        </p:spPr>
-      </p:sp>
-      <p:pic>
-        <p:nvPicPr>
-          <p:cNvPr id="10" name="图标" descr="preencoded.png">    </p:cNvPr>
-          <p:cNvPicPr>
-            <a:picLocks noChangeAspect="1"/>
-          </p:cNvPicPr>
-          <p:nvPr/>
-        </p:nvPicPr>
-        <p:blipFill>
-          <a:blip r:embed="rId2"/>
-          <a:stretch>
-            <a:fillRect/>
-          </a:stretch>
-        </p:blipFill>
-        <p:spPr>
-          <a:xfrm>
-            <a:off x="6629400" y="2971800"/>
-            <a:ext cx="365760" cy="365760"/>
-          </a:xfrm>
-          <a:prstGeom prst="rect">
-            <a:avLst/>
-          </a:prstGeom>
-        </p:spPr>
-      </p:pic>
-      <p:sp>
-        <p:nvSpPr>
-          <p:cNvPr id="11" name="框架文字2"/>
+                  <a:schemeClr val="tx1"/>
+                </a:solidFill>
+              </a:rPr>
+              <a:t>对 AI 的结果有顾虑，最常见的是信息不够新、听起来对其实错</a:t>
+            </a:r>
+            <a:endParaRPr lang="en-US" sz="3600" dirty="0"/>
+          </a:p>
+        </p:txBody>
+      </p:sp>
+      <p:sp>
+        <p:nvSpPr>
+          <p:cNvPr id="8" name="来源说明"/>
           <p:cNvSpPr txBox="1"/>
           <p:nvPr/>
         </p:nvSpPr>
         <p:spPr>
           <a:xfrm>
-            <a:off x="7406640" y="2487168"/>
-            <a:ext cx="3840480" cy="1335024"/>
+            <a:off x="548640" y="5943600"/>
+            <a:ext cx="11064240" cy="292608"/>
           </a:xfrm>
           <a:prstGeom prst="rect">
             <a:avLst/>
@@ -13309,322 +16694,14 @@
               <a:buNone/>
             </a:pPr>
             <a:r>
-              <a:rPr lang="en-US" sz="2000" b="1" dirty="0">
-                <a:solidFill>
-                  <a:schemeClr val="bg1"/>
-                </a:solidFill>
-              </a:rPr>
-              <a:t>研究总体</a:t>
-            </a:r>
-            <a:endParaRPr lang="en-US" sz="2000" dirty="0"/>
-          </a:p>
-          <a:p>
-            <a:pPr indent="0" marL="0">
-              <a:buNone/>
-            </a:pPr>
-            <a:r>
-              <a:rPr lang="en-US" sz="1400" dirty="0">
-                <a:solidFill>
-                  <a:schemeClr val="bg1"/>
-                </a:solidFill>
-              </a:rPr>
-              <a:t>结论能推广到谁？美国人？年轻人？</a:t>
-            </a:r>
-            <a:endParaRPr lang="en-US" sz="2000" dirty="0"/>
-          </a:p>
-          <a:p>
-            <a:pPr indent="0" marL="0">
-              <a:buNone/>
-            </a:pPr>
-            <a:r>
-              <a:rPr lang="en-US" sz="1200" dirty="0">
-                <a:solidFill>
-                  <a:schemeClr val="accent6"/>
-                </a:solidFill>
-              </a:rPr>
-              <a:t>→ 局限一、三</a:t>
-            </a:r>
-            <a:endParaRPr lang="en-US" sz="2000" dirty="0"/>
-          </a:p>
-        </p:txBody>
-      </p:sp>
-      <p:sp>
-        <p:nvSpPr>
-          <p:cNvPr id="12" name="框架卡3"/>
-          <p:cNvSpPr/>
-          <p:nvPr/>
-        </p:nvSpPr>
-        <p:spPr>
-          <a:xfrm>
-            <a:off x="731520" y="4160520"/>
-            <a:ext cx="5257800" cy="1554480"/>
-          </a:xfrm>
-          <a:prstGeom prst="roundRect">
-            <a:avLst>
-              <a:gd name="adj" fmla="val 7059"/>
-            </a:avLst>
-          </a:prstGeom>
-          <a:solidFill>
-            <a:schemeClr val="accent1"/>
-          </a:solidFill>
-          <a:ln w="12700">
-            <a:solidFill>
-              <a:schemeClr val="accent1"/>
-            </a:solidFill>
-            <a:prstDash val="solid"/>
-          </a:ln>
-        </p:spPr>
-      </p:sp>
-      <p:sp>
-        <p:nvSpPr>
-          <p:cNvPr id="13" name="图标底"/>
-          <p:cNvSpPr/>
-          <p:nvPr/>
-        </p:nvSpPr>
-        <p:spPr>
-          <a:xfrm>
-            <a:off x="1005840" y="4572000"/>
-            <a:ext cx="731520" cy="731520"/>
-          </a:xfrm>
-          <a:prstGeom prst="ellipse">
-            <a:avLst/>
-          </a:prstGeom>
-          <a:solidFill>
-            <a:schemeClr val="tx2"/>
-          </a:solidFill>
-          <a:ln w="12700">
-            <a:solidFill>
-              <a:schemeClr val="tx2"/>
-            </a:solidFill>
-            <a:prstDash val="solid"/>
-          </a:ln>
-        </p:spPr>
-      </p:sp>
-      <p:pic>
-        <p:nvPicPr>
-          <p:cNvPr id="14" name="图标" descr="preencoded.png">    </p:cNvPr>
-          <p:cNvPicPr>
-            <a:picLocks noChangeAspect="1"/>
-          </p:cNvPicPr>
-          <p:nvPr/>
-        </p:nvPicPr>
-        <p:blipFill>
-          <a:blip r:embed="rId3"/>
-          <a:stretch>
-            <a:fillRect/>
-          </a:stretch>
-        </p:blipFill>
-        <p:spPr>
-          <a:xfrm>
-            <a:off x="1188720" y="4754880"/>
-            <a:ext cx="365760" cy="365760"/>
-          </a:xfrm>
-          <a:prstGeom prst="rect">
-            <a:avLst/>
-          </a:prstGeom>
-        </p:spPr>
-      </p:pic>
-      <p:sp>
-        <p:nvSpPr>
-          <p:cNvPr id="15" name="框架文字3"/>
-          <p:cNvSpPr txBox="1"/>
-          <p:nvPr/>
-        </p:nvSpPr>
-        <p:spPr>
-          <a:xfrm>
-            <a:off x="1965960" y="4270248"/>
-            <a:ext cx="3840480" cy="1335024"/>
-          </a:xfrm>
-          <a:prstGeom prst="rect">
-            <a:avLst/>
-          </a:prstGeom>
-          <a:noFill/>
-          <a:ln/>
-        </p:spPr>
-        <p:txBody>
-          <a:bodyPr wrap="square" lIns="0" tIns="0" rIns="0" bIns="0" rtlCol="0" anchor="ctr"/>
-          <a:lstStyle/>
-          <a:p>
-            <a:pPr indent="0" marL="0">
-              <a:buNone/>
-            </a:pPr>
-            <a:r>
-              <a:rPr lang="en-US" sz="2000" b="1" dirty="0">
-                <a:solidFill>
-                  <a:schemeClr val="bg1"/>
-                </a:solidFill>
-              </a:rPr>
-              <a:t>研究方法</a:t>
-            </a:r>
-            <a:endParaRPr lang="en-US" sz="2000" dirty="0"/>
-          </a:p>
-          <a:p>
-            <a:pPr indent="0" marL="0">
-              <a:buNone/>
-            </a:pPr>
-            <a:r>
-              <a:rPr lang="en-US" sz="1400" dirty="0">
-                <a:solidFill>
-                  <a:schemeClr val="bg1"/>
-                </a:solidFill>
-              </a:rPr>
-              <a:t>线上问卷怎么招人、怎么加权？指标是意向还是行为？</a:t>
-            </a:r>
-            <a:endParaRPr lang="en-US" sz="2000" dirty="0"/>
-          </a:p>
-          <a:p>
-            <a:pPr indent="0" marL="0">
-              <a:buNone/>
-            </a:pPr>
-            <a:r>
-              <a:rPr lang="en-US" sz="1200" dirty="0">
-                <a:solidFill>
-                  <a:schemeClr val="accent6"/>
-                </a:solidFill>
-              </a:rPr>
-              <a:t>→ 局限一、四、五</a:t>
-            </a:r>
-            <a:endParaRPr lang="en-US" sz="2000" dirty="0"/>
-          </a:p>
-        </p:txBody>
-      </p:sp>
-      <p:sp>
-        <p:nvSpPr>
-          <p:cNvPr id="16" name="框架卡4"/>
-          <p:cNvSpPr/>
-          <p:nvPr/>
-        </p:nvSpPr>
-        <p:spPr>
-          <a:xfrm>
-            <a:off x="6172200" y="4160520"/>
-            <a:ext cx="5257800" cy="1554480"/>
-          </a:xfrm>
-          <a:prstGeom prst="roundRect">
-            <a:avLst>
-              <a:gd name="adj" fmla="val 7059"/>
-            </a:avLst>
-          </a:prstGeom>
-          <a:solidFill>
-            <a:schemeClr val="accent1"/>
-          </a:solidFill>
-          <a:ln w="12700">
-            <a:solidFill>
-              <a:schemeClr val="accent1"/>
-            </a:solidFill>
-            <a:prstDash val="solid"/>
-          </a:ln>
-        </p:spPr>
-      </p:sp>
-      <p:sp>
-        <p:nvSpPr>
-          <p:cNvPr id="17" name="图标底"/>
-          <p:cNvSpPr/>
-          <p:nvPr/>
-        </p:nvSpPr>
-        <p:spPr>
-          <a:xfrm>
-            <a:off x="6446520" y="4572000"/>
-            <a:ext cx="731520" cy="731520"/>
-          </a:xfrm>
-          <a:prstGeom prst="ellipse">
-            <a:avLst/>
-          </a:prstGeom>
-          <a:solidFill>
-            <a:schemeClr val="tx2"/>
-          </a:solidFill>
-          <a:ln w="12700">
-            <a:solidFill>
-              <a:schemeClr val="tx2"/>
-            </a:solidFill>
-            <a:prstDash val="solid"/>
-          </a:ln>
-        </p:spPr>
-      </p:sp>
-      <p:pic>
-        <p:nvPicPr>
-          <p:cNvPr id="18" name="图标" descr="preencoded.png">    </p:cNvPr>
-          <p:cNvPicPr>
-            <a:picLocks noChangeAspect="1"/>
-          </p:cNvPicPr>
-          <p:nvPr/>
-        </p:nvPicPr>
-        <p:blipFill>
-          <a:blip r:embed="rId4"/>
-          <a:stretch>
-            <a:fillRect/>
-          </a:stretch>
-        </p:blipFill>
-        <p:spPr>
-          <a:xfrm>
-            <a:off x="6629400" y="4754880"/>
-            <a:ext cx="365760" cy="365760"/>
-          </a:xfrm>
-          <a:prstGeom prst="rect">
-            <a:avLst/>
-          </a:prstGeom>
-        </p:spPr>
-      </p:pic>
-      <p:sp>
-        <p:nvSpPr>
-          <p:cNvPr id="19" name="框架文字4"/>
-          <p:cNvSpPr txBox="1"/>
-          <p:nvPr/>
-        </p:nvSpPr>
-        <p:spPr>
-          <a:xfrm>
-            <a:off x="7406640" y="4270248"/>
-            <a:ext cx="3840480" cy="1335024"/>
-          </a:xfrm>
-          <a:prstGeom prst="rect">
-            <a:avLst/>
-          </a:prstGeom>
-          <a:noFill/>
-          <a:ln/>
-        </p:spPr>
-        <p:txBody>
-          <a:bodyPr wrap="square" lIns="0" tIns="0" rIns="0" bIns="0" rtlCol="0" anchor="ctr"/>
-          <a:lstStyle/>
-          <a:p>
-            <a:pPr indent="0" marL="0">
-              <a:buNone/>
-            </a:pPr>
-            <a:r>
-              <a:rPr lang="en-US" sz="2000" b="1" dirty="0">
-                <a:solidFill>
-                  <a:schemeClr val="bg1"/>
-                </a:solidFill>
-              </a:rPr>
-              <a:t>调查时间</a:t>
-            </a:r>
-            <a:endParaRPr lang="en-US" sz="2000" dirty="0"/>
-          </a:p>
-          <a:p>
-            <a:pPr indent="0" marL="0">
-              <a:buNone/>
-            </a:pPr>
-            <a:r>
-              <a:rPr lang="en-US" sz="1400" dirty="0">
-                <a:solidFill>
-                  <a:schemeClr val="bg1"/>
-                </a:solidFill>
-              </a:rPr>
-              <a:t>不同时间、不同调查的数字能不能直接比？</a:t>
-            </a:r>
-            <a:endParaRPr lang="en-US" sz="2000" dirty="0"/>
-          </a:p>
-          <a:p>
-            <a:pPr indent="0" marL="0">
-              <a:buNone/>
-            </a:pPr>
-            <a:r>
-              <a:rPr lang="en-US" sz="1200" dirty="0">
-                <a:solidFill>
-                  <a:schemeClr val="accent6"/>
-                </a:solidFill>
-              </a:rPr>
-              <a:t>→ 局限三</a:t>
-            </a:r>
-            <a:endParaRPr lang="en-US" sz="2000" dirty="0"/>
+              <a:rPr lang="en-US" sz="1000" dirty="0">
+                <a:solidFill>
+                  <a:schemeClr val="accent5"/>
+                </a:solidFill>
+              </a:rPr>
+              <a:t>来源：报告第 15、18、20 页，Gracenote 2026 生成式 AI 使用调查。</a:t>
+            </a:r>
+            <a:endParaRPr lang="en-US" sz="1000" dirty="0"/>
           </a:p>
         </p:txBody>
       </p:sp>
@@ -13640,7 +16717,7 @@
         </p:nvSpPr>
         <p:spPr>
           <a:xfrm>
-            <a:off x="10972800" y="6355080"/>
+            <a:off x="11064240" y="6355080"/>
             <a:ext cx="548640" cy="274320"/>
           </a:xfrm>
           <a:prstGeom prst="rect">
@@ -13658,7 +16735,7 @@
             <a:lvl1pPr>
               <a:defRPr sz="1000">
                 <a:solidFill>
-                  <a:schemeClr val="accent6"/>
+                  <a:schemeClr val="accent5"/>
                 </a:solidFill>
               </a:defRPr>
             </a:lvl1pPr>
@@ -13708,8 +16785,8 @@
         </p:nvSpPr>
         <p:spPr>
           <a:xfrm>
-            <a:off x="548640" y="365760"/>
-            <a:ext cx="8778240" cy="777240"/>
+            <a:off x="731520" y="502920"/>
+            <a:ext cx="10698480" cy="914400"/>
           </a:xfrm>
           <a:prstGeom prst="rect">
             <a:avLst/>
@@ -13725,47 +16802,108 @@
               <a:buNone/>
             </a:pPr>
             <a:r>
-              <a:rPr lang="en-US" sz="3000" b="1" dirty="0">
-                <a:solidFill>
-                  <a:schemeClr val="tx2"/>
-                </a:solidFill>
-              </a:rPr>
-              <a:t>局限一：4,003 人代表的是谁？</a:t>
-            </a:r>
-            <a:endParaRPr lang="en-US" sz="3000" dirty="0"/>
-          </a:p>
-        </p:txBody>
-      </p:sp>
-      <p:sp>
-        <p:nvSpPr>
-          <p:cNvPr id="3" name="角度标签"/>
+              <a:rPr lang="en-US" sz="3200" b="1" dirty="0">
+                <a:solidFill>
+                  <a:schemeClr val="bg1"/>
+                </a:solidFill>
+              </a:rPr>
+              <a:t>怎么评价：比起结果，更该看方法和过程</a:t>
+            </a:r>
+            <a:endParaRPr lang="en-US" sz="3200" dirty="0"/>
+          </a:p>
+        </p:txBody>
+      </p:sp>
+      <p:sp>
+        <p:nvSpPr>
+          <p:cNvPr id="3" name="框架引言"/>
+          <p:cNvSpPr txBox="1"/>
+          <p:nvPr/>
+        </p:nvSpPr>
+        <p:spPr>
+          <a:xfrm>
+            <a:off x="731520" y="1508760"/>
+            <a:ext cx="10698480" cy="640080"/>
+          </a:xfrm>
+          <a:prstGeom prst="rect">
+            <a:avLst/>
+          </a:prstGeom>
+          <a:noFill/>
+          <a:ln/>
+        </p:spPr>
+        <p:txBody>
+          <a:bodyPr wrap="square" lIns="0" tIns="0" rIns="0" bIns="0" rtlCol="0" anchor="ctr"/>
+          <a:lstStyle/>
+          <a:p>
+            <a:pPr indent="0" marL="0">
+              <a:buNone/>
+            </a:pPr>
+            <a:r>
+              <a:rPr lang="en-US" sz="1600" dirty="0">
+                <a:solidFill>
+                  <a:schemeClr val="accent6"/>
+                </a:solidFill>
+              </a:rPr>
+              <a:t>课上的春晚满意度案例：央视 81.6% vs 新浪网 11.5%。差异来自四个方面，我用同样的四个角度检查这份报告。</a:t>
+            </a:r>
+            <a:endParaRPr lang="en-US" sz="1600" dirty="0"/>
+          </a:p>
+        </p:txBody>
+      </p:sp>
+      <p:sp>
+        <p:nvSpPr>
+          <p:cNvPr id="4" name="框架卡1"/>
           <p:cNvSpPr/>
           <p:nvPr/>
         </p:nvSpPr>
         <p:spPr>
           <a:xfrm>
-            <a:off x="9509760" y="566928"/>
-            <a:ext cx="2103120" cy="384048"/>
+            <a:off x="731520" y="2377440"/>
+            <a:ext cx="5257800" cy="1554480"/>
           </a:xfrm>
           <a:prstGeom prst="roundRect">
             <a:avLst>
-              <a:gd name="adj" fmla="val 50000"/>
+              <a:gd name="adj" fmla="val 7059"/>
             </a:avLst>
           </a:prstGeom>
           <a:solidFill>
-            <a:schemeClr val="bg2"/>
+            <a:schemeClr val="accent1"/>
           </a:solidFill>
           <a:ln w="12700">
             <a:solidFill>
-              <a:schemeClr val="accent6"/>
+              <a:schemeClr val="accent1"/>
             </a:solidFill>
             <a:prstDash val="solid"/>
           </a:ln>
         </p:spPr>
       </p:sp>
+      <p:sp>
+        <p:nvSpPr>
+          <p:cNvPr id="5" name="图标底"/>
+          <p:cNvSpPr/>
+          <p:nvPr/>
+        </p:nvSpPr>
+        <p:spPr>
+          <a:xfrm>
+            <a:off x="1005840" y="2788920"/>
+            <a:ext cx="731520" cy="731520"/>
+          </a:xfrm>
+          <a:prstGeom prst="ellipse">
+            <a:avLst/>
+          </a:prstGeom>
+          <a:solidFill>
+            <a:schemeClr val="tx2"/>
+          </a:solidFill>
+          <a:ln w="12700">
+            <a:solidFill>
+              <a:schemeClr val="tx2"/>
+            </a:solidFill>
+            <a:prstDash val="solid"/>
+          </a:ln>
+        </p:spPr>
+      </p:sp>
       <p:pic>
         <p:nvPicPr>
-          <p:cNvPr id="4" name="搜索图标" descr="preencoded.png">    </p:cNvPr>
+          <p:cNvPr id="6" name="图标" descr="preencoded.png">    </p:cNvPr>
           <p:cNvPicPr>
             <a:picLocks noChangeAspect="1"/>
           </p:cNvPicPr>
@@ -13779,8 +16917,8 @@
         </p:blipFill>
         <p:spPr>
           <a:xfrm>
-            <a:off x="9656064" y="667512"/>
-            <a:ext cx="182880" cy="182880"/>
+            <a:off x="1188720" y="2971800"/>
+            <a:ext cx="365760" cy="365760"/>
           </a:xfrm>
           <a:prstGeom prst="rect">
             <a:avLst/>
@@ -13789,14 +16927,14 @@
       </p:pic>
       <p:sp>
         <p:nvSpPr>
-          <p:cNvPr id="5" name="角度标签文字"/>
+          <p:cNvPr id="7" name="框架文字1"/>
           <p:cNvSpPr txBox="1"/>
           <p:nvPr/>
         </p:nvSpPr>
         <p:spPr>
           <a:xfrm>
-            <a:off x="9921240" y="566928"/>
-            <a:ext cx="1600200" cy="384048"/>
+            <a:off x="1965960" y="2487168"/>
+            <a:ext cx="3840480" cy="1335024"/>
           </a:xfrm>
           <a:prstGeom prst="rect">
             <a:avLst/>
@@ -13812,37 +16950,67 @@
               <a:buNone/>
             </a:pPr>
             <a:r>
+              <a:rPr lang="en-US" sz="2000" b="1" dirty="0">
+                <a:solidFill>
+                  <a:schemeClr val="bg1"/>
+                </a:solidFill>
+              </a:rPr>
+              <a:t>调查对象</a:t>
+            </a:r>
+            <a:endParaRPr lang="en-US" sz="2000" dirty="0"/>
+          </a:p>
+          <a:p>
+            <a:pPr indent="0" marL="0">
+              <a:buNone/>
+            </a:pPr>
+            <a:r>
+              <a:rPr lang="en-US" sz="1400" dirty="0">
+                <a:solidFill>
+                  <a:schemeClr val="bg1"/>
+                </a:solidFill>
+              </a:rPr>
+              <a:t>问的是谁？AI 用户还是所有人？</a:t>
+            </a:r>
+            <a:endParaRPr lang="en-US" sz="2000" dirty="0"/>
+          </a:p>
+          <a:p>
+            <a:pPr indent="0" marL="0">
+              <a:buNone/>
+            </a:pPr>
+            <a:r>
               <a:rPr lang="en-US" sz="1200" dirty="0">
                 <a:solidFill>
-                  <a:schemeClr val="tx2"/>
-                </a:solidFill>
-              </a:rPr>
-              <a:t>调查对象 · 研究总体</a:t>
-            </a:r>
-            <a:endParaRPr lang="en-US" sz="1200" dirty="0"/>
-          </a:p>
-        </p:txBody>
-      </p:sp>
-      <p:sp>
-        <p:nvSpPr>
-          <p:cNvPr id="6" name="总体圈1"/>
+                  <a:schemeClr val="accent6"/>
+                </a:solidFill>
+              </a:rPr>
+              <a:t>→ 局限一、二</a:t>
+            </a:r>
+            <a:endParaRPr lang="en-US" sz="2000" dirty="0"/>
+          </a:p>
+        </p:txBody>
+      </p:sp>
+      <p:sp>
+        <p:nvSpPr>
+          <p:cNvPr id="8" name="框架卡2"/>
           <p:cNvSpPr/>
           <p:nvPr/>
         </p:nvSpPr>
         <p:spPr>
           <a:xfrm>
-            <a:off x="548640" y="1417320"/>
-            <a:ext cx="4389120" cy="4389120"/>
-          </a:xfrm>
-          <a:prstGeom prst="ellipse">
-            <a:avLst/>
+            <a:off x="6172200" y="2377440"/>
+            <a:ext cx="5257800" cy="1554480"/>
+          </a:xfrm>
+          <a:prstGeom prst="roundRect">
+            <a:avLst>
+              <a:gd name="adj" fmla="val 7059"/>
+            </a:avLst>
           </a:prstGeom>
           <a:solidFill>
-            <a:schemeClr val="bg2"/>
+            <a:schemeClr val="accent1"/>
           </a:solidFill>
-          <a:ln w="19050">
+          <a:ln w="12700">
             <a:solidFill>
-              <a:schemeClr val="bg1"/>
+              <a:schemeClr val="accent1"/>
             </a:solidFill>
             <a:prstDash val="solid"/>
           </a:ln>
@@ -13850,75 +17018,63 @@
       </p:sp>
       <p:sp>
         <p:nvSpPr>
-          <p:cNvPr id="7" name="总体标签1"/>
-          <p:cNvSpPr txBox="1"/>
-          <p:nvPr/>
-        </p:nvSpPr>
-        <p:spPr>
-          <a:xfrm>
-            <a:off x="548640" y="1527048"/>
-            <a:ext cx="4389120" cy="411480"/>
-          </a:xfrm>
-          <a:prstGeom prst="rect">
-            <a:avLst/>
-          </a:prstGeom>
-          <a:noFill/>
-          <a:ln/>
-        </p:spPr>
-        <p:txBody>
-          <a:bodyPr wrap="square" lIns="0" tIns="0" rIns="0" bIns="0" rtlCol="0" anchor="ctr"/>
-          <a:lstStyle/>
-          <a:p>
-            <a:pPr algn="ctr" indent="0" marL="0">
-              <a:buNone/>
-            </a:pPr>
-            <a:r>
-              <a:rPr lang="en-US" sz="1300" b="1" dirty="0">
-                <a:solidFill>
-                  <a:schemeClr val="tx2"/>
-                </a:solidFill>
-              </a:rPr>
-              <a:t>美国人口</a:t>
-            </a:r>
-            <a:endParaRPr lang="en-US" sz="1300" dirty="0"/>
-          </a:p>
-        </p:txBody>
-      </p:sp>
-      <p:sp>
-        <p:nvSpPr>
-          <p:cNvPr id="8" name="总体圈2"/>
+          <p:cNvPr id="9" name="图标底"/>
           <p:cNvSpPr/>
           <p:nvPr/>
         </p:nvSpPr>
         <p:spPr>
           <a:xfrm>
-            <a:off x="960120" y="2057400"/>
-            <a:ext cx="3566160" cy="3566160"/>
+            <a:off x="6446520" y="2788920"/>
+            <a:ext cx="731520" cy="731520"/>
           </a:xfrm>
           <a:prstGeom prst="ellipse">
             <a:avLst/>
           </a:prstGeom>
           <a:solidFill>
-            <a:schemeClr val="accent6"/>
+            <a:schemeClr val="tx2"/>
           </a:solidFill>
-          <a:ln w="19050">
+          <a:ln w="12700">
             <a:solidFill>
-              <a:schemeClr val="bg1"/>
+              <a:schemeClr val="tx2"/>
             </a:solidFill>
             <a:prstDash val="solid"/>
           </a:ln>
         </p:spPr>
       </p:sp>
-      <p:sp>
-        <p:nvSpPr>
-          <p:cNvPr id="9" name="总体标签2"/>
+      <p:pic>
+        <p:nvPicPr>
+          <p:cNvPr id="10" name="图标" descr="preencoded.png">    </p:cNvPr>
+          <p:cNvPicPr>
+            <a:picLocks noChangeAspect="1"/>
+          </p:cNvPicPr>
+          <p:nvPr/>
+        </p:nvPicPr>
+        <p:blipFill>
+          <a:blip r:embed="rId2"/>
+          <a:stretch>
+            <a:fillRect/>
+          </a:stretch>
+        </p:blipFill>
+        <p:spPr>
+          <a:xfrm>
+            <a:off x="6629400" y="2971800"/>
+            <a:ext cx="365760" cy="365760"/>
+          </a:xfrm>
+          <a:prstGeom prst="rect">
+            <a:avLst/>
+          </a:prstGeom>
+        </p:spPr>
+      </p:pic>
+      <p:sp>
+        <p:nvSpPr>
+          <p:cNvPr id="11" name="框架文字2"/>
           <p:cNvSpPr txBox="1"/>
           <p:nvPr/>
         </p:nvSpPr>
         <p:spPr>
           <a:xfrm>
-            <a:off x="960120" y="2167128"/>
-            <a:ext cx="3566160" cy="411480"/>
+            <a:off x="7406640" y="2487168"/>
+            <a:ext cx="3840480" cy="1335024"/>
           </a:xfrm>
           <a:prstGeom prst="rect">
             <a:avLst/>
@@ -13930,41 +17086,71 @@
           <a:bodyPr wrap="square" lIns="0" tIns="0" rIns="0" bIns="0" rtlCol="0" anchor="ctr"/>
           <a:lstStyle/>
           <a:p>
-            <a:pPr algn="ctr" indent="0" marL="0">
-              <a:buNone/>
-            </a:pPr>
-            <a:r>
-              <a:rPr lang="en-US" sz="1300" b="1" dirty="0">
-                <a:solidFill>
-                  <a:schemeClr val="tx2"/>
-                </a:solidFill>
-              </a:rPr>
-              <a:t>互联网用户</a:t>
-            </a:r>
-            <a:endParaRPr lang="en-US" sz="1300" dirty="0"/>
-          </a:p>
-        </p:txBody>
-      </p:sp>
-      <p:sp>
-        <p:nvSpPr>
-          <p:cNvPr id="10" name="总体圈3"/>
+            <a:pPr indent="0" marL="0">
+              <a:buNone/>
+            </a:pPr>
+            <a:r>
+              <a:rPr lang="en-US" sz="2000" b="1" dirty="0">
+                <a:solidFill>
+                  <a:schemeClr val="bg1"/>
+                </a:solidFill>
+              </a:rPr>
+              <a:t>研究总体</a:t>
+            </a:r>
+            <a:endParaRPr lang="en-US" sz="2000" dirty="0"/>
+          </a:p>
+          <a:p>
+            <a:pPr indent="0" marL="0">
+              <a:buNone/>
+            </a:pPr>
+            <a:r>
+              <a:rPr lang="en-US" sz="1400" dirty="0">
+                <a:solidFill>
+                  <a:schemeClr val="bg1"/>
+                </a:solidFill>
+              </a:rPr>
+              <a:t>结论能推广到谁？美国人？六国？年轻人？</a:t>
+            </a:r>
+            <a:endParaRPr lang="en-US" sz="2000" dirty="0"/>
+          </a:p>
+          <a:p>
+            <a:pPr indent="0" marL="0">
+              <a:buNone/>
+            </a:pPr>
+            <a:r>
+              <a:rPr lang="en-US" sz="1200" dirty="0">
+                <a:solidFill>
+                  <a:schemeClr val="accent6"/>
+                </a:solidFill>
+              </a:rPr>
+              <a:t>→ 局限一、三、四</a:t>
+            </a:r>
+            <a:endParaRPr lang="en-US" sz="2000" dirty="0"/>
+          </a:p>
+        </p:txBody>
+      </p:sp>
+      <p:sp>
+        <p:nvSpPr>
+          <p:cNvPr id="12" name="框架卡3"/>
           <p:cNvSpPr/>
           <p:nvPr/>
         </p:nvSpPr>
         <p:spPr>
           <a:xfrm>
-            <a:off x="1371600" y="2697480"/>
-            <a:ext cx="2743200" cy="2743200"/>
-          </a:xfrm>
-          <a:prstGeom prst="ellipse">
-            <a:avLst/>
+            <a:off x="731520" y="4160520"/>
+            <a:ext cx="5257800" cy="1554480"/>
+          </a:xfrm>
+          <a:prstGeom prst="roundRect">
+            <a:avLst>
+              <a:gd name="adj" fmla="val 7059"/>
+            </a:avLst>
           </a:prstGeom>
           <a:solidFill>
-            <a:srgbClr val="A99BEA"/>
+            <a:schemeClr val="accent1"/>
           </a:solidFill>
-          <a:ln w="19050">
+          <a:ln w="12700">
             <a:solidFill>
-              <a:schemeClr val="bg1"/>
+              <a:schemeClr val="accent1"/>
             </a:solidFill>
             <a:prstDash val="solid"/>
           </a:ln>
@@ -13972,14 +17158,63 @@
       </p:sp>
       <p:sp>
         <p:nvSpPr>
-          <p:cNvPr id="11" name="总体标签3"/>
+          <p:cNvPr id="13" name="图标底"/>
+          <p:cNvSpPr/>
+          <p:nvPr/>
+        </p:nvSpPr>
+        <p:spPr>
+          <a:xfrm>
+            <a:off x="1005840" y="4572000"/>
+            <a:ext cx="731520" cy="731520"/>
+          </a:xfrm>
+          <a:prstGeom prst="ellipse">
+            <a:avLst/>
+          </a:prstGeom>
+          <a:solidFill>
+            <a:schemeClr val="tx2"/>
+          </a:solidFill>
+          <a:ln w="12700">
+            <a:solidFill>
+              <a:schemeClr val="tx2"/>
+            </a:solidFill>
+            <a:prstDash val="solid"/>
+          </a:ln>
+        </p:spPr>
+      </p:sp>
+      <p:pic>
+        <p:nvPicPr>
+          <p:cNvPr id="14" name="图标" descr="preencoded.png">    </p:cNvPr>
+          <p:cNvPicPr>
+            <a:picLocks noChangeAspect="1"/>
+          </p:cNvPicPr>
+          <p:nvPr/>
+        </p:nvPicPr>
+        <p:blipFill>
+          <a:blip r:embed="rId3"/>
+          <a:stretch>
+            <a:fillRect/>
+          </a:stretch>
+        </p:blipFill>
+        <p:spPr>
+          <a:xfrm>
+            <a:off x="1188720" y="4754880"/>
+            <a:ext cx="365760" cy="365760"/>
+          </a:xfrm>
+          <a:prstGeom prst="rect">
+            <a:avLst/>
+          </a:prstGeom>
+        </p:spPr>
+      </p:pic>
+      <p:sp>
+        <p:nvSpPr>
+          <p:cNvPr id="15" name="框架文字3"/>
           <p:cNvSpPr txBox="1"/>
           <p:nvPr/>
         </p:nvSpPr>
         <p:spPr>
           <a:xfrm>
-            <a:off x="1371600" y="2807208"/>
-            <a:ext cx="2743200" cy="411480"/>
+            <a:off x="1965960" y="4270248"/>
+            <a:ext cx="3840480" cy="1335024"/>
           </a:xfrm>
           <a:prstGeom prst="rect">
             <a:avLst/>
@@ -13991,41 +17226,71 @@
           <a:bodyPr wrap="square" lIns="0" tIns="0" rIns="0" bIns="0" rtlCol="0" anchor="ctr"/>
           <a:lstStyle/>
           <a:p>
-            <a:pPr algn="ctr" indent="0" marL="0">
-              <a:buNone/>
-            </a:pPr>
-            <a:r>
-              <a:rPr lang="en-US" sz="1300" b="1" dirty="0">
-                <a:solidFill>
-                  <a:schemeClr val="tx2"/>
-                </a:solidFill>
-              </a:rPr>
-              <a:t>AI 聊天机器人用户</a:t>
-            </a:r>
-            <a:endParaRPr lang="en-US" sz="1300" dirty="0"/>
-          </a:p>
-        </p:txBody>
-      </p:sp>
-      <p:sp>
-        <p:nvSpPr>
-          <p:cNvPr id="12" name="总体圈4"/>
+            <a:pPr indent="0" marL="0">
+              <a:buNone/>
+            </a:pPr>
+            <a:r>
+              <a:rPr lang="en-US" sz="2000" b="1" dirty="0">
+                <a:solidFill>
+                  <a:schemeClr val="bg1"/>
+                </a:solidFill>
+              </a:rPr>
+              <a:t>研究方法</a:t>
+            </a:r>
+            <a:endParaRPr lang="en-US" sz="2000" dirty="0"/>
+          </a:p>
+          <a:p>
+            <a:pPr indent="0" marL="0">
+              <a:buNone/>
+            </a:pPr>
+            <a:r>
+              <a:rPr lang="en-US" sz="1400" dirty="0">
+                <a:solidFill>
+                  <a:schemeClr val="bg1"/>
+                </a:solidFill>
+              </a:rPr>
+              <a:t>线上问卷怎么招人、怎么加权？指标是意向还是行为？</a:t>
+            </a:r>
+            <a:endParaRPr lang="en-US" sz="2000" dirty="0"/>
+          </a:p>
+          <a:p>
+            <a:pPr indent="0" marL="0">
+              <a:buNone/>
+            </a:pPr>
+            <a:r>
+              <a:rPr lang="en-US" sz="1200" dirty="0">
+                <a:solidFill>
+                  <a:schemeClr val="accent6"/>
+                </a:solidFill>
+              </a:rPr>
+              <a:t>→ 局限一、五、六</a:t>
+            </a:r>
+            <a:endParaRPr lang="en-US" sz="2000" dirty="0"/>
+          </a:p>
+        </p:txBody>
+      </p:sp>
+      <p:sp>
+        <p:nvSpPr>
+          <p:cNvPr id="16" name="框架卡4"/>
           <p:cNvSpPr/>
           <p:nvPr/>
         </p:nvSpPr>
         <p:spPr>
           <a:xfrm>
-            <a:off x="1828800" y="3337560"/>
-            <a:ext cx="1828800" cy="1828800"/>
-          </a:xfrm>
-          <a:prstGeom prst="ellipse">
-            <a:avLst/>
+            <a:off x="6172200" y="4160520"/>
+            <a:ext cx="5257800" cy="1554480"/>
+          </a:xfrm>
+          <a:prstGeom prst="roundRect">
+            <a:avLst>
+              <a:gd name="adj" fmla="val 7059"/>
+            </a:avLst>
           </a:prstGeom>
           <a:solidFill>
             <a:schemeClr val="accent1"/>
           </a:solidFill>
-          <a:ln w="19050">
+          <a:ln w="12700">
             <a:solidFill>
-              <a:schemeClr val="bg1"/>
+              <a:schemeClr val="accent1"/>
             </a:solidFill>
             <a:prstDash val="solid"/>
           </a:ln>
@@ -14033,218 +17298,63 @@
       </p:sp>
       <p:sp>
         <p:nvSpPr>
-          <p:cNvPr id="13" name="受访者标签"/>
-          <p:cNvSpPr txBox="1"/>
-          <p:nvPr/>
-        </p:nvSpPr>
-        <p:spPr>
-          <a:xfrm>
-            <a:off x="1828800" y="3611880"/>
-            <a:ext cx="1828800" cy="1097280"/>
-          </a:xfrm>
-          <a:prstGeom prst="rect">
-            <a:avLst/>
-          </a:prstGeom>
-          <a:noFill/>
-          <a:ln/>
-        </p:spPr>
-        <p:txBody>
-          <a:bodyPr wrap="square" lIns="0" tIns="0" rIns="0" bIns="0" rtlCol="0" anchor="ctr"/>
-          <a:lstStyle/>
-          <a:p>
-            <a:pPr algn="ctr" indent="0" marL="0">
-              <a:buNone/>
-            </a:pPr>
-            <a:r>
-              <a:rPr lang="en-US" sz="1300" b="1" dirty="0">
-                <a:solidFill>
-                  <a:schemeClr val="bg1"/>
-                </a:solidFill>
-              </a:rPr>
-              <a:t>本次线上受访者</a:t>
-            </a:r>
-            <a:endParaRPr lang="en-US" sz="1300" dirty="0"/>
-          </a:p>
-          <a:p>
-            <a:pPr algn="ctr" indent="0" marL="0">
-              <a:buNone/>
-            </a:pPr>
-            <a:r>
-              <a:rPr lang="en-US" sz="2000" b="1" dirty="0">
-                <a:solidFill>
-                  <a:schemeClr val="bg1"/>
-                </a:solidFill>
-                <a:latin typeface="Arial" pitchFamily="34" charset="0"/>
-                <a:ea typeface="Arial" pitchFamily="34" charset="-122"/>
-                <a:cs typeface="Arial" pitchFamily="34" charset="-120"/>
-              </a:rPr>
-              <a:t>4,003</a:t>
-            </a:r>
-            <a:endParaRPr lang="en-US" sz="1300" dirty="0"/>
-          </a:p>
-        </p:txBody>
-      </p:sp>
-      <p:sp>
-        <p:nvSpPr>
-          <p:cNvPr id="14" name="局限一说明"/>
-          <p:cNvSpPr txBox="1"/>
-          <p:nvPr/>
-        </p:nvSpPr>
-        <p:spPr>
-          <a:xfrm>
-            <a:off x="5486400" y="1417320"/>
-            <a:ext cx="6126480" cy="3611880"/>
-          </a:xfrm>
-          <a:prstGeom prst="rect">
-            <a:avLst/>
-          </a:prstGeom>
-          <a:noFill/>
-          <a:ln/>
-        </p:spPr>
-        <p:txBody>
-          <a:bodyPr wrap="square" lIns="0" tIns="0" rIns="0" bIns="0" rtlCol="0" anchor="ctr"/>
-          <a:lstStyle/>
-          <a:p>
-            <a:pPr indent="0" marL="0">
-              <a:spcAft>
-                <a:spcPts val="400"/>
-              </a:spcAft>
-              <a:buNone/>
-            </a:pPr>
-            <a:r>
-              <a:rPr lang="en-US" sz="1600" b="1" dirty="0">
-                <a:solidFill>
-                  <a:schemeClr val="accent2"/>
-                </a:solidFill>
-              </a:rPr>
-              <a:t>报告披露了</a:t>
-            </a:r>
-            <a:endParaRPr lang="en-US" sz="1600" dirty="0"/>
-          </a:p>
-          <a:p>
-            <a:pPr indent="0" marL="0">
-              <a:spcAft>
-                <a:spcPts val="1400"/>
-              </a:spcAft>
-              <a:buNone/>
-            </a:pPr>
-            <a:r>
-              <a:rPr lang="en-US" sz="1500" dirty="0">
-                <a:solidFill>
-                  <a:schemeClr val="tx1"/>
-                </a:solidFill>
-              </a:rPr>
-              <a:t>线上调查；13–79 岁；2026.1.23–2.4；“4,000 多名互联网和 AI 聊天机器人用户”。</a:t>
-            </a:r>
-            <a:endParaRPr lang="en-US" sz="1600" dirty="0"/>
-          </a:p>
-          <a:p>
-            <a:pPr indent="0" marL="0">
-              <a:spcAft>
-                <a:spcPts val="400"/>
-              </a:spcAft>
-              <a:buNone/>
-            </a:pPr>
-            <a:r>
-              <a:rPr lang="en-US" sz="1600" b="1" dirty="0">
-                <a:solidFill>
-                  <a:schemeClr val="accent3"/>
-                </a:solidFill>
-              </a:rPr>
-              <a:t>报告没有披露</a:t>
-            </a:r>
-            <a:endParaRPr lang="en-US" sz="1600" dirty="0"/>
-          </a:p>
-          <a:p>
-            <a:pPr indent="0" marL="0">
-              <a:spcAft>
-                <a:spcPts val="1400"/>
-              </a:spcAft>
-              <a:buNone/>
-            </a:pPr>
-            <a:r>
-              <a:rPr lang="en-US" sz="1500" dirty="0">
-                <a:solidFill>
-                  <a:schemeClr val="tx1"/>
-                </a:solidFill>
-              </a:rPr>
-              <a:t>从哪里招募（哪家样本库）、是否概率抽样、配额和加权、回应率、完整问卷。</a:t>
-            </a:r>
-            <a:endParaRPr lang="en-US" sz="1600" dirty="0"/>
-          </a:p>
-          <a:p>
-            <a:pPr indent="0" marL="0">
-              <a:spcAft>
-                <a:spcPts val="400"/>
-              </a:spcAft>
-              <a:buNone/>
-            </a:pPr>
-            <a:r>
-              <a:rPr lang="en-US" sz="1600" b="1" dirty="0">
-                <a:solidFill>
-                  <a:schemeClr val="tx2"/>
-                </a:solidFill>
-              </a:rPr>
-              <a:t>所以</a:t>
-            </a:r>
-            <a:endParaRPr lang="en-US" sz="1600" dirty="0"/>
-          </a:p>
-          <a:p>
-            <a:pPr indent="0" marL="0">
-              <a:spcAft>
-                <a:spcPts val="400"/>
-              </a:spcAft>
-              <a:buNone/>
-            </a:pPr>
-            <a:r>
-              <a:rPr lang="en-US" sz="1500" dirty="0">
-                <a:solidFill>
-                  <a:schemeClr val="tx1"/>
-                </a:solidFill>
-              </a:rPr>
-              <a:t>结论适用于“这次接受调查的 AI 用户”。正文却多处写成 “U.S. consumers”“Americans”。仅凭 N = 4,003，无法判断它能否代表全体美国人。</a:t>
-            </a:r>
-            <a:endParaRPr lang="en-US" sz="1600" dirty="0"/>
-          </a:p>
-        </p:txBody>
-      </p:sp>
-      <p:sp>
-        <p:nvSpPr>
-          <p:cNvPr id="15" name="Durex卡"/>
+          <p:cNvPr id="17" name="图标底"/>
           <p:cNvSpPr/>
           <p:nvPr/>
         </p:nvSpPr>
         <p:spPr>
           <a:xfrm>
-            <a:off x="5486400" y="5257800"/>
-            <a:ext cx="6126480" cy="594360"/>
-          </a:xfrm>
-          <a:prstGeom prst="roundRect">
-            <a:avLst>
-              <a:gd name="adj" fmla="val 18462"/>
-            </a:avLst>
+            <a:off x="6446520" y="4572000"/>
+            <a:ext cx="731520" cy="731520"/>
+          </a:xfrm>
+          <a:prstGeom prst="ellipse">
+            <a:avLst/>
           </a:prstGeom>
           <a:solidFill>
-            <a:schemeClr val="bg2"/>
+            <a:schemeClr val="tx2"/>
           </a:solidFill>
           <a:ln w="12700">
             <a:solidFill>
-              <a:schemeClr val="bg2"/>
+              <a:schemeClr val="tx2"/>
             </a:solidFill>
             <a:prstDash val="solid"/>
           </a:ln>
         </p:spPr>
       </p:sp>
-      <p:sp>
-        <p:nvSpPr>
-          <p:cNvPr id="16" name="Durex联系"/>
+      <p:pic>
+        <p:nvPicPr>
+          <p:cNvPr id="18" name="图标" descr="preencoded.png">    </p:cNvPr>
+          <p:cNvPicPr>
+            <a:picLocks noChangeAspect="1"/>
+          </p:cNvPicPr>
+          <p:nvPr/>
+        </p:nvPicPr>
+        <p:blipFill>
+          <a:blip r:embed="rId4"/>
+          <a:stretch>
+            <a:fillRect/>
+          </a:stretch>
+        </p:blipFill>
+        <p:spPr>
+          <a:xfrm>
+            <a:off x="6629400" y="4754880"/>
+            <a:ext cx="365760" cy="365760"/>
+          </a:xfrm>
+          <a:prstGeom prst="rect">
+            <a:avLst/>
+          </a:prstGeom>
+        </p:spPr>
+      </p:pic>
+      <p:sp>
+        <p:nvSpPr>
+          <p:cNvPr id="19" name="框架文字4"/>
           <p:cNvSpPr txBox="1"/>
           <p:nvPr/>
         </p:nvSpPr>
         <p:spPr>
           <a:xfrm>
-            <a:off x="5669280" y="5257800"/>
-            <a:ext cx="5852160" cy="594360"/>
+            <a:off x="7406640" y="4270248"/>
+            <a:ext cx="3840480" cy="1335024"/>
           </a:xfrm>
           <a:prstGeom prst="rect">
             <a:avLst/>
@@ -14260,14 +17370,42 @@
               <a:buNone/>
             </a:pPr>
             <a:r>
-              <a:rPr lang="en-US" sz="1400" b="1" dirty="0">
-                <a:solidFill>
-                  <a:schemeClr val="tx2"/>
-                </a:solidFill>
-              </a:rPr>
-              <a:t>和课上 Durex 网络调查是同一个问题：网络样本能否反映总体结构？</a:t>
-            </a:r>
-            <a:endParaRPr lang="en-US" sz="1400" dirty="0"/>
+              <a:rPr lang="en-US" sz="2000" b="1" dirty="0">
+                <a:solidFill>
+                  <a:schemeClr val="bg1"/>
+                </a:solidFill>
+              </a:rPr>
+              <a:t>调查时间</a:t>
+            </a:r>
+            <a:endParaRPr lang="en-US" sz="2000" dirty="0"/>
+          </a:p>
+          <a:p>
+            <a:pPr indent="0" marL="0">
+              <a:buNone/>
+            </a:pPr>
+            <a:r>
+              <a:rPr lang="en-US" sz="1400" dirty="0">
+                <a:solidFill>
+                  <a:schemeClr val="bg1"/>
+                </a:solidFill>
+              </a:rPr>
+              <a:t>不同时间、不同调查的数字能不能直接比？</a:t>
+            </a:r>
+            <a:endParaRPr lang="en-US" sz="2000" dirty="0"/>
+          </a:p>
+          <a:p>
+            <a:pPr indent="0" marL="0">
+              <a:buNone/>
+            </a:pPr>
+            <a:r>
+              <a:rPr lang="en-US" sz="1200" dirty="0">
+                <a:solidFill>
+                  <a:schemeClr val="accent6"/>
+                </a:solidFill>
+              </a:rPr>
+              <a:t>→ 局限四</a:t>
+            </a:r>
+            <a:endParaRPr lang="en-US" sz="2000" dirty="0"/>
           </a:p>
         </p:txBody>
       </p:sp>
@@ -14283,7 +17421,7 @@
         </p:nvSpPr>
         <p:spPr>
           <a:xfrm>
-            <a:off x="11064240" y="6355080"/>
+            <a:off x="10972800" y="6355080"/>
             <a:ext cx="548640" cy="274320"/>
           </a:xfrm>
           <a:prstGeom prst="rect">
@@ -14301,7 +17439,7 @@
             <a:lvl1pPr>
               <a:defRPr sz="1000">
                 <a:solidFill>
-                  <a:schemeClr val="accent5"/>
+                  <a:schemeClr val="accent6"/>
                 </a:solidFill>
               </a:defRPr>
             </a:lvl1pPr>
@@ -14373,7 +17511,7 @@
                   <a:schemeClr val="tx2"/>
                 </a:solidFill>
               </a:rPr>
-              <a:t>局限二：“Alpha 世代”其实只有 13–14 岁</a:t>
+              <a:t>局限一：4,003 人代表的是谁？</a:t>
             </a:r>
             <a:endParaRPr lang="en-US" sz="3000" dirty="0"/>
           </a:p>
@@ -14387,8 +17525,8 @@
         </p:nvSpPr>
         <p:spPr>
           <a:xfrm>
-            <a:off x="9692640" y="566928"/>
-            <a:ext cx="1920240" cy="384048"/>
+            <a:off x="9509760" y="566928"/>
+            <a:ext cx="2103120" cy="384048"/>
           </a:xfrm>
           <a:prstGeom prst="roundRect">
             <a:avLst>
@@ -14422,7 +17560,7 @@
         </p:blipFill>
         <p:spPr>
           <a:xfrm>
-            <a:off x="9838944" y="667512"/>
+            <a:off x="9656064" y="667512"/>
             <a:ext cx="182880" cy="182880"/>
           </a:xfrm>
           <a:prstGeom prst="rect">
@@ -14438,8 +17576,8 @@
         </p:nvSpPr>
         <p:spPr>
           <a:xfrm>
-            <a:off x="10104120" y="566928"/>
-            <a:ext cx="1417320" cy="384048"/>
+            <a:off x="9921240" y="566928"/>
+            <a:ext cx="1600200" cy="384048"/>
           </a:xfrm>
           <a:prstGeom prst="rect">
             <a:avLst/>
@@ -14460,7 +17598,7 @@
                   <a:schemeClr val="tx2"/>
                 </a:solidFill>
               </a:rPr>
-              <a:t>调查对象 · 样本量</a:t>
+              <a:t>调查对象 · 研究总体</a:t>
             </a:r>
             <a:endParaRPr lang="en-US" sz="1200" dirty="0"/>
           </a:p>
@@ -14468,62 +17606,24 @@
       </p:sp>
       <p:sp>
         <p:nvSpPr>
-          <p:cNvPr id="6" name="时间轴标题"/>
-          <p:cNvSpPr txBox="1"/>
-          <p:nvPr/>
-        </p:nvSpPr>
-        <p:spPr>
-          <a:xfrm>
-            <a:off x="548640" y="1371600"/>
-            <a:ext cx="7315200" cy="365760"/>
-          </a:xfrm>
-          <a:prstGeom prst="rect">
-            <a:avLst/>
-          </a:prstGeom>
-          <a:noFill/>
-          <a:ln/>
-        </p:spPr>
-        <p:txBody>
-          <a:bodyPr wrap="square" lIns="0" tIns="0" rIns="0" bIns="0" rtlCol="0" anchor="ctr"/>
-          <a:lstStyle/>
-          <a:p>
-            <a:pPr indent="0" marL="0">
-              <a:buNone/>
-            </a:pPr>
-            <a:r>
-              <a:rPr lang="en-US" sz="1500" b="1" dirty="0">
-                <a:solidFill>
-                  <a:schemeClr val="tx2"/>
-                </a:solidFill>
-              </a:rPr>
-              <a:t>报告定义：Alpha 世代 = 2010–2024 年出生</a:t>
-            </a:r>
-            <a:endParaRPr lang="en-US" sz="1500" dirty="0"/>
-          </a:p>
-        </p:txBody>
-      </p:sp>
-      <p:sp>
-        <p:nvSpPr>
-          <p:cNvPr id="7" name="时间轴"/>
+          <p:cNvPr id="6" name="总体圈1"/>
           <p:cNvSpPr/>
           <p:nvPr/>
         </p:nvSpPr>
         <p:spPr>
           <a:xfrm>
-            <a:off x="822960" y="2148840"/>
-            <a:ext cx="10515600" cy="384048"/>
-          </a:xfrm>
-          <a:prstGeom prst="roundRect">
-            <a:avLst>
-              <a:gd name="adj" fmla="val 50000"/>
-            </a:avLst>
+            <a:off x="548640" y="1417320"/>
+            <a:ext cx="4389120" cy="4389120"/>
+          </a:xfrm>
+          <a:prstGeom prst="ellipse">
+            <a:avLst/>
           </a:prstGeom>
           <a:solidFill>
             <a:schemeClr val="bg2"/>
           </a:solidFill>
-          <a:ln w="12700">
+          <a:ln w="19050">
             <a:solidFill>
-              <a:schemeClr val="accent6"/>
+              <a:schemeClr val="bg1"/>
             </a:solidFill>
             <a:prstDash val="solid"/>
           </a:ln>
@@ -14531,26 +17631,60 @@
       </p:sp>
       <p:sp>
         <p:nvSpPr>
-          <p:cNvPr id="8" name="样本覆盖段"/>
+          <p:cNvPr id="7" name="总体标签1"/>
+          <p:cNvSpPr txBox="1"/>
+          <p:nvPr/>
+        </p:nvSpPr>
+        <p:spPr>
+          <a:xfrm>
+            <a:off x="548640" y="1527048"/>
+            <a:ext cx="4389120" cy="411480"/>
+          </a:xfrm>
+          <a:prstGeom prst="rect">
+            <a:avLst/>
+          </a:prstGeom>
+          <a:noFill/>
+          <a:ln/>
+        </p:spPr>
+        <p:txBody>
+          <a:bodyPr wrap="square" lIns="0" tIns="0" rIns="0" bIns="0" rtlCol="0" anchor="ctr"/>
+          <a:lstStyle/>
+          <a:p>
+            <a:pPr algn="ctr" indent="0" marL="0">
+              <a:buNone/>
+            </a:pPr>
+            <a:r>
+              <a:rPr lang="en-US" sz="1300" b="1" dirty="0">
+                <a:solidFill>
+                  <a:schemeClr val="tx2"/>
+                </a:solidFill>
+              </a:rPr>
+              <a:t>美国人口</a:t>
+            </a:r>
+            <a:endParaRPr lang="en-US" sz="1300" dirty="0"/>
+          </a:p>
+        </p:txBody>
+      </p:sp>
+      <p:sp>
+        <p:nvSpPr>
+          <p:cNvPr id="8" name="总体圈2"/>
           <p:cNvSpPr/>
           <p:nvPr/>
         </p:nvSpPr>
         <p:spPr>
           <a:xfrm>
-            <a:off x="1524000" y="2148840"/>
-            <a:ext cx="1402080" cy="384048"/>
-          </a:xfrm>
-          <a:prstGeom prst="roundRect">
-            <a:avLst>
-              <a:gd name="adj" fmla="val 50000"/>
-            </a:avLst>
+            <a:off x="960120" y="2057400"/>
+            <a:ext cx="3566160" cy="3566160"/>
+          </a:xfrm>
+          <a:prstGeom prst="ellipse">
+            <a:avLst/>
           </a:prstGeom>
           <a:solidFill>
-            <a:schemeClr val="accent3"/>
+            <a:schemeClr val="accent6"/>
           </a:solidFill>
-          <a:ln w="12700">
+          <a:ln w="19050">
             <a:solidFill>
-              <a:schemeClr val="accent3"/>
+              <a:schemeClr val="bg1"/>
             </a:solidFill>
             <a:prstDash val="solid"/>
           </a:ln>
@@ -14558,14 +17692,14 @@
       </p:sp>
       <p:sp>
         <p:nvSpPr>
-          <p:cNvPr id="9" name="年份2010"/>
+          <p:cNvPr id="9" name="总体标签2"/>
           <p:cNvSpPr txBox="1"/>
           <p:nvPr/>
         </p:nvSpPr>
         <p:spPr>
           <a:xfrm>
-            <a:off x="457200" y="2606040"/>
-            <a:ext cx="731520" cy="274320"/>
+            <a:off x="960120" y="2167128"/>
+            <a:ext cx="3566160" cy="411480"/>
           </a:xfrm>
           <a:prstGeom prst="rect">
             <a:avLst/>
@@ -14581,27 +17715,52 @@
               <a:buNone/>
             </a:pPr>
             <a:r>
-              <a:rPr lang="en-US" sz="1100" dirty="0">
-                <a:solidFill>
-                  <a:schemeClr val="accent5"/>
-                </a:solidFill>
-              </a:rPr>
-              <a:t>2010</a:t>
-            </a:r>
-            <a:endParaRPr lang="en-US" sz="1100" dirty="0"/>
-          </a:p>
-        </p:txBody>
-      </p:sp>
-      <p:sp>
-        <p:nvSpPr>
-          <p:cNvPr id="10" name="年份2014"/>
+              <a:rPr lang="en-US" sz="1300" b="1" dirty="0">
+                <a:solidFill>
+                  <a:schemeClr val="tx2"/>
+                </a:solidFill>
+              </a:rPr>
+              <a:t>互联网用户</a:t>
+            </a:r>
+            <a:endParaRPr lang="en-US" sz="1300" dirty="0"/>
+          </a:p>
+        </p:txBody>
+      </p:sp>
+      <p:sp>
+        <p:nvSpPr>
+          <p:cNvPr id="10" name="总体圈3"/>
+          <p:cNvSpPr/>
+          <p:nvPr/>
+        </p:nvSpPr>
+        <p:spPr>
+          <a:xfrm>
+            <a:off x="1371600" y="2697480"/>
+            <a:ext cx="2743200" cy="2743200"/>
+          </a:xfrm>
+          <a:prstGeom prst="ellipse">
+            <a:avLst/>
+          </a:prstGeom>
+          <a:solidFill>
+            <a:srgbClr val="A99BEA"/>
+          </a:solidFill>
+          <a:ln w="19050">
+            <a:solidFill>
+              <a:schemeClr val="bg1"/>
+            </a:solidFill>
+            <a:prstDash val="solid"/>
+          </a:ln>
+        </p:spPr>
+      </p:sp>
+      <p:sp>
+        <p:nvSpPr>
+          <p:cNvPr id="11" name="总体标签3"/>
           <p:cNvSpPr txBox="1"/>
           <p:nvPr/>
         </p:nvSpPr>
         <p:spPr>
           <a:xfrm>
-            <a:off x="3261360" y="2606040"/>
-            <a:ext cx="731520" cy="274320"/>
+            <a:off x="1371600" y="2807208"/>
+            <a:ext cx="2743200" cy="411480"/>
           </a:xfrm>
           <a:prstGeom prst="rect">
             <a:avLst/>
@@ -14617,27 +17776,52 @@
               <a:buNone/>
             </a:pPr>
             <a:r>
-              <a:rPr lang="en-US" sz="1100" dirty="0">
-                <a:solidFill>
-                  <a:schemeClr val="accent5"/>
-                </a:solidFill>
-              </a:rPr>
-              <a:t>2014</a:t>
-            </a:r>
-            <a:endParaRPr lang="en-US" sz="1100" dirty="0"/>
-          </a:p>
-        </p:txBody>
-      </p:sp>
-      <p:sp>
-        <p:nvSpPr>
-          <p:cNvPr id="11" name="年份2018"/>
+              <a:rPr lang="en-US" sz="1300" b="1" dirty="0">
+                <a:solidFill>
+                  <a:schemeClr val="tx2"/>
+                </a:solidFill>
+              </a:rPr>
+              <a:t>AI 聊天机器人用户</a:t>
+            </a:r>
+            <a:endParaRPr lang="en-US" sz="1300" dirty="0"/>
+          </a:p>
+        </p:txBody>
+      </p:sp>
+      <p:sp>
+        <p:nvSpPr>
+          <p:cNvPr id="12" name="总体圈4"/>
+          <p:cNvSpPr/>
+          <p:nvPr/>
+        </p:nvSpPr>
+        <p:spPr>
+          <a:xfrm>
+            <a:off x="1828800" y="3337560"/>
+            <a:ext cx="1828800" cy="1828800"/>
+          </a:xfrm>
+          <a:prstGeom prst="ellipse">
+            <a:avLst/>
+          </a:prstGeom>
+          <a:solidFill>
+            <a:schemeClr val="accent1"/>
+          </a:solidFill>
+          <a:ln w="19050">
+            <a:solidFill>
+              <a:schemeClr val="bg1"/>
+            </a:solidFill>
+            <a:prstDash val="solid"/>
+          </a:ln>
+        </p:spPr>
+      </p:sp>
+      <p:sp>
+        <p:nvSpPr>
+          <p:cNvPr id="13" name="受访者标签"/>
           <p:cNvSpPr txBox="1"/>
           <p:nvPr/>
         </p:nvSpPr>
         <p:spPr>
           <a:xfrm>
-            <a:off x="6065520" y="2606040"/>
-            <a:ext cx="731520" cy="274320"/>
+            <a:off x="1828800" y="3611880"/>
+            <a:ext cx="1828800" cy="1097280"/>
           </a:xfrm>
           <a:prstGeom prst="rect">
             <a:avLst/>
@@ -14653,27 +17837,44 @@
               <a:buNone/>
             </a:pPr>
             <a:r>
-              <a:rPr lang="en-US" sz="1100" dirty="0">
-                <a:solidFill>
-                  <a:schemeClr val="accent5"/>
-                </a:solidFill>
-              </a:rPr>
-              <a:t>2018</a:t>
-            </a:r>
-            <a:endParaRPr lang="en-US" sz="1100" dirty="0"/>
-          </a:p>
-        </p:txBody>
-      </p:sp>
-      <p:sp>
-        <p:nvSpPr>
-          <p:cNvPr id="12" name="年份2022"/>
+              <a:rPr lang="en-US" sz="1300" b="1" dirty="0">
+                <a:solidFill>
+                  <a:schemeClr val="bg1"/>
+                </a:solidFill>
+              </a:rPr>
+              <a:t>本次线上受访者</a:t>
+            </a:r>
+            <a:endParaRPr lang="en-US" sz="1300" dirty="0"/>
+          </a:p>
+          <a:p>
+            <a:pPr algn="ctr" indent="0" marL="0">
+              <a:buNone/>
+            </a:pPr>
+            <a:r>
+              <a:rPr lang="en-US" sz="2000" b="1" dirty="0">
+                <a:solidFill>
+                  <a:schemeClr val="bg1"/>
+                </a:solidFill>
+                <a:latin typeface="Arial" pitchFamily="34" charset="0"/>
+                <a:ea typeface="Arial" pitchFamily="34" charset="-122"/>
+                <a:cs typeface="Arial" pitchFamily="34" charset="-120"/>
+              </a:rPr>
+              <a:t>4,003</a:t>
+            </a:r>
+            <a:endParaRPr lang="en-US" sz="1300" dirty="0"/>
+          </a:p>
+        </p:txBody>
+      </p:sp>
+      <p:sp>
+        <p:nvSpPr>
+          <p:cNvPr id="14" name="局限一说明"/>
           <p:cNvSpPr txBox="1"/>
           <p:nvPr/>
         </p:nvSpPr>
         <p:spPr>
           <a:xfrm>
-            <a:off x="8869680" y="2606040"/>
-            <a:ext cx="731520" cy="274320"/>
+            <a:off x="5486400" y="1417320"/>
+            <a:ext cx="6126480" cy="3611880"/>
           </a:xfrm>
           <a:prstGeom prst="rect">
             <a:avLst/>
@@ -14685,107 +17886,123 @@
           <a:bodyPr wrap="square" lIns="0" tIns="0" rIns="0" bIns="0" rtlCol="0" anchor="ctr"/>
           <a:lstStyle/>
           <a:p>
-            <a:pPr algn="ctr" indent="0" marL="0">
-              <a:buNone/>
-            </a:pPr>
-            <a:r>
-              <a:rPr lang="en-US" sz="1100" dirty="0">
-                <a:solidFill>
-                  <a:schemeClr val="accent5"/>
-                </a:solidFill>
-              </a:rPr>
-              <a:t>2022</a:t>
-            </a:r>
-            <a:endParaRPr lang="en-US" sz="1100" dirty="0"/>
-          </a:p>
-        </p:txBody>
-      </p:sp>
-      <p:sp>
-        <p:nvSpPr>
-          <p:cNvPr id="13" name="年份2024"/>
-          <p:cNvSpPr txBox="1"/>
-          <p:nvPr/>
-        </p:nvSpPr>
-        <p:spPr>
-          <a:xfrm>
-            <a:off x="10271760" y="2606040"/>
-            <a:ext cx="731520" cy="274320"/>
-          </a:xfrm>
-          <a:prstGeom prst="rect">
-            <a:avLst/>
-          </a:prstGeom>
-          <a:noFill/>
-          <a:ln/>
-        </p:spPr>
-        <p:txBody>
-          <a:bodyPr wrap="square" lIns="0" tIns="0" rIns="0" bIns="0" rtlCol="0" anchor="ctr"/>
-          <a:lstStyle/>
-          <a:p>
-            <a:pPr algn="ctr" indent="0" marL="0">
-              <a:buNone/>
-            </a:pPr>
-            <a:r>
-              <a:rPr lang="en-US" sz="1100" dirty="0">
-                <a:solidFill>
-                  <a:schemeClr val="accent5"/>
-                </a:solidFill>
-              </a:rPr>
-              <a:t>2024</a:t>
-            </a:r>
-            <a:endParaRPr lang="en-US" sz="1100" dirty="0"/>
-          </a:p>
-        </p:txBody>
-      </p:sp>
-      <p:sp>
-        <p:nvSpPr>
-          <p:cNvPr id="14" name="覆盖说明"/>
-          <p:cNvSpPr txBox="1"/>
-          <p:nvPr/>
-        </p:nvSpPr>
-        <p:spPr>
-          <a:xfrm>
-            <a:off x="3063240" y="1737360"/>
-            <a:ext cx="5943600" cy="365760"/>
-          </a:xfrm>
-          <a:prstGeom prst="rect">
-            <a:avLst/>
-          </a:prstGeom>
-          <a:noFill/>
-          <a:ln/>
-        </p:spPr>
-        <p:txBody>
-          <a:bodyPr wrap="square" lIns="0" tIns="0" rIns="0" bIns="0" rtlCol="0" anchor="ctr"/>
-          <a:lstStyle/>
-          <a:p>
             <a:pPr indent="0" marL="0">
-              <a:buNone/>
-            </a:pPr>
-            <a:r>
-              <a:rPr lang="en-US" sz="1300" b="1" dirty="0">
+              <a:spcAft>
+                <a:spcPts val="400"/>
+              </a:spcAft>
+              <a:buNone/>
+            </a:pPr>
+            <a:r>
+              <a:rPr lang="en-US" sz="1600" b="1" dirty="0">
+                <a:solidFill>
+                  <a:schemeClr val="accent2"/>
+                </a:solidFill>
+              </a:rPr>
+              <a:t>报告披露了</a:t>
+            </a:r>
+            <a:endParaRPr lang="en-US" sz="1600" dirty="0"/>
+          </a:p>
+          <a:p>
+            <a:pPr indent="0" marL="0">
+              <a:spcAft>
+                <a:spcPts val="1400"/>
+              </a:spcAft>
+              <a:buNone/>
+            </a:pPr>
+            <a:r>
+              <a:rPr lang="en-US" sz="1500" dirty="0">
+                <a:solidFill>
+                  <a:schemeClr val="tx1"/>
+                </a:solidFill>
+              </a:rPr>
+              <a:t>线上调查；13–79 岁；2026.1.23–2.4；“4,000 多名互联网和 AI 聊天机器人用户”。</a:t>
+            </a:r>
+            <a:endParaRPr lang="en-US" sz="1600" dirty="0"/>
+          </a:p>
+          <a:p>
+            <a:pPr indent="0" marL="0">
+              <a:spcAft>
+                <a:spcPts val="400"/>
+              </a:spcAft>
+              <a:buNone/>
+            </a:pPr>
+            <a:r>
+              <a:rPr lang="en-US" sz="1600" b="1" dirty="0">
                 <a:solidFill>
                   <a:schemeClr val="accent3"/>
                 </a:solidFill>
               </a:rPr>
-              <a:t>样本只覆盖这一段（调查时 13–14 岁，约 2011–2012 年出生）</a:t>
-            </a:r>
-            <a:endParaRPr lang="en-US" sz="1300" dirty="0"/>
-          </a:p>
-        </p:txBody>
-      </p:sp>
-      <p:sp>
-        <p:nvSpPr>
-          <p:cNvPr id="15" name="局限二卡1"/>
+              <a:t>报告没有披露</a:t>
+            </a:r>
+            <a:endParaRPr lang="en-US" sz="1600" dirty="0"/>
+          </a:p>
+          <a:p>
+            <a:pPr indent="0" marL="0">
+              <a:spcAft>
+                <a:spcPts val="1400"/>
+              </a:spcAft>
+              <a:buNone/>
+            </a:pPr>
+            <a:r>
+              <a:rPr lang="en-US" sz="1500" dirty="0">
+                <a:solidFill>
+                  <a:schemeClr val="tx1"/>
+                </a:solidFill>
+              </a:rPr>
+              <a:t>从哪里招募（哪家样本库）、是否概率抽样、配额和加权、回应率、完整问卷。</a:t>
+            </a:r>
+            <a:endParaRPr lang="en-US" sz="1600" dirty="0"/>
+          </a:p>
+          <a:p>
+            <a:pPr indent="0" marL="0">
+              <a:spcAft>
+                <a:spcPts val="400"/>
+              </a:spcAft>
+              <a:buNone/>
+            </a:pPr>
+            <a:r>
+              <a:rPr lang="en-US" sz="1600" b="1" dirty="0">
+                <a:solidFill>
+                  <a:schemeClr val="tx2"/>
+                </a:solidFill>
+              </a:rPr>
+              <a:t>所以</a:t>
+            </a:r>
+            <a:endParaRPr lang="en-US" sz="1600" dirty="0"/>
+          </a:p>
+          <a:p>
+            <a:pPr indent="0" marL="0">
+              <a:spcAft>
+                <a:spcPts val="400"/>
+              </a:spcAft>
+              <a:buNone/>
+            </a:pPr>
+            <a:r>
+              <a:rPr lang="en-US" sz="1500" dirty="0">
+                <a:solidFill>
+                  <a:schemeClr val="tx1"/>
+                </a:solidFill>
+              </a:rPr>
+              <a:t>结论适用于“这次接受调查的 AI 用户”。正文却多处写成 “U.S. consumers”“Americans”。仅凭 N = 4,003，无法判断它能否代表全体美国人。</a:t>
+            </a:r>
+            <a:endParaRPr lang="en-US" sz="1600" dirty="0"/>
+          </a:p>
+        </p:txBody>
+      </p:sp>
+      <p:sp>
+        <p:nvSpPr>
+          <p:cNvPr id="15" name="Durex卡"/>
           <p:cNvSpPr/>
           <p:nvPr/>
         </p:nvSpPr>
         <p:spPr>
           <a:xfrm>
-            <a:off x="548640" y="3154680"/>
-            <a:ext cx="3474720" cy="2377440"/>
+            <a:off x="5486400" y="5257800"/>
+            <a:ext cx="6126480" cy="594360"/>
           </a:xfrm>
           <a:prstGeom prst="roundRect">
             <a:avLst>
-              <a:gd name="adj" fmla="val 4615"/>
+              <a:gd name="adj" fmla="val 18462"/>
             </a:avLst>
           </a:prstGeom>
           <a:solidFill>
@@ -14801,14 +18018,14 @@
       </p:sp>
       <p:sp>
         <p:nvSpPr>
-          <p:cNvPr id="16" name="局限二文字1"/>
+          <p:cNvPr id="16" name="Durex联系"/>
           <p:cNvSpPr txBox="1"/>
           <p:nvPr/>
         </p:nvSpPr>
         <p:spPr>
           <a:xfrm>
-            <a:off x="777240" y="3291840"/>
-            <a:ext cx="3017520" cy="2103120"/>
+            <a:off x="5669280" y="5257800"/>
+            <a:ext cx="5852160" cy="594360"/>
           </a:xfrm>
           <a:prstGeom prst="rect">
             <a:avLst/>
@@ -14817,243 +18034,21 @@
           <a:ln/>
         </p:spPr>
         <p:txBody>
-          <a:bodyPr wrap="square" lIns="0" tIns="0" rIns="0" bIns="0" rtlCol="0" anchor="t"/>
+          <a:bodyPr wrap="square" lIns="0" tIns="0" rIns="0" bIns="0" rtlCol="0" anchor="ctr"/>
           <a:lstStyle/>
           <a:p>
             <a:pPr indent="0" marL="0">
-              <a:spcAft>
-                <a:spcPts val="800"/>
-              </a:spcAft>
-              <a:buNone/>
-            </a:pPr>
-            <a:r>
-              <a:rPr lang="en-US" sz="1600" b="1" dirty="0">
+              <a:buNone/>
+            </a:pPr>
+            <a:r>
+              <a:rPr lang="en-US" sz="1400" b="1" dirty="0">
                 <a:solidFill>
                   <a:schemeClr val="tx2"/>
                 </a:solidFill>
               </a:rPr>
-              <a:t>分组人数没公布</a:t>
-            </a:r>
-            <a:endParaRPr lang="en-US" sz="1600" dirty="0"/>
-          </a:p>
-          <a:p>
-            <a:pPr indent="0" marL="0">
-              <a:spcAft>
-                <a:spcPts val="800"/>
-              </a:spcAft>
-              <a:buNone/>
-            </a:pPr>
-            <a:r>
-              <a:rPr lang="en-US" sz="1400" dirty="0">
-                <a:solidFill>
-                  <a:schemeClr val="tx1"/>
-                </a:solidFill>
-              </a:rPr>
-              <a:t>13–14 岁、15–28 岁等各组各有多少人，报告没写，所以 54%、80% 这类分组数字的误差无法估计。各组跨度也不一样：Alpha 组只有 2 岁，其他组 14–19 岁。</a:t>
-            </a:r>
-            <a:endParaRPr lang="en-US" sz="1600" dirty="0"/>
-          </a:p>
-        </p:txBody>
-      </p:sp>
-      <p:sp>
-        <p:nvSpPr>
-          <p:cNvPr id="17" name="局限二卡2"/>
-          <p:cNvSpPr/>
-          <p:nvPr/>
-        </p:nvSpPr>
-        <p:spPr>
-          <a:xfrm>
-            <a:off x="4297680" y="3154680"/>
-            <a:ext cx="3474720" cy="2377440"/>
-          </a:xfrm>
-          <a:prstGeom prst="roundRect">
-            <a:avLst>
-              <a:gd name="adj" fmla="val 4615"/>
-            </a:avLst>
-          </a:prstGeom>
-          <a:solidFill>
-            <a:schemeClr val="bg2"/>
-          </a:solidFill>
-          <a:ln w="12700">
-            <a:solidFill>
-              <a:schemeClr val="bg2"/>
-            </a:solidFill>
-            <a:prstDash val="solid"/>
-          </a:ln>
-        </p:spPr>
-      </p:sp>
-      <p:sp>
-        <p:nvSpPr>
-          <p:cNvPr id="18" name="局限二文字2"/>
-          <p:cNvSpPr txBox="1"/>
-          <p:nvPr/>
-        </p:nvSpPr>
-        <p:spPr>
-          <a:xfrm>
-            <a:off x="4526280" y="3291840"/>
-            <a:ext cx="3017520" cy="2103120"/>
-          </a:xfrm>
-          <a:prstGeom prst="rect">
-            <a:avLst/>
-          </a:prstGeom>
-          <a:noFill/>
-          <a:ln/>
-        </p:spPr>
-        <p:txBody>
-          <a:bodyPr wrap="square" lIns="0" tIns="0" rIns="0" bIns="0" rtlCol="0" anchor="t"/>
-          <a:lstStyle/>
-          <a:p>
-            <a:pPr indent="0" marL="0">
-              <a:spcAft>
-                <a:spcPts val="800"/>
-              </a:spcAft>
-              <a:buNone/>
-            </a:pPr>
-            <a:r>
-              <a:rPr lang="en-US" sz="1600" b="1" dirty="0">
-                <a:solidFill>
-                  <a:schemeClr val="tx2"/>
-                </a:solidFill>
-              </a:rPr>
-              <a:t>“美国人”可能只有约 500 人</a:t>
-            </a:r>
-            <a:endParaRPr lang="en-US" sz="1600" dirty="0"/>
-          </a:p>
-          <a:p>
-            <a:pPr indent="0" marL="0">
-              <a:spcAft>
-                <a:spcPts val="800"/>
-              </a:spcAft>
-              <a:buNone/>
-            </a:pPr>
-            <a:r>
-              <a:rPr lang="en-US" sz="1400" dirty="0">
-                <a:solidFill>
-                  <a:schemeClr val="tx1"/>
-                </a:solidFill>
-              </a:rPr>
-              <a:t>2025 调查 3,000 人分属 6 国；如果和 Gracenote 上一份报告一样每国 500 人，“26% 的美国人知道想看什么却找不到”只基于约 500 人。</a:t>
-            </a:r>
-            <a:endParaRPr lang="en-US" sz="1600" dirty="0"/>
-          </a:p>
-        </p:txBody>
-      </p:sp>
-      <p:sp>
-        <p:nvSpPr>
-          <p:cNvPr id="19" name="局限二卡3"/>
-          <p:cNvSpPr/>
-          <p:nvPr/>
-        </p:nvSpPr>
-        <p:spPr>
-          <a:xfrm>
-            <a:off x="8046720" y="3154680"/>
-            <a:ext cx="3474720" cy="2377440"/>
-          </a:xfrm>
-          <a:prstGeom prst="roundRect">
-            <a:avLst>
-              <a:gd name="adj" fmla="val 4615"/>
-            </a:avLst>
-          </a:prstGeom>
-          <a:solidFill>
-            <a:schemeClr val="bg2"/>
-          </a:solidFill>
-          <a:ln w="12700">
-            <a:solidFill>
-              <a:schemeClr val="bg2"/>
-            </a:solidFill>
-            <a:prstDash val="solid"/>
-          </a:ln>
-        </p:spPr>
-      </p:sp>
-      <p:sp>
-        <p:nvSpPr>
-          <p:cNvPr id="20" name="局限二文字3"/>
-          <p:cNvSpPr txBox="1"/>
-          <p:nvPr/>
-        </p:nvSpPr>
-        <p:spPr>
-          <a:xfrm>
-            <a:off x="8275320" y="3291840"/>
-            <a:ext cx="3017520" cy="2103120"/>
-          </a:xfrm>
-          <a:prstGeom prst="rect">
-            <a:avLst/>
-          </a:prstGeom>
-          <a:noFill/>
-          <a:ln/>
-        </p:spPr>
-        <p:txBody>
-          <a:bodyPr wrap="square" lIns="0" tIns="0" rIns="0" bIns="0" rtlCol="0" anchor="t"/>
-          <a:lstStyle/>
-          <a:p>
-            <a:pPr indent="0" marL="0">
-              <a:spcAft>
-                <a:spcPts val="800"/>
-              </a:spcAft>
-              <a:buNone/>
-            </a:pPr>
-            <a:r>
-              <a:rPr lang="en-US" sz="1600" b="1" dirty="0">
-                <a:solidFill>
-                  <a:schemeClr val="tx2"/>
-                </a:solidFill>
-              </a:rPr>
-              <a:t>总体 75% 无法由分组复算</a:t>
-            </a:r>
-            <a:endParaRPr lang="en-US" sz="1600" dirty="0"/>
-          </a:p>
-          <a:p>
-            <a:pPr indent="0" marL="0">
-              <a:spcAft>
-                <a:spcPts val="800"/>
-              </a:spcAft>
-              <a:buNone/>
-            </a:pPr>
-            <a:r>
-              <a:rPr lang="en-US" sz="1400" dirty="0">
-                <a:solidFill>
-                  <a:schemeClr val="tx1"/>
-                </a:solidFill>
-              </a:rPr>
-              <a:t>五个年龄组的核查比例为 74%、78%、78%、70%、58%，简单平均只有 71.6%；总体却是 75%。说明各组人数或权重不同，但报告没交代。</a:t>
-            </a:r>
-            <a:endParaRPr lang="en-US" sz="1600" dirty="0"/>
-          </a:p>
-        </p:txBody>
-      </p:sp>
-      <p:sp>
-        <p:nvSpPr>
-          <p:cNvPr id="21" name="来源说明"/>
-          <p:cNvSpPr txBox="1"/>
-          <p:nvPr/>
-        </p:nvSpPr>
-        <p:spPr>
-          <a:xfrm>
-            <a:off x="548640" y="5943600"/>
-            <a:ext cx="11064240" cy="292608"/>
-          </a:xfrm>
-          <a:prstGeom prst="rect">
-            <a:avLst/>
-          </a:prstGeom>
-          <a:noFill/>
-          <a:ln/>
-        </p:spPr>
-        <p:txBody>
-          <a:bodyPr wrap="square" lIns="0" tIns="0" rIns="0" bIns="0" rtlCol="0" anchor="ctr"/>
-          <a:lstStyle/>
-          <a:p>
-            <a:pPr indent="0" marL="0">
-              <a:buNone/>
-            </a:pPr>
-            <a:r>
-              <a:rPr lang="en-US" sz="1000" dirty="0">
-                <a:solidFill>
-                  <a:schemeClr val="accent5"/>
-                </a:solidFill>
-              </a:rPr>
-              <a:t>来源：报告第 2、13–18、23 页；Gracenote 2025《State of Play》第 20 页（每国 500 人）。</a:t>
-            </a:r>
-            <a:endParaRPr lang="en-US" sz="1000" dirty="0"/>
+              <a:t>和课上 Durex 网络调查是同一个问题：网络样本能否反映总体结构？</a:t>
+            </a:r>
+            <a:endParaRPr lang="en-US" sz="1400" dirty="0"/>
           </a:p>
         </p:txBody>
       </p:sp>

--- a/Gracenote_AI报告解读_课堂分享.pptx
+++ b/Gracenote_AI报告解读_课堂分享.pptx
@@ -122,26 +122,26 @@
   <p:extLst>
     <p:ext uri="{521415D9-36F7-43E2-AB2F-B90AF26B5E84}">
       <p14:sectionLst xmlns:p14="http://schemas.microsoft.com/office/powerpoint/2010/main">
-        <p14:section name="开场" id="{cd12cae7-5102-3bb7-482f-4309740b5675}">
+        <p14:section name="开场" id="{4e41b6b1-80dc-8730-53af-78eb833089e9}">
           <p14:sldIdLst>
             <p14:sldId id="256"/>
           </p14:sldIdLst>
         </p14:section>
-        <p14:section name="报告介绍" id="{289f321f-4ee6-2466-5e93-1031312149fb}">
+        <p14:section name="报告介绍" id="{3d69bc0e-6c67-eb1e-1a6e-0b8d83064a2c}">
           <p14:sldIdLst>
             <p14:sldId id="257"/>
             <p14:sldId id="258"/>
             <p14:sldId id="259"/>
           </p14:sldIdLst>
         </p14:section>
-        <p14:section name="主要发现" id="{e1ee1420-fa8e-147d-07fe-c57b749c3598}">
+        <p14:section name="主要发现" id="{da7c2405-af86-4d89-8ef6-f0540895ead3}">
           <p14:sldIdLst>
             <p14:sldId id="260"/>
             <p14:sldId id="261"/>
             <p14:sldId id="262"/>
           </p14:sldIdLst>
         </p14:section>
-        <p14:section name="评价与局限" id="{32276f2d-0992-0981-6df9-60b7e8b8540b}">
+        <p14:section name="评价与局限" id="{970e456e-877c-2760-a88e-b78488070c1b}">
           <p14:sldIdLst>
             <p14:sldId id="263"/>
             <p14:sldId id="264"/>
@@ -153,7 +153,7 @@
             <p14:sldId id="270"/>
           </p14:sldIdLst>
         </p14:section>
-        <p14:section name="结论" id="{e110f31f-b168-1742-d087-6b445fb9abb5}">
+        <p14:section name="结论" id="{9d21c3e5-ab1a-e1bc-554d-018118fbf98f}">
           <p14:sldIdLst>
             <p14:sldId id="271"/>
           </p14:sldIdLst>
@@ -1836,7 +1836,7 @@
           <a:p>
             <a:r>
               <a:rPr lang="en-US" dirty="0"/>
-              <a:t>第三个局限是我对照 Gracenote 上一份报告原文发现的。2026 报告里的'平均找节目 14 分钟'，其实是巴西、法国、德国、墨西哥、英国、美国六国的简单平均，美国自己是 12 分钟，法国一国 26 分钟把平均拉高了。但报告把 14 分钟和美国尼尔森的收视数据画在了同一张图里。摘要里'18 到 34 岁 54% 会取消订阅'也和六国数据吻合。还有第 9 页 32% 和第 12 页 34% 对不上，原因很可能就是一个是六国平均、一个是美国。也就是说，读者很容易把六国数字当成美国数字。</a:t>
+              <a:t>第三个局限是我对照 Gracenote 上一份报告原文发现的。2026 报告里的'平均找节目 14 分钟'，其实是巴西、法国、德国、墨西哥、英国、美国六国的简单平均，美国自己是 12 分钟，法国一国 26 分钟把平均拉高了。但报告把 14 分钟和美国尼尔森的收视数据画在了同一张图里。摘要里'18 到 34 岁 54% 会取消订阅'也和六国数据吻合；报告说'50% 的美国观众会考虑取消'，原始材料里只找得到六国的 49%。还有第 9 页 32% 和第 12 页 34%，两页措辞略有不同，但对应同一道题，32% 和六国平均一致，34% 写的是美国人。也就是说，读者很容易把六国数字当成美国数字。</a:t>
             </a:r>
             <a:endParaRPr lang="en-US" dirty="0"/>
           </a:p>
@@ -1924,7 +1924,7 @@
           <a:p>
             <a:r>
               <a:rPr lang="en-US" dirty="0"/>
-              <a:t>第三个局限最像春晚案例。报告拿 Pew 的 30% 和自己的 54% 对比，说几个月内使用频率在加速。但我们用春晚的四个角度对一下：对象不同，Pew 是所有 13 到 17 岁青少年，Gracenote 是 13 到 14 岁的 AI 用户；方法不同，Pew 是基于随机地址抽样的样本库并加权；时间也不同。关键是分母：Pew 原文是 64% 的青少年用过聊天机器人，约 3 成每天用，这 3 成是对所有青少年算的。换成和 Gracenote 一样的'使用者'分母，大约是 47%，和 54% 只差 7 个百分点左右。所以表面上 24 个百分点的差距，大部分来自分母不同，不能解释成增长。</a:t>
+              <a:t>第三个局限最像春晚案例。报告拿 Pew 的 30% 和自己的 54% 对比，说几个月内使用频率在加速。但我们用春晚的四个角度对一下：对象不同，Pew 是所有 13 到 17 岁青少年，Gracenote 是 13 到 14 岁的 AI 用户；方法不同，Pew 是基于随机地址抽样的样本库并加权；时间也不同。关键是分母。Pew 的数据表里，所有青少年每天用的精确值是 28%，其中 13 到 14 岁只有 24%；而 Gracenote 同样是 13 到 14 岁，却是 54%。区别在于 Pew 问的是所有青少年，Gracenote 只问 AI 用户。换成同样的'使用者'分母，Pew 是 44%，和 54% 只差 10 个百分点左右，剩下的还可能来自年龄、方法和时间不同。所以这个差距不能解释成增长。</a:t>
             </a:r>
             <a:endParaRPr lang="en-US" dirty="0"/>
           </a:p>
@@ -2012,7 +2012,7 @@
           <a:p>
             <a:r>
               <a:rPr lang="en-US" dirty="0"/>
-              <a:t>第五个局限是指标类型。报告用了四种完全不同的数据：问卷里说'可能会退订'是意向，而且是六国口径；5.5% 的月流失率是实际行为，但另一家机构 Antenna 测得 2019 年就已经是 4.1%，和报告说的 2% 差了一倍，说明定义不同；3185 亿美元是 PwC 对全球 54 个市场的预测，不是美国；三分之二找对平台是多国合并的测试结果，ChatGPT 在美英德约八成正确，在法意西不到三成。报告把它们串成'找不到节目导致退订，所以需要 AI 和可信数据'。但它没有追踪同一批人，也没有做实验，所以这条因果链没有被证明。</a:t>
+              <a:t>第五个局限是指标类型。报告用了四种完全不同的数据：问卷里说'可能会退订'是意向，而且是六国口径；5.5% 的月流失率是实际行为，但另一家机构 Antenna 测得 2019 年就已经是 4.1%，和报告说的 2% 差了一倍，说明定义不同；3185 亿美元是 PwC 对全球市场的预测，不是美国；三分之二找对平台是六个国家合并的测试结果，而且只测独播剧，ChatGPT 在美英德约八成正确，在法意西不到三成。报告把它们串成'找不到节目导致退订，所以需要 AI 和可信数据'。但它没有追踪同一批人，也没有做实验，所以这条因果链没有被证明。</a:t>
             </a:r>
             <a:endParaRPr lang="en-US" dirty="0"/>
           </a:p>
@@ -2100,7 +2100,7 @@
           <a:p>
             <a:r>
               <a:rPr lang="en-US" dirty="0"/>
-              <a:t>第六个局限是几处引用和口径。比如 USC 那个 38%，原论文里只是一个知识库在一个指标下的数，另一个库只有 3% 到 4%；Deloitte 的 41% 原文是所有消费者，报告写成了订户；摘要说'会取消'，正文是'会考虑取消'。PwC 的 3185 亿美元其实是全球 54 个市场的合计；核查图里 83% 大于 58%，分母没写清。这些不一定推翻大方向，但提醒我们引用二手数据要回原文核对。</a:t>
+              <a:t>第六个局限是几处引用和口径。比如 USC 那个 38%，原论文里只是一个知识库在一个指标下的数，而且是自动分类器判的，这个指标和人工判断的一致率只有六成，另一个库只有 3% 到 4%；Deloitte 的 41% 原文是所有消费者，报告写成了订户；摘要说'会取消'，正文是'会考虑取消'。PwC 的 3185 亿美元其实是全球数字；核查图里 83% 大于 58%，分母没写清。这些不一定推翻大方向，但提醒我们引用二手数据要回原文核对。</a:t>
             </a:r>
             <a:endParaRPr lang="en-US" dirty="0"/>
           </a:p>
@@ -5243,7 +5243,7 @@
                   <a:schemeClr val="accent3"/>
                 </a:solidFill>
               </a:rPr>
-              <a:t>54%</a:t>
+              <a:t>54% 与 50%</a:t>
             </a:r>
             <a:endParaRPr lang="en-US" sz="2000" dirty="0"/>
           </a:p>
@@ -5279,7 +5279,7 @@
                   <a:schemeClr val="tx1"/>
                 </a:solidFill>
               </a:rPr>
-              <a:t>摘要里“18–34 岁会取消订阅”的比例，与六国数据吻合（18–24 岁 52%、25–34 岁 56%），却和美国数据并列。</a:t>
+              <a:t>摘要“18–34 岁 54% 会取消”与六国数据吻合（18–24 岁 52%、25–34 岁 56%）；“50% 的美国观众会考虑取消”原文只找到六国 49%。</a:t>
             </a:r>
             <a:endParaRPr lang="en-US" sz="1300" dirty="0"/>
           </a:p>
@@ -5378,7 +5378,7 @@
                   <a:schemeClr val="tx1"/>
                 </a:solidFill>
               </a:rPr>
-              <a:t>第 9 页的 32% 是六国平均；第 12 页的 34% 写的是“美国人”。两页数字不同，原因很可能就是口径不同。</a:t>
+              <a:t>两页措辞略异，但对应同一道题。32% 与六国平均一致；第 12 页写成“34% 的美国人”。两页的“18–34 岁 48%”都高于六国同龄的 39%–40%。</a:t>
             </a:r>
             <a:endParaRPr lang="en-US" sz="1300" dirty="0"/>
           </a:p>
@@ -6494,7 +6494,7 @@
                             <a:schemeClr val="tx1"/>
                           </a:solidFill>
                         </a:rPr>
-                        <a:t>64% 用过聊天机器人；约 30% 每天用</a:t>
+                        <a:t>64% 用过；每天用 28%，其中 13–14 岁 24%</a:t>
                       </a:r>
                       <a:endParaRPr lang="en-US" sz="1400" dirty="0"/>
                     </a:p>
@@ -6555,7 +6555,7 @@
                             <a:schemeClr val="tx1"/>
                           </a:solidFill>
                         </a:rPr>
-                        <a:t>54% 每天使用</a:t>
+                        <a:t>13–14 岁：54% 每天使用</a:t>
                       </a:r>
                       <a:endParaRPr lang="en-US" sz="1400" dirty="0"/>
                     </a:p>
@@ -6679,7 +6679,7 @@
                             <a:schemeClr val="accent3"/>
                           </a:solidFill>
                         </a:rPr>
-                        <a:t>使用者中每天用：30% ÷ 64% ≈ 47%</a:t>
+                        <a:t>使用者中每天用：44%（894 人）</a:t>
                       </a:r>
                       <a:endParaRPr lang="en-US" sz="1400" dirty="0"/>
                     </a:p>
@@ -6849,7 +6849,7 @@
                   <a:schemeClr val="accent3"/>
                 </a:solidFill>
               </a:rPr>
-              <a:t>换成同一分母，差距从 24 个百分点缩到约 7 个；剩下的差距还可能来自年龄、方法、时间不同，不能说明“加速”。</a:t>
+              <a:t>同为 13–14 岁：24% 对 54%，差距主要来自分母。换成使用者分母只差约 10 个百分点，不能说明“加速”。</a:t>
             </a:r>
             <a:endParaRPr lang="en-US" sz="1500" dirty="0"/>
           </a:p>
@@ -7488,7 +7488,7 @@
                   <a:schemeClr val="accent5"/>
                 </a:solidFill>
               </a:rPr>
-              <a:t>Fabric，定义未公开</a:t>
+              <a:t>Fabric 原页未见此数，定义未公开</a:t>
             </a:r>
             <a:endParaRPr lang="en-US" sz="1400" dirty="0"/>
           </a:p>
@@ -7675,7 +7675,7 @@
                   <a:schemeClr val="tx1"/>
                 </a:solidFill>
               </a:rPr>
-              <a:t>OTT 与付费电视 2029 年支出，是全球 54 个市场合计</a:t>
+              <a:t>OTT 与付费电视 2029 年支出，是全球数字，不是美国</a:t>
             </a:r>
             <a:endParaRPr lang="en-US" sz="1400" dirty="0"/>
           </a:p>
@@ -7896,7 +7896,7 @@
                   <a:schemeClr val="accent5"/>
                 </a:solidFill>
               </a:rPr>
-              <a:t>Veed，多国合并值</a:t>
+              <a:t>Veed，6 国合并、只测独播剧</a:t>
             </a:r>
             <a:endParaRPr lang="en-US" sz="1400" dirty="0"/>
           </a:p>
@@ -8308,7 +8308,7 @@
                   </a:tcPr>
                 </a:tc>
               </a:tr>
-              <a:tr h="713232">
+              <a:tr h="868680">
                 <a:tc>
                   <a:txBody>
                     <a:bodyPr/>
@@ -8384,7 +8384,7 @@
                             <a:schemeClr val="tx1"/>
                           </a:solidFill>
                         </a:rPr>
-                        <a:t>38.6% 只是 GenericsKB 一个知识库在 regard 指标下的比例；另一个库 ConceptNet 是 3.4%–4.5%</a:t>
+                        <a:t>38.6% 只是 GenericsKB 一个库在 regard 指标下的比例，由自动分类器判定，该指标与人工判断的一致率仅 60.9%；另一个库 ConceptNet 是 3.4%–4.5%</a:t>
                       </a:r>
                       <a:endParaRPr lang="en-US" sz="1300" dirty="0"/>
                     </a:p>
@@ -8432,7 +8432,7 @@
                   </a:tcPr>
                 </a:tc>
               </a:tr>
-              <a:tr h="713232">
+              <a:tr h="658368">
                 <a:tc>
                   <a:txBody>
                     <a:bodyPr/>
@@ -8556,7 +8556,7 @@
                   </a:tcPr>
                 </a:tc>
               </a:tr>
-              <a:tr h="548640">
+              <a:tr h="502920">
                 <a:tc>
                   <a:txBody>
                     <a:bodyPr/>
@@ -8680,7 +8680,7 @@
                   </a:tcPr>
                 </a:tc>
               </a:tr>
-              <a:tr h="713232">
+              <a:tr h="658368">
                 <a:tc>
                   <a:txBody>
                     <a:bodyPr/>
@@ -8756,7 +8756,7 @@
                             <a:schemeClr val="tx1"/>
                           </a:solidFill>
                         </a:rPr>
-                        <a:t>这是全球 54 个国家和地区的合计（2024 年 2,913 亿，年增 1.8%），报告没写明是全球</a:t>
+                        <a:t>这是全球数字（2024 年 2,913 亿，年增 1.8%），报告没写明是全球</a:t>
                       </a:r>
                       <a:endParaRPr lang="en-US" sz="1300" dirty="0"/>
                     </a:p>
@@ -8804,7 +8804,7 @@
                   </a:tcPr>
                 </a:tc>
               </a:tr>
-              <a:tr h="713232">
+              <a:tr h="658368">
                 <a:tc>
                   <a:txBody>
                     <a:bodyPr/>
@@ -14703,7 +14703,7 @@
                   <a:schemeClr val="tx1"/>
                 </a:solidFill>
               </a:rPr>
-              <a:t>公开数据 + 行业访谈 + 建模；54 个国家和地区合计</a:t>
+              <a:t>公开数据 + 行业访谈 + 建模；全球市场合计</a:t>
             </a:r>
             <a:endParaRPr lang="en-US" sz="1400" dirty="0"/>
           </a:p>
@@ -14858,7 +14858,7 @@
                   <a:schemeClr val="tx1"/>
                 </a:solidFill>
               </a:rPr>
-              <a:t>美欧多国提问评分；题量、日期、评分标准未公开</a:t>
+              <a:t>6 国、只测独播剧、每题问 3 次；题量、模型版本、评分程序未公开</a:t>
             </a:r>
             <a:endParaRPr lang="en-US" sz="1400" dirty="0"/>
           </a:p>
@@ -15013,7 +15013,7 @@
                   <a:schemeClr val="tx1"/>
                 </a:solidFill>
               </a:rPr>
-              <a:t>同行评审论文（EMNLP 2021），两个知识库、自动指标</a:t>
+              <a:t>同行评审论文；自动分类器判定 + 众包抽样人工验证</a:t>
             </a:r>
             <a:endParaRPr lang="en-US" sz="1400" dirty="0"/>
           </a:p>
@@ -15168,7 +15168,7 @@
                   <a:schemeClr val="tx1"/>
                 </a:solidFill>
               </a:rPr>
-              <a:t>自动抓取 + 人工核验；流失率定义未公开</a:t>
+              <a:t>Fabric 原页未见 5.5% 与 2%；流失率定义未公开</a:t>
             </a:r>
             <a:endParaRPr lang="en-US" sz="1400" dirty="0"/>
           </a:p>

--- a/Gracenote_AI报告解读_课堂分享.pptx
+++ b/Gracenote_AI报告解读_课堂分享.pptx
@@ -118,19 +118,19 @@
   <p:extLst>
     <p:ext uri="{521415D9-36F7-43E2-AB2F-B90AF26B5E84}">
       <p14:sectionLst xmlns:p14="http://schemas.microsoft.com/office/powerpoint/2010/main">
-        <p14:section name="开场" id="{a496ad52-5f88-b379-3fbd-3ede41a5f0ab}">
+        <p14:section name="开场" id="{d53c7028-9b7d-c3b4-aa4d-2211863fc93a}">
           <p14:sldIdLst>
             <p14:sldId id="256"/>
           </p14:sldIdLst>
         </p14:section>
-        <p14:section name="报告介绍" id="{cde322d0-870f-b201-cc10-efa4386d4bfa}">
+        <p14:section name="报告介绍" id="{f4a8d30b-7ca5-4a81-bf48-ac0b9bddc29e}">
           <p14:sldIdLst>
             <p14:sldId id="257"/>
             <p14:sldId id="258"/>
             <p14:sldId id="259"/>
           </p14:sldIdLst>
         </p14:section>
-        <p14:section name="评价" id="{109cbb1c-6d3a-2606-bdac-0f9028e75eda}">
+        <p14:section name="评价" id="{902a1cad-474a-9536-82d3-89597934c865}">
           <p14:sldIdLst>
             <p14:sldId id="260"/>
             <p14:sldId id="261"/>
@@ -139,12 +139,12 @@
             <p14:sldId id="264"/>
           </p14:sldIdLst>
         </p14:section>
-        <p14:section name="结论" id="{490a992c-4118-0559-cf32-78c1a7dd656e}">
+        <p14:section name="结论" id="{be88bb5e-ca8f-6292-4e1f-3c31841d4ef8}">
           <p14:sldIdLst>
             <p14:sldId id="265"/>
           </p14:sldIdLst>
         </p14:section>
-        <p14:section name="附录（备问）" id="{2110f5b5-abd4-6d65-0387-67286c4f41a7}">
+        <p14:section name="附录（备问）" id="{a2fb4f44-b982-4fe6-c725-b96e5a8c16d2}">
           <p14:sldIdLst>
             <p14:sldId id="266"/>
             <p14:sldId id="267"/>
@@ -185,7 +185,7 @@
                 </a:solidFill>
                 <a:latin typeface="+mn-lt"/>
               </a:rPr>
-              <a:t>找到想看的节目要几分钟（2025 调查原文）</a:t>
+              <a:t>找到想看的节目要几分钟（六国调查的原始报告）</a:t>
             </a:r>
           </a:p>
         </c:rich>
@@ -913,7 +913,7 @@
           <a:p>
             <a:r>
               <a:rPr lang="en-US" dirty="0"/>
-              <a:t>【约 20 秒】大家好。我分享的是尼尔森旗下 Gracenote 今年 4 月的报告。它有个很抓眼的数字：54% 的 13 到 14 岁孩子每天都用 AI。我想追问的是：这个数字代表的是谁？</a:t>
+              <a:t>【约 25 秒】大家好。我分享的是尼尔森旗下 Gracenote 今年 4 月发布的一份行业报告，讲的是 AI 怎样改变人们找电视节目。里面有个很抓眼的数字：54% 的 13 到 14 岁孩子每天都用 AI。我想追问：这个数字代表的是谁？</a:t>
             </a:r>
             <a:endParaRPr lang="en-US" dirty="0"/>
           </a:p>
@@ -1001,7 +1001,7 @@
           <a:p>
             <a:r>
               <a:rPr lang="en-US" dirty="0"/>
-              <a:t>【约 25 秒】我的评价是：报告公开了样本量、时间和年龄，图里的数字我复算也对得上，可以当作行业方向的信号；但不宜当作对“美国人”的精确估计，更不是因果证据。留个问题给大家：要验证“找不到节目会导致退订”，你会怎么设计调查？谢谢大家。</a:t>
+              <a:t>【约 25 秒】我的评价是：报告公开了样本量、时间和年龄，图里的数字我复算也对得上，可以当作行业趋势的信号；但不能当作“美国人”的精确数据，也不是因果证据。最后留个问题：要验证“找不到节目会导致退订”，你会怎么设计调查？谢谢大家。</a:t>
             </a:r>
             <a:endParaRPr lang="en-US" dirty="0"/>
           </a:p>
@@ -1265,7 +1265,7 @@
           <a:p>
             <a:r>
               <a:rPr lang="en-US" dirty="0"/>
-              <a:t>【约 25 秒】报告问了三个问题：大家怎么用 AI 找信息；平台这么多，找节目有多难、会不会因此退订；观众信不信 AI 的答案。做报告的 Gracenote 本身就卖节目数据，它的主张是：AI 会成为找节目的入口，但必须接入可信的行业数据。</a:t>
+              <a:t>【约 35 秒】先说背景：平台越来越多，想看一部剧常常不知道去哪找，很多人干脆直接问 ChatGPT。报告就问了三件事：怎么用 AI 找信息；找节目有多难、会不会因此退订；信不信 AI 的答案。做报告的 Gracenote 专门给平台提供节目资料，它主张 AI 必须接入可信的行业数据，也就是它卖的东西。</a:t>
             </a:r>
             <a:endParaRPr lang="en-US" dirty="0"/>
           </a:p>
@@ -1353,7 +1353,7 @@
           <a:p>
             <a:r>
               <a:rPr lang="en-US" dirty="0"/>
-              <a:t>【约 30 秒】按老师要求的对象、时间、抽样、样本量来看。核心是两份线上问卷：一份是今年 1 到 2 月，4003 名美国 AI 聊天机器人用户；另一份是去年夏天，六个国家各 500 名流媒体用户。最关键的是橙色这一行：两份都没公开样本从哪里招、怎么加权、回应率多少。</a:t>
+              <a:t>【约 25 秒】按老师要求的四项看方法。报告主要靠两份线上问卷：一份是今年 1 到 2 月，4003 名美国 AI 聊天机器人用户；另一份是去年夏天，六个国家各 500 名流媒体用户。关键在橙色这一行：两份都没公开样本从哪里招、怎么加权、回应率多少。</a:t>
             </a:r>
             <a:endParaRPr lang="en-US" dirty="0"/>
           </a:p>
@@ -1441,7 +1441,7 @@
           <a:p>
             <a:r>
               <a:rPr lang="en-US" dirty="0"/>
-              <a:t>【约 30 秒】结论有四个数字：13 到 14 岁的 AI 用户 54% 每天用；75% 会核查 AI 的答案；平均找一个节目要 14 分钟；18 到 34 岁有 54% 说找不到想看的可能会退订。报告由此推出：大家依赖 AI 又不信任 AI，节目难找导致退订，所以 AI 要接入可信数据。</a:t>
+              <a:t>【约 30 秒】结论可以归成四个数字：13 到 14 岁的 AI 用户 54% 每天都用；75% 会核查 AI 的答案；平均找一个节目要 14 分钟；18 到 34 岁有 54% 说找不到可能会退订。报告由此推出：离不开 AI 又不信 AI，节目难找导致退订，所以 AI 要接入可信数据。</a:t>
             </a:r>
             <a:endParaRPr lang="en-US" dirty="0"/>
           </a:p>
@@ -1617,7 +1617,7 @@
           <a:p>
             <a:r>
               <a:rPr lang="en-US" dirty="0"/>
-              <a:t>【约 30 秒】第一，对象。这 4003 人是 AI 聊天机器人用户，是一层层筛出来的人群，正文却常写成“美国人”。所谓 Alpha 世代，定义是 2010 到 2024 年出生，样本里只有 13 到 14 岁。这和课上 Durex 网络调查是同一个问题：网络样本能不能代表总体，现有说明判断不了。</a:t>
+              <a:t>【约 35 秒】第一，对象。这 4003 人都是用 AI 聊天机器人的人，是层层筛出来的，报告却常把结论说成“美国人”如何。它还把 13 到 14 岁叫作“Alpha 世代”，其实这个世代指 2010 到 2024 年出生的所有人。这和课上 Durex 网络调查一样：网络样本能否代表总体，现有说明判断不了。</a:t>
             </a:r>
             <a:endParaRPr lang="en-US" dirty="0"/>
           </a:p>
@@ -1705,7 +1705,7 @@
           <a:p>
             <a:r>
               <a:rPr lang="en-US" dirty="0"/>
-              <a:t>【约 30 秒】第二，总体。我对照了 Gracenote 上一份报告的原文：“找节目要 14 分钟”是六个国家的简单平均，美国自己是 12 分钟，是法国的 26 分钟把平均拉高了。可报告把它和美国尼尔森的收视数据画在了同一张图里。“54% 可能退订”也是六国口径。</a:t>
+              <a:t>【约 30 秒】第二，总体。“找节目要 14 分钟”来自 Gracenote 去年的六国调查。我找到那份调查的原始报告，它是分国家列的：美国 12 分钟，法国 26 分钟，14 分钟是六国平均。可这份报告把它放进了一张讲美国人看电视的图里。“54% 可能退订”也是六国的数字。</a:t>
             </a:r>
             <a:endParaRPr lang="en-US" dirty="0"/>
           </a:p>
@@ -1793,7 +1793,7 @@
           <a:p>
             <a:r>
               <a:rPr lang="en-US" dirty="0"/>
-              <a:t>【约 30 秒】第三，时间和分母。报告说 Pew 去年秋天测到 30% 的青少年每天用，几个月后它测到 54%，所以使用在“加速”。但 Pew 原文里，同样是 13 到 14 岁只有 24%，因为 Pew 问的是全体青少年，Gracenote 只问 AI 用户。换成同一分母，只差 10 个百分点左右。</a:t>
+              <a:t>【约 35 秒】第三，时间和分母。报告引用美国皮尤研究中心的数据：去年秋天 30% 的青少年每天用 AI，几个月后它测到 54%，于是说使用在“加速”。但皮尤原始数据里，同样 13 到 14 岁只有 24%：皮尤问的是所有青少年，Gracenote 只问用 AI 的人。都只看用 AI 的人，差距只剩 10 个百分点左右。</a:t>
             </a:r>
             <a:endParaRPr lang="en-US" dirty="0"/>
           </a:p>
@@ -1881,7 +1881,7 @@
           <a:p>
             <a:r>
               <a:rPr lang="en-US" dirty="0"/>
-              <a:t>【约 30 秒】第四，方法。那条因果链用了四种数据：问卷里的退订意向、行业的流失率、PwC 的全球预测、Veed 的机器测试。它们性质不同，也没有追踪同一批人，证明不了“找不到就退订”。还有些引用被放大了，比如 USC 的 38%，只是一个知识库、一个自动指标的结果。</a:t>
+              <a:t>【约 25 秒】第四，方法。为了说明“找不到就会退订”，报告拼了四种数据：问卷里的退订意愿、行业的退订率、普华永道的全球预测，还有一家公司让 AI 回答“剧在哪能看”的测试。它们性质各不相同，也没有追踪同一批人，证明不了这个因果关系。</a:t>
             </a:r>
             <a:endParaRPr lang="en-US" dirty="0"/>
           </a:p>
@@ -2027,7 +2027,7 @@
         <p:spPr>
           <a:xfrm>
             <a:off x="731520" y="3886200"/>
-            <a:ext cx="6583680" cy="1005840"/>
+            <a:ext cx="6583680" cy="1371600"/>
           </a:xfrm>
           <a:prstGeom prst="rect">
             <a:avLst/>
@@ -2128,42 +2128,6 @@
       </p:sp>
       <p:sp>
         <p:nvSpPr>
-          <p:cNvPr id="3" name="Text 0"/>
-          <p:cNvSpPr/>
-          <p:nvPr/>
-        </p:nvSpPr>
-        <p:spPr>
-          <a:xfrm>
-            <a:off x="731520" y="6355080"/>
-            <a:ext cx="8229600" cy="274320"/>
-          </a:xfrm>
-          <a:prstGeom prst="rect">
-            <a:avLst/>
-          </a:prstGeom>
-          <a:noFill/>
-          <a:ln/>
-        </p:spPr>
-        <p:txBody>
-          <a:bodyPr wrap="square" lIns="0" tIns="0" rIns="0" bIns="0" rtlCol="0" anchor="ctr"/>
-          <a:lstStyle/>
-          <a:p>
-            <a:pPr indent="0" marL="0">
-              <a:buNone/>
-            </a:pPr>
-            <a:r>
-              <a:rPr lang="en-US" sz="1000" dirty="0">
-                <a:solidFill>
-                  <a:schemeClr val="accent6"/>
-                </a:solidFill>
-              </a:rPr>
-              <a:t>Gracenote《TV Search and Discovery in the AI Era》解读 ｜ 市场调研：方法与实践</a:t>
-            </a:r>
-            <a:endParaRPr lang="en-US" sz="1000" dirty="0"/>
-          </a:p>
-        </p:txBody>
-      </p:sp>
-      <p:sp>
-        <p:nvSpPr>
           <p:cNvPr id="25" name="Slide Number Placeholder 0"/>
           <p:cNvSpPr>
             <a:spLocks noGrp="1"/>
@@ -2275,42 +2239,6 @@
               <a:buNone/>
             </a:pPr>
             <a:endParaRPr lang="en-US" sz="3000" dirty="0"/>
-          </a:p>
-        </p:txBody>
-      </p:sp>
-      <p:sp>
-        <p:nvSpPr>
-          <p:cNvPr id="3" name="Text 0"/>
-          <p:cNvSpPr/>
-          <p:nvPr/>
-        </p:nvSpPr>
-        <p:spPr>
-          <a:xfrm>
-            <a:off x="548640" y="6355080"/>
-            <a:ext cx="8229600" cy="274320"/>
-          </a:xfrm>
-          <a:prstGeom prst="rect">
-            <a:avLst/>
-          </a:prstGeom>
-          <a:noFill/>
-          <a:ln/>
-        </p:spPr>
-        <p:txBody>
-          <a:bodyPr wrap="square" lIns="0" tIns="0" rIns="0" bIns="0" rtlCol="0" anchor="ctr"/>
-          <a:lstStyle/>
-          <a:p>
-            <a:pPr indent="0" marL="0">
-              <a:buNone/>
-            </a:pPr>
-            <a:r>
-              <a:rPr lang="en-US" sz="1000" dirty="0">
-                <a:solidFill>
-                  <a:schemeClr val="accent5"/>
-                </a:solidFill>
-              </a:rPr>
-              <a:t>Gracenote《TV Search and Discovery in the AI Era》解读 ｜ 市场调研：方法与实践</a:t>
-            </a:r>
-            <a:endParaRPr lang="en-US" sz="1000" dirty="0"/>
           </a:p>
         </p:txBody>
       </p:sp>
@@ -2808,7 +2736,7 @@
         <p:spPr>
           <a:xfrm>
             <a:off x="731520" y="3886200"/>
-            <a:ext cx="6583680" cy="1005840"/>
+            <a:ext cx="6583680" cy="1371600"/>
           </a:xfrm>
           <a:prstGeom prst="rect">
             <a:avLst/>
@@ -2829,7 +2757,7 @@
                   <a:schemeClr val="accent6"/>
                 </a:solidFill>
               </a:rPr>
-              <a:t>解读 Gracenote（尼尔森旗下）2026 年报告</a:t>
+              <a:t>解读尼尔森旗下 Gracenote 2026 年的行业报告</a:t>
             </a:r>
             <a:endParaRPr lang="en-US" sz="1800" dirty="0"/>
           </a:p>
@@ -2844,6 +2772,20 @@
                 </a:solidFill>
               </a:rPr>
               <a:t>《TV Search and Discovery in the AI Era》</a:t>
+            </a:r>
+            <a:endParaRPr lang="en-US" sz="1800" dirty="0"/>
+          </a:p>
+          <a:p>
+            <a:pPr algn="l" indent="0" marL="0">
+              <a:buNone/>
+            </a:pPr>
+            <a:r>
+              <a:rPr lang="en-US" sz="1800" dirty="0">
+                <a:solidFill>
+                  <a:schemeClr val="accent6"/>
+                </a:solidFill>
+              </a:rPr>
+              <a:t>主题：AI 时代，人们怎样找电视节目</a:t>
             </a:r>
             <a:endParaRPr lang="en-US" sz="1800" dirty="0"/>
           </a:p>
@@ -3386,7 +3328,7 @@
                   <a:schemeClr val="bg1"/>
                 </a:solidFill>
               </a:rPr>
-              <a:t>图中数字可复算：CTV 占 54%、授权剧多 81%，都对得上</a:t>
+              <a:t>我用图里的原始数字复算了几处，都对得上</a:t>
             </a:r>
             <a:endParaRPr lang="en-US" sz="1400" dirty="0"/>
           </a:p>
@@ -3469,7 +3411,7 @@
                   <a:schemeClr val="bg1"/>
                 </a:solidFill>
               </a:rPr>
-              <a:t>行业方向的信号：年轻人在用 AI 找内容，但并不信任它。</a:t>
+              <a:t>行业趋势的信号：年轻人在用 AI 找节目，但并不信任它。</a:t>
             </a:r>
             <a:endParaRPr lang="en-US" sz="1800" dirty="0"/>
           </a:p>
@@ -3552,7 +3494,7 @@
                   <a:schemeClr val="bg1"/>
                 </a:solidFill>
               </a:rPr>
-              <a:t>对“美国人”的精确估计，或“找不到 → 退订”的因果证据。</a:t>
+              <a:t>对“美国人”的精确数据，或“找不到 → 退订”的因果证据。</a:t>
             </a:r>
             <a:endParaRPr lang="en-US" sz="1800" dirty="0"/>
           </a:p>
@@ -3688,7 +3630,7 @@
                   <a:schemeClr val="accent6"/>
                 </a:solidFill>
               </a:rPr>
-              <a:t>提醒：报告主张“需要可信的行业数据”正是 Gracenote 的业务。这是细看方法的理由，但不能据此断定数据有误。</a:t>
+              <a:t>提醒：报告的主张（AI 要接入可信的行业数据）正是 Gracenote 的业务。这是要细看方法的理由，但不能据此断定数据有误。</a:t>
             </a:r>
             <a:endParaRPr lang="en-US" sz="1200" dirty="0"/>
           </a:p>
@@ -6882,18 +6824,65 @@
       </p:sp>
       <p:sp>
         <p:nvSpPr>
-          <p:cNvPr id="3" name="问题卡1"/>
+          <p:cNvPr id="3" name="背景"/>
+          <p:cNvSpPr txBox="1"/>
+          <p:nvPr/>
+        </p:nvSpPr>
+        <p:spPr>
+          <a:xfrm>
+            <a:off x="548640" y="1234440"/>
+            <a:ext cx="11064240" cy="457200"/>
+          </a:xfrm>
+          <a:prstGeom prst="rect">
+            <a:avLst/>
+          </a:prstGeom>
+          <a:noFill/>
+          <a:ln/>
+        </p:spPr>
+        <p:txBody>
+          <a:bodyPr wrap="square" lIns="0" tIns="0" rIns="0" bIns="0" rtlCol="0" anchor="ctr"/>
+          <a:lstStyle/>
+          <a:p>
+            <a:pPr indent="0" marL="0">
+              <a:buNone/>
+            </a:pPr>
+            <a:r>
+              <a:rPr lang="en-US" sz="1600" b="1" dirty="0">
+                <a:solidFill>
+                  <a:schemeClr val="accent1"/>
+                </a:solidFill>
+              </a:rPr>
+              <a:t>背景：</a:t>
+            </a:r>
+            <a:pPr indent="0" marL="0">
+              <a:buNone/>
+            </a:pPr>
+            <a:r>
+              <a:rPr lang="en-US" sz="1600" dirty="0">
+                <a:solidFill>
+                  <a:schemeClr val="tx1"/>
+                </a:solidFill>
+              </a:rPr>
+              <a:t>流媒体平台越来越多，想看一部剧常常不知道去哪找；不少人开始直接问 ChatGPT 这类 AI 聊天机器人。</a:t>
+            </a:r>
+            <a:endParaRPr lang="en-US" sz="1600" dirty="0"/>
+          </a:p>
+        </p:txBody>
+      </p:sp>
+      <p:sp>
+        <p:nvSpPr>
+          <p:cNvPr id="4" name="问题卡1"/>
           <p:cNvSpPr/>
           <p:nvPr/>
         </p:nvSpPr>
         <p:spPr>
           <a:xfrm>
-            <a:off x="548640" y="1371600"/>
-            <a:ext cx="3474720" cy="2011680"/>
+            <a:off x="548640" y="1874520"/>
+            <a:ext cx="3474720" cy="1783080"/>
           </a:xfrm>
           <a:prstGeom prst="roundRect">
             <a:avLst>
-              <a:gd name="adj" fmla="val 5455"/>
+              <a:gd name="adj" fmla="val 6154"/>
             </a:avLst>
           </a:prstGeom>
           <a:solidFill>
@@ -6909,14 +6898,14 @@
       </p:sp>
       <p:sp>
         <p:nvSpPr>
-          <p:cNvPr id="4" name="图标底"/>
+          <p:cNvPr id="5" name="图标底"/>
           <p:cNvSpPr/>
           <p:nvPr/>
         </p:nvSpPr>
         <p:spPr>
           <a:xfrm>
-            <a:off x="822960" y="1645920"/>
-            <a:ext cx="640080" cy="640080"/>
+            <a:off x="822960" y="2057400"/>
+            <a:ext cx="594360" cy="594360"/>
           </a:xfrm>
           <a:prstGeom prst="ellipse">
             <a:avLst/>
@@ -6934,7 +6923,7 @@
       </p:sp>
       <p:pic>
         <p:nvPicPr>
-          <p:cNvPr id="5" name="图标" descr="preencoded.png">    </p:cNvPr>
+          <p:cNvPr id="6" name="图标" descr="preencoded.png">    </p:cNvPr>
           <p:cNvPicPr>
             <a:picLocks noChangeAspect="1"/>
           </p:cNvPicPr>
@@ -6948,8 +6937,8 @@
         </p:blipFill>
         <p:spPr>
           <a:xfrm>
-            <a:off x="982980" y="1805940"/>
-            <a:ext cx="320040" cy="320040"/>
+            <a:off x="971550" y="2205990"/>
+            <a:ext cx="297180" cy="297180"/>
           </a:xfrm>
           <a:prstGeom prst="rect">
             <a:avLst/>
@@ -6958,14 +6947,14 @@
       </p:pic>
       <p:sp>
         <p:nvSpPr>
-          <p:cNvPr id="6" name="问题标题1"/>
-          <p:cNvSpPr txBox="1"/>
-          <p:nvPr/>
-        </p:nvSpPr>
-        <p:spPr>
-          <a:xfrm>
-            <a:off x="1600200" y="1645920"/>
-            <a:ext cx="2286000" cy="640080"/>
+          <p:cNvPr id="7" name="问题标题1"/>
+          <p:cNvSpPr txBox="1"/>
+          <p:nvPr/>
+        </p:nvSpPr>
+        <p:spPr>
+          <a:xfrm>
+            <a:off x="1554480" y="2057400"/>
+            <a:ext cx="2286000" cy="594360"/>
           </a:xfrm>
           <a:prstGeom prst="rect">
             <a:avLst/>
@@ -6994,14 +6983,14 @@
       </p:sp>
       <p:sp>
         <p:nvSpPr>
-          <p:cNvPr id="7" name="问题内容1"/>
-          <p:cNvSpPr txBox="1"/>
-          <p:nvPr/>
-        </p:nvSpPr>
-        <p:spPr>
-          <a:xfrm>
-            <a:off x="822960" y="2423160"/>
-            <a:ext cx="2926080" cy="868680"/>
+          <p:cNvPr id="8" name="问题内容1"/>
+          <p:cNvSpPr txBox="1"/>
+          <p:nvPr/>
+        </p:nvSpPr>
+        <p:spPr>
+          <a:xfrm>
+            <a:off x="822960" y="2743200"/>
+            <a:ext cx="2926080" cy="777240"/>
           </a:xfrm>
           <a:prstGeom prst="rect">
             <a:avLst/>
@@ -7030,18 +7019,18 @@
       </p:sp>
       <p:sp>
         <p:nvSpPr>
-          <p:cNvPr id="8" name="问题卡2"/>
+          <p:cNvPr id="9" name="问题卡2"/>
           <p:cNvSpPr/>
           <p:nvPr/>
         </p:nvSpPr>
         <p:spPr>
           <a:xfrm>
-            <a:off x="4297680" y="1371600"/>
-            <a:ext cx="3474720" cy="2011680"/>
+            <a:off x="4297680" y="1874520"/>
+            <a:ext cx="3474720" cy="1783080"/>
           </a:xfrm>
           <a:prstGeom prst="roundRect">
             <a:avLst>
-              <a:gd name="adj" fmla="val 5455"/>
+              <a:gd name="adj" fmla="val 6154"/>
             </a:avLst>
           </a:prstGeom>
           <a:solidFill>
@@ -7057,14 +7046,14 @@
       </p:sp>
       <p:sp>
         <p:nvSpPr>
-          <p:cNvPr id="9" name="图标底"/>
+          <p:cNvPr id="10" name="图标底"/>
           <p:cNvSpPr/>
           <p:nvPr/>
         </p:nvSpPr>
         <p:spPr>
           <a:xfrm>
-            <a:off x="4572000" y="1645920"/>
-            <a:ext cx="640080" cy="640080"/>
+            <a:off x="4572000" y="2057400"/>
+            <a:ext cx="594360" cy="594360"/>
           </a:xfrm>
           <a:prstGeom prst="ellipse">
             <a:avLst/>
@@ -7082,7 +7071,7 @@
       </p:sp>
       <p:pic>
         <p:nvPicPr>
-          <p:cNvPr id="10" name="图标" descr="preencoded.png">    </p:cNvPr>
+          <p:cNvPr id="11" name="图标" descr="preencoded.png">    </p:cNvPr>
           <p:cNvPicPr>
             <a:picLocks noChangeAspect="1"/>
           </p:cNvPicPr>
@@ -7096,8 +7085,8 @@
         </p:blipFill>
         <p:spPr>
           <a:xfrm>
-            <a:off x="4732020" y="1805940"/>
-            <a:ext cx="320040" cy="320040"/>
+            <a:off x="4720590" y="2205990"/>
+            <a:ext cx="297180" cy="297180"/>
           </a:xfrm>
           <a:prstGeom prst="rect">
             <a:avLst/>
@@ -7106,14 +7095,14 @@
       </p:pic>
       <p:sp>
         <p:nvSpPr>
-          <p:cNvPr id="11" name="问题标题2"/>
-          <p:cNvSpPr txBox="1"/>
-          <p:nvPr/>
-        </p:nvSpPr>
-        <p:spPr>
-          <a:xfrm>
-            <a:off x="5349240" y="1645920"/>
-            <a:ext cx="2286000" cy="640080"/>
+          <p:cNvPr id="12" name="问题标题2"/>
+          <p:cNvSpPr txBox="1"/>
+          <p:nvPr/>
+        </p:nvSpPr>
+        <p:spPr>
+          <a:xfrm>
+            <a:off x="5303520" y="2057400"/>
+            <a:ext cx="2286000" cy="594360"/>
           </a:xfrm>
           <a:prstGeom prst="rect">
             <a:avLst/>
@@ -7142,14 +7131,14 @@
       </p:sp>
       <p:sp>
         <p:nvSpPr>
-          <p:cNvPr id="12" name="问题内容2"/>
-          <p:cNvSpPr txBox="1"/>
-          <p:nvPr/>
-        </p:nvSpPr>
-        <p:spPr>
-          <a:xfrm>
-            <a:off x="4572000" y="2423160"/>
-            <a:ext cx="2926080" cy="868680"/>
+          <p:cNvPr id="13" name="问题内容2"/>
+          <p:cNvSpPr txBox="1"/>
+          <p:nvPr/>
+        </p:nvSpPr>
+        <p:spPr>
+          <a:xfrm>
+            <a:off x="4572000" y="2743200"/>
+            <a:ext cx="2926080" cy="777240"/>
           </a:xfrm>
           <a:prstGeom prst="rect">
             <a:avLst/>
@@ -7178,18 +7167,18 @@
       </p:sp>
       <p:sp>
         <p:nvSpPr>
-          <p:cNvPr id="13" name="问题卡3"/>
+          <p:cNvPr id="14" name="问题卡3"/>
           <p:cNvSpPr/>
           <p:nvPr/>
         </p:nvSpPr>
         <p:spPr>
           <a:xfrm>
-            <a:off x="8046720" y="1371600"/>
-            <a:ext cx="3474720" cy="2011680"/>
+            <a:off x="8046720" y="1874520"/>
+            <a:ext cx="3474720" cy="1783080"/>
           </a:xfrm>
           <a:prstGeom prst="roundRect">
             <a:avLst>
-              <a:gd name="adj" fmla="val 5455"/>
+              <a:gd name="adj" fmla="val 6154"/>
             </a:avLst>
           </a:prstGeom>
           <a:solidFill>
@@ -7205,14 +7194,14 @@
       </p:sp>
       <p:sp>
         <p:nvSpPr>
-          <p:cNvPr id="14" name="图标底"/>
+          <p:cNvPr id="15" name="图标底"/>
           <p:cNvSpPr/>
           <p:nvPr/>
         </p:nvSpPr>
         <p:spPr>
           <a:xfrm>
-            <a:off x="8321040" y="1645920"/>
-            <a:ext cx="640080" cy="640080"/>
+            <a:off x="8321040" y="2057400"/>
+            <a:ext cx="594360" cy="594360"/>
           </a:xfrm>
           <a:prstGeom prst="ellipse">
             <a:avLst/>
@@ -7230,7 +7219,7 @@
       </p:sp>
       <p:pic>
         <p:nvPicPr>
-          <p:cNvPr id="15" name="图标" descr="preencoded.png">    </p:cNvPr>
+          <p:cNvPr id="16" name="图标" descr="preencoded.png">    </p:cNvPr>
           <p:cNvPicPr>
             <a:picLocks noChangeAspect="1"/>
           </p:cNvPicPr>
@@ -7244,8 +7233,8 @@
         </p:blipFill>
         <p:spPr>
           <a:xfrm>
-            <a:off x="8481060" y="1805940"/>
-            <a:ext cx="320040" cy="320040"/>
+            <a:off x="8469630" y="2205990"/>
+            <a:ext cx="297180" cy="297180"/>
           </a:xfrm>
           <a:prstGeom prst="rect">
             <a:avLst/>
@@ -7254,14 +7243,14 @@
       </p:pic>
       <p:sp>
         <p:nvSpPr>
-          <p:cNvPr id="16" name="问题标题3"/>
-          <p:cNvSpPr txBox="1"/>
-          <p:nvPr/>
-        </p:nvSpPr>
-        <p:spPr>
-          <a:xfrm>
-            <a:off x="9098280" y="1645920"/>
-            <a:ext cx="2286000" cy="640080"/>
+          <p:cNvPr id="17" name="问题标题3"/>
+          <p:cNvSpPr txBox="1"/>
+          <p:nvPr/>
+        </p:nvSpPr>
+        <p:spPr>
+          <a:xfrm>
+            <a:off x="9052560" y="2057400"/>
+            <a:ext cx="2286000" cy="594360"/>
           </a:xfrm>
           <a:prstGeom prst="rect">
             <a:avLst/>
@@ -7290,14 +7279,14 @@
       </p:sp>
       <p:sp>
         <p:nvSpPr>
-          <p:cNvPr id="17" name="问题内容3"/>
-          <p:cNvSpPr txBox="1"/>
-          <p:nvPr/>
-        </p:nvSpPr>
-        <p:spPr>
-          <a:xfrm>
-            <a:off x="8321040" y="2423160"/>
-            <a:ext cx="2926080" cy="868680"/>
+          <p:cNvPr id="18" name="问题内容3"/>
+          <p:cNvSpPr txBox="1"/>
+          <p:nvPr/>
+        </p:nvSpPr>
+        <p:spPr>
+          <a:xfrm>
+            <a:off x="8321040" y="2743200"/>
+            <a:ext cx="2926080" cy="777240"/>
           </a:xfrm>
           <a:prstGeom prst="rect">
             <a:avLst/>
@@ -7326,18 +7315,18 @@
       </p:sp>
       <p:sp>
         <p:nvSpPr>
-          <p:cNvPr id="18" name="机构与主张"/>
+          <p:cNvPr id="19" name="机构与主张"/>
           <p:cNvSpPr/>
           <p:nvPr/>
         </p:nvSpPr>
         <p:spPr>
           <a:xfrm>
-            <a:off x="548640" y="3657600"/>
-            <a:ext cx="11064240" cy="2103120"/>
+            <a:off x="548640" y="3886200"/>
+            <a:ext cx="11064240" cy="1920240"/>
           </a:xfrm>
           <a:prstGeom prst="roundRect">
             <a:avLst>
-              <a:gd name="adj" fmla="val 5217"/>
+              <a:gd name="adj" fmla="val 5714"/>
             </a:avLst>
           </a:prstGeom>
           <a:solidFill>
@@ -7353,13 +7342,13 @@
       </p:sp>
       <p:sp>
         <p:nvSpPr>
-          <p:cNvPr id="19" name="图标底"/>
+          <p:cNvPr id="20" name="图标底"/>
           <p:cNvSpPr/>
           <p:nvPr/>
         </p:nvSpPr>
         <p:spPr>
           <a:xfrm>
-            <a:off x="868680" y="4069080"/>
+            <a:off x="868680" y="4206240"/>
             <a:ext cx="548640" cy="548640"/>
           </a:xfrm>
           <a:prstGeom prst="ellipse">
@@ -7378,7 +7367,7 @@
       </p:sp>
       <p:pic>
         <p:nvPicPr>
-          <p:cNvPr id="20" name="图标" descr="preencoded.png">    </p:cNvPr>
+          <p:cNvPr id="21" name="图标" descr="preencoded.png">    </p:cNvPr>
           <p:cNvPicPr>
             <a:picLocks noChangeAspect="1"/>
           </p:cNvPicPr>
@@ -7392,7 +7381,7 @@
         </p:blipFill>
         <p:spPr>
           <a:xfrm>
-            <a:off x="1005840" y="4206240"/>
+            <a:off x="1005840" y="4343400"/>
             <a:ext cx="274320" cy="274320"/>
           </a:xfrm>
           <a:prstGeom prst="rect">
@@ -7402,14 +7391,14 @@
       </p:pic>
       <p:sp>
         <p:nvSpPr>
-          <p:cNvPr id="21" name="机构说明"/>
-          <p:cNvSpPr txBox="1"/>
-          <p:nvPr/>
-        </p:nvSpPr>
-        <p:spPr>
-          <a:xfrm>
-            <a:off x="1600200" y="3886200"/>
-            <a:ext cx="4206240" cy="1645920"/>
+          <p:cNvPr id="22" name="机构说明"/>
+          <p:cNvSpPr txBox="1"/>
+          <p:nvPr/>
+        </p:nvSpPr>
+        <p:spPr>
+          <a:xfrm>
+            <a:off x="1600200" y="4023360"/>
+            <a:ext cx="4297680" cy="1645920"/>
           </a:xfrm>
           <a:prstGeom prst="rect">
             <a:avLst/>
@@ -7450,7 +7439,7 @@
                   <a:schemeClr val="bg1"/>
                 </a:solidFill>
               </a:rPr>
-              <a:t>Gracenote，尼尔森旗下的内容数据业务，向媒体公司出售节目元数据：片名、简介、在哪个平台播出。</a:t>
+              <a:t>Gracenote，属于尼尔森（全球最大的收视率调查公司），专门给电视和流媒体平台提供节目资料：片名、简介、在哪能看。</a:t>
             </a:r>
             <a:endParaRPr lang="en-US" sz="1600" dirty="0"/>
           </a:p>
@@ -7458,13 +7447,13 @@
       </p:sp>
       <p:sp>
         <p:nvSpPr>
-          <p:cNvPr id="22" name="图标底"/>
+          <p:cNvPr id="23" name="图标底"/>
           <p:cNvSpPr/>
           <p:nvPr/>
         </p:nvSpPr>
         <p:spPr>
           <a:xfrm>
-            <a:off x="6263640" y="4069080"/>
+            <a:off x="6263640" y="4206240"/>
             <a:ext cx="548640" cy="548640"/>
           </a:xfrm>
           <a:prstGeom prst="ellipse">
@@ -7483,7 +7472,7 @@
       </p:sp>
       <p:pic>
         <p:nvPicPr>
-          <p:cNvPr id="23" name="图标" descr="preencoded.png">    </p:cNvPr>
+          <p:cNvPr id="24" name="图标" descr="preencoded.png">    </p:cNvPr>
           <p:cNvPicPr>
             <a:picLocks noChangeAspect="1"/>
           </p:cNvPicPr>
@@ -7497,7 +7486,7 @@
         </p:blipFill>
         <p:spPr>
           <a:xfrm>
-            <a:off x="6400800" y="4206240"/>
+            <a:off x="6400800" y="4343400"/>
             <a:ext cx="274320" cy="274320"/>
           </a:xfrm>
           <a:prstGeom prst="rect">
@@ -7507,13 +7496,13 @@
       </p:pic>
       <p:sp>
         <p:nvSpPr>
-          <p:cNvPr id="24" name="报告主张"/>
-          <p:cNvSpPr txBox="1"/>
-          <p:nvPr/>
-        </p:nvSpPr>
-        <p:spPr>
-          <a:xfrm>
-            <a:off x="6995160" y="3886200"/>
+          <p:cNvPr id="25" name="报告主张"/>
+          <p:cNvSpPr txBox="1"/>
+          <p:nvPr/>
+        </p:nvSpPr>
+        <p:spPr>
+          <a:xfrm>
+            <a:off x="6995160" y="4023360"/>
             <a:ext cx="4389120" cy="1645920"/>
           </a:xfrm>
           <a:prstGeom prst="rect">
@@ -7555,7 +7544,7 @@
                   <a:schemeClr val="bg1"/>
                 </a:solidFill>
               </a:rPr>
-              <a:t>AI 会成为找节目的入口，但必须接入可信的行业数据——这正是 Gracenote 卖的东西。</a:t>
+              <a:t>AI 会成为人们找节目的入口，但必须接入可信的行业数据——这正是 Gracenote 卖的东西。</a:t>
             </a:r>
             <a:endParaRPr lang="en-US" sz="1600" dirty="0"/>
           </a:p>
@@ -7726,7 +7715,7 @@
                   <a:schemeClr val="tx2"/>
                 </a:solidFill>
               </a:rPr>
-              <a:t>2026 生成式 AI 使用调查</a:t>
+              <a:t>调查一：2026 年 AI 使用调查</a:t>
             </a:r>
             <a:endParaRPr lang="en-US" sz="1800" dirty="0"/>
           </a:p>
@@ -7740,7 +7729,7 @@
                   <a:schemeClr val="accent5"/>
                 </a:solidFill>
               </a:rPr>
-              <a:t>支撑所有 AI 相关结论</a:t>
+              <a:t>报告里所有关于 AI 的数字都来自这里</a:t>
             </a:r>
             <a:endParaRPr lang="en-US" sz="1800" dirty="0"/>
           </a:p>
@@ -8190,7 +8179,7 @@
                   <a:schemeClr val="tx2"/>
                 </a:solidFill>
               </a:rPr>
-              <a:t>2025 流媒体消费者调查</a:t>
+              <a:t>调查二：2025 年六国流媒体调查</a:t>
             </a:r>
             <a:endParaRPr lang="en-US" sz="1800" dirty="0"/>
           </a:p>
@@ -8204,7 +8193,7 @@
                   <a:schemeClr val="accent5"/>
                 </a:solidFill>
               </a:rPr>
-              <a:t>支撑“找节目难”“会退订”等结论</a:t>
+              <a:t>“找节目难”“会退订”等数字来自这里</a:t>
             </a:r>
             <a:endParaRPr lang="en-US" sz="1800" dirty="0"/>
           </a:p>
@@ -8627,7 +8616,7 @@
                   <a:schemeClr val="tx1"/>
                 </a:solidFill>
               </a:rPr>
-              <a:t>另外还用了尼尔森收视测量、Gracenote 节目数据库，以及 Pew、Deloitte、PwC 等外部研究，共 11 个来源（核查见附录一）。</a:t>
+              <a:t>此外还引用了尼尔森收视率数据、Gracenote 节目资料库，以及皮尤、德勤、普华永道等机构的研究，共 11 个来源（核查见附录一）。</a:t>
             </a:r>
             <a:endParaRPr lang="en-US" sz="1400" dirty="0"/>
           </a:p>
@@ -8663,7 +8652,7 @@
                   <a:schemeClr val="accent5"/>
                 </a:solidFill>
               </a:rPr>
-              <a:t>来源：报告第 23 页；Nielsen 新闻稿（2026.4）；Gracenote 2025《State of Play》第 20 页。</a:t>
+              <a:t>来源：报告的数据说明；尼尔森新闻稿（2026.4）；Gracenote 2025 年报告《State of Play》的数据说明。</a:t>
             </a:r>
             <a:endParaRPr lang="en-US" sz="1000" dirty="0"/>
           </a:p>
@@ -8873,7 +8862,7 @@
                   <a:schemeClr val="tx1"/>
                 </a:solidFill>
               </a:rPr>
-              <a:t>13–14 岁 AI 用户每天使用 AI 聊天机器人</a:t>
+              <a:t>13–14 岁 AI 用户每天都用（报告称为“Alpha 世代”）</a:t>
             </a:r>
             <a:endParaRPr lang="en-US" sz="1500" dirty="0"/>
           </a:p>
@@ -8909,7 +8898,7 @@
                   <a:schemeClr val="accent5"/>
                 </a:solidFill>
               </a:rPr>
-              <a:t>2026 AI 调查</a:t>
+              <a:t>调查一</a:t>
             </a:r>
             <a:endParaRPr lang="en-US" sz="1100" dirty="0"/>
           </a:p>
@@ -9047,7 +9036,7 @@
                   <a:schemeClr val="accent5"/>
                 </a:solidFill>
               </a:rPr>
-              <a:t>2026 AI 调查</a:t>
+              <a:t>调查一</a:t>
             </a:r>
             <a:endParaRPr lang="en-US" sz="1100" dirty="0"/>
           </a:p>
@@ -9185,7 +9174,7 @@
                   <a:schemeClr val="accent5"/>
                 </a:solidFill>
               </a:rPr>
-              <a:t>2025 六国调查</a:t>
+              <a:t>调查二（六国）</a:t>
             </a:r>
             <a:endParaRPr lang="en-US" sz="1100" dirty="0"/>
           </a:p>
@@ -9323,7 +9312,7 @@
                   <a:schemeClr val="accent5"/>
                 </a:solidFill>
               </a:rPr>
-              <a:t>2025 六国调查</a:t>
+              <a:t>调查二（六国）</a:t>
             </a:r>
             <a:endParaRPr lang="en-US" sz="1100" dirty="0"/>
           </a:p>
@@ -9755,7 +9744,7 @@
                   <a:schemeClr val="accent5"/>
                 </a:solidFill>
               </a:rPr>
-              <a:t>来源：报告第 2、5、9、14、18 页。</a:t>
+              <a:t>来源：Gracenote 报告正文与图表。</a:t>
             </a:r>
             <a:endParaRPr lang="en-US" sz="1000" dirty="0"/>
           </a:p>
@@ -11248,7 +11237,7 @@
                   <a:schemeClr val="tx1"/>
                 </a:solidFill>
               </a:rPr>
-              <a:t>调查对象是“互联网和 AI 聊天机器人用户”，正文却常写成 “Americans”“U.S. consumers”。</a:t>
+              <a:t>调查的是“用 AI 聊天机器人的人”，正文却常把结论写成“美国人”如何如何。</a:t>
             </a:r>
             <a:endParaRPr lang="en-US" sz="1600" dirty="0"/>
           </a:p>
@@ -11304,7 +11293,7 @@
                   <a:schemeClr val="tx1"/>
                 </a:solidFill>
               </a:rPr>
-              <a:t>定义是 2010–2024 年出生，样本里只有 13–14 岁这两岁。</a:t>
+              <a:t>报告把 13–14 岁受访者叫作 Alpha 世代；这个世代其实指 2010–2024 年出生的所有人。</a:t>
             </a:r>
             <a:endParaRPr lang="en-US" sz="1600" dirty="0"/>
           </a:p>
@@ -11459,7 +11448,7 @@
                   <a:schemeClr val="accent5"/>
                 </a:solidFill>
               </a:rPr>
-              <a:t>来源：报告第 2、5、6、20、23 页；Nielsen 新闻稿（“Gen Alpha findings are based on respondents ages 13 and 14”）。</a:t>
+              <a:t>来源：Gracenote 报告；尼尔森新闻稿原文：“Gen Alpha findings are based on respondents ages 13 and 14”。</a:t>
             </a:r>
             <a:endParaRPr lang="en-US" sz="1000" dirty="0"/>
           </a:p>
@@ -11934,7 +11923,7 @@
                   <a:schemeClr val="tx1"/>
                 </a:solidFill>
               </a:rPr>
-              <a:t>六国简单平均：美国自己 12 分钟，法国 26 分钟拉高了平均。报告却把它和美国尼尔森收视数据画在同一张图里。</a:t>
+              <a:t>来自 Gracenote 去年的六国调查：美国 12 分钟，14 分钟是六国平均。这份报告却把它放进讲美国人看电视的图里。</a:t>
             </a:r>
             <a:endParaRPr lang="en-US" sz="1400" dirty="0"/>
           </a:p>
@@ -12033,7 +12022,7 @@
                   <a:schemeClr val="tx1"/>
                 </a:solidFill>
               </a:rPr>
-              <a:t>“18–34 岁可能退订”与六国数据吻合；“50% 的美国观众会考虑取消”，原文只找到六国 49%。</a:t>
+              <a:t>“18–34 岁可能退订”也是六国数字；报告另说“50% 的美国观众会考虑退订”，原始报告里只有六国的 49%。</a:t>
             </a:r>
             <a:endParaRPr lang="en-US" sz="1400" dirty="0"/>
           </a:p>
@@ -12132,7 +12121,7 @@
                   <a:schemeClr val="tx1"/>
                 </a:solidFill>
               </a:rPr>
-              <a:t>与六国平均一致；第 12 页同一题写成“34% 的美国人”。</a:t>
+              <a:t>同一道题，报告一处写 32%（六国平均），另一处写成“34% 的美国人”。</a:t>
             </a:r>
             <a:endParaRPr lang="en-US" sz="1400" dirty="0"/>
           </a:p>
@@ -12168,7 +12157,7 @@
                   <a:schemeClr val="accent5"/>
                 </a:solidFill>
               </a:rPr>
-              <a:t>来源：报告第 2、6、9、12 页；Gracenote 2025《State of Play》分国家、分年龄图表（每国 500 人）。</a:t>
+              <a:t>来源：Gracenote 报告；Gracenote 2025 年报告《State of Play》分国家、分年龄图表（每国 500 人）。</a:t>
             </a:r>
             <a:endParaRPr lang="en-US" sz="1000" dirty="0"/>
           </a:p>
@@ -12564,7 +12553,7 @@
                   <a:schemeClr val="tx2"/>
                 </a:solidFill>
               </a:rPr>
-              <a:t>报告原话：Pew 2025 年秋发现 30% 的青少年每天用聊天机器人，“仅仅几个月后”Gracenote 调查显示超过一半，说明使用频率“在加速”。</a:t>
+              <a:t>报告原话：皮尤研究中心 2025 年秋发现 30% 的青少年每天用 AI 聊天机器人，“仅仅几个月后”我们的调查显示超过一半，说明使用频率“在加速”。</a:t>
             </a:r>
             <a:endParaRPr lang="en-US" sz="1500" dirty="0"/>
           </a:p>
@@ -12627,7 +12616,7 @@
                   <a:schemeClr val="accent5"/>
                 </a:solidFill>
               </a:rPr>
-              <a:t>Pew 研究中心</a:t>
+              <a:t>皮尤研究中心（Pew，美国权威民调机构）</a:t>
             </a:r>
             <a:endParaRPr lang="en-US" sz="1600" dirty="0"/>
           </a:p>
@@ -12796,7 +12785,7 @@
                   <a:schemeClr val="accent1"/>
                 </a:solidFill>
               </a:rPr>
-              <a:t>Gracenote</a:t>
+              <a:t>Gracenote（本报告）</a:t>
             </a:r>
             <a:endParaRPr lang="en-US" sz="1600" dirty="0"/>
           </a:p>
@@ -13001,7 +12990,7 @@
                   <a:schemeClr val="accent6"/>
                 </a:solidFill>
               </a:rPr>
-              <a:t>换成同一分母（只看使用者）：</a:t>
+              <a:t>如果都只看用 AI 的人：</a:t>
             </a:r>
             <a:pPr indent="0" marL="0">
               <a:buNone/>
@@ -13012,7 +13001,7 @@
                   <a:schemeClr val="bg1"/>
                 </a:solidFill>
               </a:rPr>
-              <a:t>Pew 44% 对 Gracenote 54%，只差约 10 个百分点。剩下的差距还可能来自年龄、方法、时间不同，不能说明“加速”。</a:t>
+              <a:t>皮尤 44% 对 Gracenote 54%，只差约 10 个百分点。剩下的差距还可能来自年龄、方法、时间不同，不能说明“加速”。</a:t>
             </a:r>
             <a:endParaRPr lang="en-US" sz="1500" dirty="0"/>
           </a:p>
@@ -13048,7 +13037,7 @@
                   <a:schemeClr val="accent5"/>
                 </a:solidFill>
               </a:rPr>
-              <a:t>来源：报告第 14 页；Pew《Teens, Social Media and AI Chatbots 2025》数据表（全体每天 28%，13–14 岁 24%，使用者 44%）。</a:t>
+              <a:t>来源：Gracenote 报告；皮尤《Teens, Social Media and AI Chatbots 2025》数据表（全体每天 28%，13–14 岁 24%，使用者中 44%）。</a:t>
             </a:r>
             <a:endParaRPr lang="en-US" sz="1000" dirty="0"/>
           </a:p>
@@ -13156,7 +13145,7 @@
                   <a:schemeClr val="tx2"/>
                 </a:solidFill>
               </a:rPr>
-              <a:t>方法：四种数据串成一条因果链</a:t>
+              <a:t>方法：四种数据拼成一条因果链</a:t>
             </a:r>
             <a:endParaRPr lang="en-US" sz="3000" dirty="0"/>
           </a:p>
@@ -13546,7 +13535,7 @@
                   <a:schemeClr val="tx1"/>
                 </a:solidFill>
               </a:rPr>
-              <a:t>18–34 岁“可能会退订”</a:t>
+              <a:t>18–34 岁说“可能会退订”</a:t>
             </a:r>
             <a:endParaRPr lang="en-US" sz="1400" dirty="0"/>
           </a:p>
@@ -13563,7 +13552,7 @@
                   <a:schemeClr val="accent3"/>
                 </a:solidFill>
               </a:rPr>
-              <a:t>六国口径</a:t>
+              <a:t>六国数字</a:t>
             </a:r>
             <a:endParaRPr lang="en-US" sz="1400" dirty="0"/>
           </a:p>
@@ -13662,7 +13651,7 @@
                   <a:schemeClr val="accent2"/>
                 </a:solidFill>
               </a:rPr>
-              <a:t>行为 · 行业指标</a:t>
+              <a:t>行为 · 行业统计</a:t>
             </a:r>
             <a:endParaRPr lang="en-US" sz="1400" dirty="0"/>
           </a:p>
@@ -13737,7 +13726,7 @@
                   <a:schemeClr val="tx1"/>
                 </a:solidFill>
               </a:rPr>
-              <a:t>主要平台月流失率</a:t>
+              <a:t>流媒体平台每月退订率</a:t>
             </a:r>
             <a:endParaRPr lang="en-US" sz="1400" dirty="0"/>
           </a:p>
@@ -13754,7 +13743,7 @@
                   <a:schemeClr val="accent3"/>
                 </a:solidFill>
               </a:rPr>
-              <a:t>定义未公开；另一机构测得 2019 年已是 4.1%</a:t>
+              <a:t>算法未公开；另一机构测得 2019 年已是 4.1%</a:t>
             </a:r>
             <a:endParaRPr lang="en-US" sz="1400" dirty="0"/>
           </a:p>
@@ -13853,7 +13842,7 @@
                   <a:schemeClr val="tx2"/>
                 </a:solidFill>
               </a:rPr>
-              <a:t>预测 · 模型</a:t>
+              <a:t>预测 · 普华永道</a:t>
             </a:r>
             <a:endParaRPr lang="en-US" sz="1400" dirty="0"/>
           </a:p>
@@ -13928,7 +13917,7 @@
                   <a:schemeClr val="tx1"/>
                 </a:solidFill>
               </a:rPr>
-              <a:t>OTT + 付费电视 2029 年支出</a:t>
+              <a:t>网络视频与付费电视 2029 年总支出</a:t>
             </a:r>
             <a:endParaRPr lang="en-US" sz="1400" dirty="0"/>
           </a:p>
@@ -13945,7 +13934,7 @@
                   <a:schemeClr val="accent3"/>
                 </a:solidFill>
               </a:rPr>
-              <a:t>PwC 的全球数字，不是美国</a:t>
+              <a:t>全球数字，不是美国</a:t>
             </a:r>
             <a:endParaRPr lang="en-US" sz="1400" dirty="0"/>
           </a:p>
@@ -14044,7 +14033,7 @@
                   <a:schemeClr val="accent5"/>
                 </a:solidFill>
               </a:rPr>
-              <a:t>测试 · 机器</a:t>
+              <a:t>测试 · 让 AI 答题</a:t>
             </a:r>
             <a:endParaRPr lang="en-US" sz="1400" dirty="0"/>
           </a:p>
@@ -14119,7 +14108,7 @@
                   <a:schemeClr val="tx1"/>
                 </a:solidFill>
               </a:rPr>
-              <a:t>聊天机器人找对播出平台</a:t>
+              <a:t>AI 答对了剧在哪个平台能看</a:t>
             </a:r>
             <a:endParaRPr lang="en-US" sz="1400" dirty="0"/>
           </a:p>
@@ -14219,7 +14208,7 @@
                   <a:schemeClr val="tx1"/>
                 </a:solidFill>
               </a:rPr>
-              <a:t>没有追踪同一批人，也没有做实验，证明不了“找不到 → 退订”；“接入 MCP 信息就不会过时”也没有检验。</a:t>
+              <a:t>四种数据对象不同、性质不同，也没追踪同一批人或做实验，证明不了“找不到 → 退订”；报告提出的办法（让 AI 接入行业数据库）也没有检验效果。</a:t>
             </a:r>
             <a:endParaRPr lang="en-US" sz="1600" dirty="0"/>
           </a:p>
@@ -14302,7 +14291,7 @@
                   <a:schemeClr val="tx1"/>
                 </a:solidFill>
               </a:rPr>
-              <a:t>USC 的 38%：只是一个知识库、一个自动指标（与人工判断一致率 60.9%）。Deloitte 的 41%：分母是全体消费者，报告写成“订户”。</a:t>
+              <a:t>南加州大学研究的“38% 数据有偏差”，只是一个知识库、一个自动打分指标的结果；德勤的“41% 觉得不值”指全体消费者，报告写成了“订户”。</a:t>
             </a:r>
             <a:endParaRPr lang="en-US" sz="1600" dirty="0"/>
           </a:p>
@@ -14338,7 +14327,7 @@
                   <a:schemeClr val="accent5"/>
                 </a:solidFill>
               </a:rPr>
-              <a:t>来源：报告第 5、6、9、22 页；PwC、Veed（作者原文与 NAB 2026）、USC 论文（EMNLP 2021）、Deloitte 方法说明；Antenna 数据经 MediaPost 转述。</a:t>
+              <a:t>来源：Gracenote 报告；普华永道（PwC）、Veed Analytics 测试、南加州大学论文（EMNLP 2021）、德勤（Deloitte）原文；Antenna 数据经 MediaPost 转述。</a:t>
             </a:r>
             <a:endParaRPr lang="en-US" sz="1000" dirty="0"/>
           </a:p>
